--- a/paper/A7_slides.pptx
+++ b/paper/A7_slides.pptx
@@ -146,13 +146,13 @@
           </c:tx>
           <c:spPr>
             <a:solidFill>
-              <a:srgbClr val="5A6B73"/>
+              <a:srgbClr val="68808B"/>
             </a:solidFill>
             <a:effectLst/>
           </c:spPr>
           <c:invertIfNegative val="0"/>
           <c:dLbls>
-            <c:numFmt formatCode="#,##0" sourceLinked="0"/>
+            <c:numFmt formatCode="0.00" sourceLinked="0"/>
             <c:txPr>
               <a:bodyPr/>
               <a:lstStyle/>
@@ -160,7 +160,7 @@
                 <a:pPr>
                   <a:defRPr b="0" i="0" strike="noStrike" sz="1400" u="none">
                     <a:solidFill>
-                      <a:srgbClr val="0B2B3A"/>
+                      <a:srgbClr val="12333F"/>
                     </a:solidFill>
                     <a:latin typeface="Calibri"/>
                   </a:defRPr>
@@ -181,7 +181,7 @@
             <c:bubble3D val="0"/>
             <c:spPr>
               <a:solidFill>
-                <a:srgbClr val="5A6B73"/>
+                <a:srgbClr val="68808B"/>
               </a:solidFill>
               <a:effectLst/>
             </c:spPr>
@@ -192,7 +192,7 @@
             <c:bubble3D val="0"/>
             <c:spPr>
               <a:solidFill>
-                <a:srgbClr val="5A6B73"/>
+                <a:srgbClr val="68808B"/>
               </a:solidFill>
               <a:effectLst/>
             </c:spPr>
@@ -203,7 +203,7 @@
             <c:bubble3D val="0"/>
             <c:spPr>
               <a:solidFill>
-                <a:srgbClr val="065A82"/>
+                <a:srgbClr val="0B6E8C"/>
               </a:solidFill>
               <a:effectLst/>
             </c:spPr>
@@ -214,7 +214,7 @@
             <c:bubble3D val="0"/>
             <c:spPr>
               <a:solidFill>
-                <a:srgbClr val="00A896"/>
+                <a:srgbClr val="17A398"/>
               </a:solidFill>
               <a:effectLst/>
             </c:spPr>
@@ -226,20 +226,16 @@
                 <c:ptCount val="4"/>
                 <c:lvl>
                   <c:pt idx="0">
-                    <c:v>Global mean
-(baseline)</c:v>
+                    <c:v>Global mean</c:v>
                   </c:pt>
                   <c:pt idx="1">
-                    <c:v>Vehicle-size
-mean</c:v>
+                    <c:v>Vehicle-size mean</c:v>
                   </c:pt>
                   <c:pt idx="2">
-                    <c:v>Planning
-model</c:v>
+                    <c:v>Planning model</c:v>
                   </c:pt>
                   <c:pt idx="3">
-                    <c:v>On-site
-model</c:v>
+                    <c:v>On-site model</c:v>
                   </c:pt>
                 </c:lvl>
               </c:multiLvlStrCache>
@@ -268,7 +264,7 @@
           </c:val>
         </c:ser>
         <c:dLbls>
-          <c:numFmt formatCode="#,##0" sourceLinked="0"/>
+          <c:numFmt formatCode="0.00" sourceLinked="0"/>
           <c:txPr>
             <a:bodyPr/>
             <a:lstStyle/>
@@ -276,7 +272,7 @@
               <a:pPr>
                 <a:defRPr b="0" i="0" strike="noStrike" sz="1400" u="none">
                   <a:solidFill>
-                    <a:srgbClr val="0B2B3A"/>
+                    <a:srgbClr val="12333F"/>
                   </a:solidFill>
                   <a:latin typeface="Calibri"/>
                 </a:defRPr>
@@ -291,7 +287,7 @@
           <c:showBubbleSize val="0"/>
           <c:showLeaderLines val="0"/>
         </c:dLbls>
-        <c:gapWidth val="150"/>
+        <c:gapWidth val="55"/>
         <c:overlap val="0"/>
         <c:axId val="2094734554"/>
         <c:axId val="2094734552"/>
@@ -324,7 +320,7 @@
             <a:pPr>
               <a:defRPr sz="1400" b="0" i="0" u="none" strike="noStrike">
                 <a:solidFill>
-                  <a:srgbClr val="5A6B73"/>
+                  <a:srgbClr val="68808B"/>
                 </a:solidFill>
                 <a:latin typeface="Calibri"/>
               </a:defRPr>
@@ -349,7 +345,7 @@
           <c:spPr>
             <a:ln w="12700" cap="flat">
               <a:solidFill>
-                <a:srgbClr val="DDE6EA"/>
+                <a:srgbClr val="E2EBEF"/>
               </a:solidFill>
               <a:prstDash val="solid"/>
               <a:round/>
@@ -365,7 +361,7 @@
                 <a:pPr>
                   <a:defRPr sz="1400" b="0" i="0" u="none" strike="noStrike">
                     <a:solidFill>
-                      <a:srgbClr val="5A6B73"/>
+                      <a:srgbClr val="68808B"/>
                     </a:solidFill>
                     <a:latin typeface="Calibri"/>
                   </a:defRPr>
@@ -373,7 +369,7 @@
                 <a:r>
                   <a:rPr sz="1400" b="0" i="0" u="none" strike="noStrike">
                     <a:solidFill>
-                      <a:srgbClr val="5A6B73"/>
+                      <a:srgbClr val="68808B"/>
                     </a:solidFill>
                     <a:latin typeface="Calibri"/>
                   </a:rPr>
@@ -405,7 +401,7 @@
             <a:pPr>
               <a:defRPr sz="1400" b="0" i="0" u="none" strike="noStrike">
                 <a:solidFill>
-                  <a:srgbClr val="5A6B73"/>
+                  <a:srgbClr val="68808B"/>
                 </a:solidFill>
                 <a:latin typeface="Calibri"/>
               </a:defRPr>
@@ -418,7 +414,9 @@
         <c:crossBetween val="between"/>
       </c:valAx>
       <c:spPr>
-        <a:noFill/>
+        <a:solidFill>
+          <a:srgbClr val="FFFFFF"/>
+        </a:solidFill>
         <a:ln>
           <a:noFill/>
         </a:ln>
@@ -429,7 +427,9 @@
     <c:dispBlanksAs val="span"/>
   </c:chart>
   <c:spPr>
-    <a:noFill/>
+    <a:solidFill>
+      <a:srgbClr val="FFFFFF"/>
+    </a:solidFill>
     <a:ln>
       <a:noFill/>
     </a:ln>
@@ -469,7 +469,7 @@
           </c:tx>
           <c:spPr>
             <a:solidFill>
-              <a:srgbClr val="5A6B73"/>
+              <a:srgbClr val="68808B"/>
             </a:solidFill>
             <a:effectLst/>
           </c:spPr>
@@ -483,7 +483,7 @@
                 <a:pPr>
                   <a:defRPr b="0" i="0" strike="noStrike" sz="1400" u="none">
                     <a:solidFill>
-                      <a:srgbClr val="0B2B3A"/>
+                      <a:srgbClr val="12333F"/>
                     </a:solidFill>
                     <a:latin typeface="Calibri"/>
                   </a:defRPr>
@@ -552,7 +552,7 @@
           </c:tx>
           <c:spPr>
             <a:solidFill>
-              <a:srgbClr val="065A82"/>
+              <a:srgbClr val="0B6E8C"/>
             </a:solidFill>
             <a:effectLst/>
           </c:spPr>
@@ -566,7 +566,7 @@
                 <a:pPr>
                   <a:defRPr b="0" i="0" strike="noStrike" sz="1400" u="none">
                     <a:solidFill>
-                      <a:srgbClr val="0B2B3A"/>
+                      <a:srgbClr val="12333F"/>
                     </a:solidFill>
                     <a:latin typeface="Calibri"/>
                   </a:defRPr>
@@ -628,7 +628,7 @@
               <a:pPr>
                 <a:defRPr b="0" i="0" strike="noStrike" sz="1400" u="none">
                   <a:solidFill>
-                    <a:srgbClr val="0B2B3A"/>
+                    <a:srgbClr val="12333F"/>
                   </a:solidFill>
                   <a:latin typeface="Calibri"/>
                 </a:defRPr>
@@ -643,7 +643,7 @@
           <c:showBubbleSize val="0"/>
           <c:showLeaderLines val="0"/>
         </c:dLbls>
-        <c:gapWidth val="150"/>
+        <c:gapWidth val="55"/>
         <c:overlap val="0"/>
         <c:axId val="2094734554"/>
         <c:axId val="2094734552"/>
@@ -676,7 +676,7 @@
             <a:pPr>
               <a:defRPr sz="1400" b="0" i="0" u="none" strike="noStrike">
                 <a:solidFill>
-                  <a:srgbClr val="5A6B73"/>
+                  <a:srgbClr val="68808B"/>
                 </a:solidFill>
                 <a:latin typeface="Calibri"/>
               </a:defRPr>
@@ -701,7 +701,7 @@
           <c:spPr>
             <a:ln w="12700" cap="flat">
               <a:solidFill>
-                <a:srgbClr val="DDE6EA"/>
+                <a:srgbClr val="E2EBEF"/>
               </a:solidFill>
               <a:prstDash val="solid"/>
               <a:round/>
@@ -717,7 +717,7 @@
                 <a:pPr>
                   <a:defRPr sz="1400" b="0" i="0" u="none" strike="noStrike">
                     <a:solidFill>
-                      <a:srgbClr val="5A6B73"/>
+                      <a:srgbClr val="68808B"/>
                     </a:solidFill>
                     <a:latin typeface="Calibri"/>
                   </a:defRPr>
@@ -725,7 +725,7 @@
                 <a:r>
                   <a:rPr sz="1400" b="0" i="0" u="none" strike="noStrike">
                     <a:solidFill>
-                      <a:srgbClr val="5A6B73"/>
+                      <a:srgbClr val="68808B"/>
                     </a:solidFill>
                     <a:latin typeface="Calibri"/>
                   </a:rPr>
@@ -757,7 +757,7 @@
             <a:pPr>
               <a:defRPr sz="1400" b="0" i="0" u="none" strike="noStrike">
                 <a:solidFill>
-                  <a:srgbClr val="5A6B73"/>
+                  <a:srgbClr val="68808B"/>
                 </a:solidFill>
                 <a:latin typeface="Calibri"/>
               </a:defRPr>
@@ -770,7 +770,9 @@
         <c:crossBetween val="between"/>
       </c:valAx>
       <c:spPr>
-        <a:noFill/>
+        <a:solidFill>
+          <a:srgbClr val="FFFFFF"/>
+        </a:solidFill>
         <a:ln>
           <a:noFill/>
         </a:ln>
@@ -785,7 +787,10 @@
         <a:lstStyle/>
         <a:p>
           <a:pPr>
-            <a:defRPr sz="1600">
+            <a:defRPr sz="1400">
+              <a:solidFill>
+                <a:srgbClr val="68808B"/>
+              </a:solidFill>
               <a:latin typeface="Calibri"/>
               <a:cs typeface="Calibri"/>
             </a:defRPr>
@@ -798,7 +803,9 @@
     <c:dispBlanksAs val="span"/>
   </c:chart>
   <c:spPr>
-    <a:noFill/>
+    <a:solidFill>
+      <a:srgbClr val="FFFFFF"/>
+    </a:solidFill>
     <a:ln>
       <a:noFill/>
     </a:ln>
@@ -831,20 +838,20 @@
               <c:strCache>
                 <c:ptCount val="1"/>
                 <c:pt idx="0">
-                  <c:v>Crew-days that overflow the tank (%)</c:v>
+                  <c:v>Crew-days that run dry (%)</c:v>
                 </c:pt>
               </c:strCache>
             </c:strRef>
           </c:tx>
           <c:spPr>
             <a:solidFill>
-              <a:srgbClr val="5A6B73"/>
+              <a:srgbClr val="68808B"/>
             </a:solidFill>
             <a:effectLst/>
           </c:spPr>
           <c:invertIfNegative val="0"/>
           <c:dLbls>
-            <c:numFmt formatCode="#,##0" sourceLinked="0"/>
+            <c:numFmt formatCode="0.0" sourceLinked="0"/>
             <c:txPr>
               <a:bodyPr/>
               <a:lstStyle/>
@@ -852,7 +859,7 @@
                 <a:pPr>
                   <a:defRPr b="0" i="0" strike="noStrike" sz="1400" u="none">
                     <a:solidFill>
-                      <a:srgbClr val="0B2B3A"/>
+                      <a:srgbClr val="12333F"/>
                     </a:solidFill>
                     <a:latin typeface="Calibri"/>
                   </a:defRPr>
@@ -873,7 +880,7 @@
             <c:bubble3D val="0"/>
             <c:spPr>
               <a:solidFill>
-                <a:srgbClr val="5A6B73"/>
+                <a:srgbClr val="68808B"/>
               </a:solidFill>
               <a:effectLst/>
             </c:spPr>
@@ -884,7 +891,7 @@
             <c:bubble3D val="0"/>
             <c:spPr>
               <a:solidFill>
-                <a:srgbClr val="5A6B73"/>
+                <a:srgbClr val="68808B"/>
               </a:solidFill>
               <a:effectLst/>
             </c:spPr>
@@ -895,7 +902,7 @@
             <c:bubble3D val="0"/>
             <c:spPr>
               <a:solidFill>
-                <a:srgbClr val="D9532B"/>
+                <a:srgbClr val="C25332"/>
               </a:solidFill>
               <a:effectLst/>
             </c:spPr>
@@ -906,7 +913,7 @@
             <c:bubble3D val="0"/>
             <c:spPr>
               <a:solidFill>
-                <a:srgbClr val="00A896"/>
+                <a:srgbClr val="17A398"/>
               </a:solidFill>
               <a:effectLst/>
             </c:spPr>
@@ -921,16 +928,13 @@
                     <c:v>Booked order</c:v>
                   </c:pt>
                   <c:pt idx="1">
-                    <c:v>Greedy by
-value density</c:v>
+                    <c:v>Greedy by value</c:v>
                   </c:pt>
                   <c:pt idx="2">
-                    <c:v>Exact
-knapsack</c:v>
+                    <c:v>Exact knapsack</c:v>
                   </c:pt>
                   <c:pt idx="3">
-                    <c:v>Exact knapsack,
-planned on interval</c:v>
+                    <c:v>Knapsack on interval</c:v>
                   </c:pt>
                 </c:lvl>
               </c:multiLvlStrCache>
@@ -959,7 +963,7 @@
           </c:val>
         </c:ser>
         <c:dLbls>
-          <c:numFmt formatCode="#,##0" sourceLinked="0"/>
+          <c:numFmt formatCode="0.0" sourceLinked="0"/>
           <c:txPr>
             <a:bodyPr/>
             <a:lstStyle/>
@@ -967,7 +971,7 @@
               <a:pPr>
                 <a:defRPr b="0" i="0" strike="noStrike" sz="1400" u="none">
                   <a:solidFill>
-                    <a:srgbClr val="0B2B3A"/>
+                    <a:srgbClr val="12333F"/>
                   </a:solidFill>
                   <a:latin typeface="Calibri"/>
                 </a:defRPr>
@@ -982,7 +986,7 @@
           <c:showBubbleSize val="0"/>
           <c:showLeaderLines val="0"/>
         </c:dLbls>
-        <c:gapWidth val="150"/>
+        <c:gapWidth val="55"/>
         <c:overlap val="0"/>
         <c:axId val="2094734554"/>
         <c:axId val="2094734552"/>
@@ -1015,7 +1019,7 @@
             <a:pPr>
               <a:defRPr sz="1400" b="0" i="0" u="none" strike="noStrike">
                 <a:solidFill>
-                  <a:srgbClr val="5A6B73"/>
+                  <a:srgbClr val="68808B"/>
                 </a:solidFill>
                 <a:latin typeface="Calibri"/>
               </a:defRPr>
@@ -1040,7 +1044,7 @@
           <c:spPr>
             <a:ln w="12700" cap="flat">
               <a:solidFill>
-                <a:srgbClr val="DDE6EA"/>
+                <a:srgbClr val="E2EBEF"/>
               </a:solidFill>
               <a:prstDash val="solid"/>
               <a:round/>
@@ -1056,7 +1060,7 @@
                 <a:pPr>
                   <a:defRPr sz="1400" b="0" i="0" u="none" strike="noStrike">
                     <a:solidFill>
-                      <a:srgbClr val="5A6B73"/>
+                      <a:srgbClr val="68808B"/>
                     </a:solidFill>
                     <a:latin typeface="Calibri"/>
                   </a:defRPr>
@@ -1064,7 +1068,7 @@
                 <a:r>
                   <a:rPr sz="1400" b="0" i="0" u="none" strike="noStrike">
                     <a:solidFill>
-                      <a:srgbClr val="5A6B73"/>
+                      <a:srgbClr val="68808B"/>
                     </a:solidFill>
                     <a:latin typeface="Calibri"/>
                   </a:rPr>
@@ -1096,7 +1100,7 @@
             <a:pPr>
               <a:defRPr sz="1400" b="0" i="0" u="none" strike="noStrike">
                 <a:solidFill>
-                  <a:srgbClr val="5A6B73"/>
+                  <a:srgbClr val="68808B"/>
                 </a:solidFill>
                 <a:latin typeface="Calibri"/>
               </a:defRPr>
@@ -1109,7 +1113,9 @@
         <c:crossBetween val="between"/>
       </c:valAx>
       <c:spPr>
-        <a:noFill/>
+        <a:solidFill>
+          <a:srgbClr val="FFFFFF"/>
+        </a:solidFill>
         <a:ln>
           <a:noFill/>
         </a:ln>
@@ -1120,7 +1126,9 @@
     <c:dispBlanksAs val="span"/>
   </c:chart>
   <c:spPr>
-    <a:noFill/>
+    <a:solidFill>
+      <a:srgbClr val="FFFFFF"/>
+    </a:solidFill>
     <a:ln>
       <a:noFill/>
     </a:ln>
@@ -1527,7 +1535,7 @@
           <a:p>
             <a:r>
               <a:rPr lang="en-US" dirty="0"/>
-              <a:t>Naman opens. One sentence: Doorstep washes cars at the customer, the van carries its own water, so the tank is what limits the day. Our module answers two questions - how much water will this job take, and how many jobs fit before a refill. Keep this to 20 seconds.</a:t>
+              <a:t>Naman opens, 20 seconds. Doorstep washes cars wherever the customer already is. The van carries its own water, so the tank limits the day, not demand. Our module answers two questions: how much water will this job take, and how many jobs fit before a refill.</a:t>
             </a:r>
             <a:endParaRPr lang="en-US" dirty="0"/>
           </a:p>
@@ -1615,7 +1623,7 @@
           <a:p>
             <a:r>
               <a:rPr lang="en-US" dirty="0"/>
-              <a:t>Priyanshu, and this is the slide to spend time on - it is the most interesting result we have. We expected a better optimiser to be strictly better. It is not: the exact knapsack doubles the failure rate against simply serving in booked order, because tight packing consumes the slack that was quietly absorbing prediction error. The fix is to feed the optimiser the interval instead of the point estimate. If asked whether this is known: yes - Elmachtoub and Grigas, Smart Predict-then-Optimize, though their uncertainty is in the objective and ours is in the constraint. Also worth saying: the greedy rule reaches 99% of the exact solution, so we built the knapsack mainly to prove greedy was enough.</a:t>
+              <a:t>Priyanshu — spend time here, it is the most interesting result we have. We expected a better optimiser to be strictly better. It is not: the exact knapsack doubles the failure rate against simply serving in booked order, because tight packing consumes the slack that was quietly absorbing prediction error. The fix is to feed the optimiser the interval instead of the point estimate. If asked whether this is known: yes, Elmachtoub and Grigas, Smart Predict-then-Optimize — though their uncertainty sits in the objective and ours is in the constraint. Also note greedy reaches 99% of the exact solution, so we built the knapsack mainly to prove greedy was enough.</a:t>
             </a:r>
             <a:endParaRPr lang="en-US" dirty="0"/>
           </a:p>
@@ -1703,7 +1711,7 @@
           <a:p>
             <a:r>
               <a:rPr lang="en-US" dirty="0"/>
-              <a:t>Rudransh. Every figure here is cited - EPA WaterSense, the International Carwash Association, and Zaneti et al., who audited a reclamation plant needing under 40 litres of fresh water per wash. That last one corroborates our result from outside our data. The right-hand card is the one that earns marks: we are telling the examiner where our own product loses. INTEGRATION.md records what other teams may and may not claim on our behalf, so marketing cannot quote us as beating a modern tunnel.</a:t>
+              <a:t>Rudransh. Every figure is cited — EPA WaterSense, the International Carwash Association, and Zaneti et al., who audited a reclamation plant needing under 40 litres of fresh water per wash. That corroborates our result from outside our own data. The right-hand card is what earns marks: we are telling the examiner where our own product loses. INTEGRATION.md records what other teams may and may not claim on our behalf.</a:t>
             </a:r>
             <a:endParaRPr lang="en-US" dirty="0"/>
           </a:p>
@@ -1791,7 +1799,7 @@
           <a:p>
             <a:r>
               <a:rPr lang="en-US" dirty="0"/>
-              <a:t>Naman closes. Three recommendations, then the open gap - which is a good note to end on because it points at another team and shows we understand the system. Then hand to questions. Reminder for all five: everyone is asked individually, so know the file you own line by line, and roughly what the others built.</a:t>
+              <a:t>Naman closes. Three recommendations, then the open gap — a good note to end on because it points at another team and shows we understand the system. Then questions. Reminder for all five: everyone is asked individually, so know the file you own line by line and roughly what the others built.</a:t>
             </a:r>
             <a:endParaRPr lang="en-US" dirty="0"/>
           </a:p>
@@ -1879,7 +1887,7 @@
           <a:p>
             <a:r>
               <a:rPr lang="en-US" dirty="0"/>
-              <a:t>Naman. The framing slide. The three numbers do the work: crews draw 262 litres a day, tanks hold 200 to 350, so on the small van six days in ten need a refill. That is the whole motivation - a single jobs-per-tank number cannot describe this.</a:t>
+              <a:t>Naman. The three numbers do the work. Crews draw 262 litres a day, tanks hold 200 to 350, so on the small van six days in ten need a refill. That is the motivation: a single jobs-per-tank number cannot describe this.</a:t>
             </a:r>
             <a:endParaRPr lang="en-US" dirty="0"/>
           </a:p>
@@ -1967,7 +1975,7 @@
           <a:p>
             <a:r>
               <a:rPr lang="en-US" dirty="0"/>
-              <a:t>Ranu presents this one. The point to land: we nearly missed the second-largest effect in the data because it was inside a delimited string rather than exposed as a column. Left chart is flat, right chart is not, same jobs. If asked why it matters: a consumer keying off slot_type gets nothing.</a:t>
+              <a:t>Ranu presents. The point to land: we nearly missed the second-largest effect in the data because it sat inside a delimited string rather than being exposed as a column. Left chart flat, right chart not, same jobs. Likely question: how did you find it? By exploding the items column and grouping — not from the correlation matrix.</a:t>
             </a:r>
             <a:endParaRPr lang="en-US" dirty="0"/>
           </a:p>
@@ -2055,7 +2063,7 @@
           <a:p>
             <a:r>
               <a:rPr lang="en-US" dirty="0"/>
-              <a:t>Ranu. Short slide. The curves are parallel in ratio, not in difference - that is what multiplicative means. Consequence in one line: additive model is the wrong shape, so we add the interaction term. Expect a viva question on how you spotted it: the ratio table, not the correlation matrix.</a:t>
+              <a:t>Ranu. Short slide. The curves are parallel in ratio, not in difference — that is what multiplicative means, and the ratio table is how we saw it. Consequence in one line: we add the interaction term.</a:t>
             </a:r>
             <a:endParaRPr lang="en-US" dirty="0"/>
           </a:p>
@@ -2143,7 +2151,7 @@
           <a:p>
             <a:r>
               <a:rPr lang="en-US" dirty="0"/>
-              <a:t>Vansh. This is the design decision the whole module rests on, so do not rush it. Using dirtiness at booking time would be leakage - the model would benchmark well and fail in deployment. Two models on disjoint feature sets, and a test in tests/ enforces that planning features never include dirtiness. Likely viva question: why not just predict dirtiness? Answer: we tried, it is an independent draw - uncorrelated with weather, flat across months, and the same customer varies more than customers differ.</a:t>
+              <a:t>Vansh, and do not rush this — the whole module rests on it. Using dirtiness at booking time would be leakage: the model benchmarks well and fails in deployment. So two models on disjoint feature sets, with a test enforcing that planning features never include dirtiness. Expect: why not predict dirtiness? We tried. It behaves as an independent draw — uncorrelated with weather, flat across months, and the same customer varies more than customers differ from each other.</a:t>
             </a:r>
             <a:endParaRPr lang="en-US" dirty="0"/>
           </a:p>
@@ -2231,7 +2239,7 @@
           <a:p>
             <a:r>
               <a:rPr lang="en-US" dirty="0"/>
-              <a:t>Vansh. Name the baseline before the model - that is what the rubric rewards. Global mean 11.15 litres is what you get by guessing. Planning halves it, on-site halves it again. Mention the spread: plus or minus 0.04 at planning, 0.014 on-site. Do not claim the on-site model could be improved - it is at the irreducible noise floor.</a:t>
+              <a:t>Vansh. Name the baseline before the model — the rubric rewards that specifically. Global mean 11.15 litres is what guessing gets you. Quote the spread: plus or minus 0.04 at planning, 0.014 on-site. Do not claim the on-site model could be improved; it is at the irreducible noise floor.</a:t>
             </a:r>
             <a:endParaRPr lang="en-US" dirty="0"/>
           </a:p>
@@ -2319,7 +2327,7 @@
           <a:p>
             <a:r>
               <a:rPr lang="en-US" dirty="0"/>
-              <a:t>Vansh. This is the honesty slide and it scores well - the guidebook says so explicitly. We are not claiming a win, we are claiming we cannot tell them apart, and we can only say that because we ran ten seeds. Be ready for: so why build the complex models? Answer: to establish the simple one is sufficient. That is a result, not a failure.</a:t>
+              <a:t>Vansh. The honesty slide, and the guidebook says explicitly that it scores. We are not claiming a win; we are claiming we cannot tell the models apart, and we can only say that because we ran ten seeds. Expect: why build the complex models? To establish the simple one is sufficient. That is a result, not a failure.</a:t>
             </a:r>
             <a:endParaRPr lang="en-US" dirty="0"/>
           </a:p>
@@ -2407,7 +2415,7 @@
           <a:p>
             <a:r>
               <a:rPr lang="en-US" dirty="0"/>
-              <a:t>Priyanshu. One of the two required deliverables. The trap is that 280 divided by 55.7 equals 5 looks obviously right and is obviously wrong - it throws away the spread. We resample 20,000 crew-days instead. Add that the 2/4/5 figures are identical under all ten resampling seeds, so this is a property of the distribution, not one draw.</a:t>
+              <a:t>Priyanshu. One of the two required deliverables. The trap: 280 divided by 55.7 equals five looks obviously right and is obviously wrong — it throws away the spread. We resample 20,000 crew-days instead. Add that 2/4/5 is identical under all ten resampling seeds, so it is a property of the distribution, not of one draw.</a:t>
             </a:r>
             <a:endParaRPr lang="en-US" dirty="0"/>
           </a:p>
@@ -2495,7 +2503,7 @@
           <a:p>
             <a:r>
               <a:rPr lang="en-US" dirty="0"/>
-              <a:t>Priyanshu. The point: a single jobs-per-tank number hides the real constraint. We count refills by walking each crew-day in arrival order and topping up before any job the remaining water cannot cover. This is the number A12 actually needs for fleet sizing, and it is in INTEGRATION.md.</a:t>
+              <a:t>Priyanshu. A single jobs-per-tank number hides the real constraint. We count refills by walking each crew-day in arrival order and topping up before any job the remaining water cannot cover. This is the number A12 needs for fleet sizing, and it is in INTEGRATION.md.</a:t>
             </a:r>
             <a:endParaRPr lang="en-US" dirty="0"/>
           </a:p>
@@ -2850,7 +2858,7 @@
     <p:bg>
       <p:bgPr>
         <a:solidFill>
-          <a:srgbClr val="0B2B3A"/>
+          <a:srgbClr val="12333F"/>
         </a:solidFill>
       </p:bgPr>
     </p:bg>
@@ -2876,24 +2884,69 @@
         </p:nvSpPr>
         <p:spPr>
           <a:xfrm>
-            <a:off x="640080" y="1965960"/>
-            <a:ext cx="10881360" cy="1005840"/>
-          </a:xfrm>
-          <a:prstGeom prst="rect">
-            <a:avLst/>
-          </a:prstGeom>
-          <a:noFill/>
-          <a:ln/>
-        </p:spPr>
-        <p:txBody>
-          <a:bodyPr wrap="square" lIns="0" tIns="0" rIns="0" bIns="0" rtlCol="0" anchor="ctr"/>
-          <a:lstStyle/>
-          <a:p>
-            <a:pPr indent="0" marL="0">
-              <a:buNone/>
-            </a:pPr>
-            <a:r>
-              <a:rPr lang="en-US" sz="5400" b="1" dirty="0">
+            <a:off x="685800" y="1828800"/>
+            <a:ext cx="8974074" cy="296164"/>
+          </a:xfrm>
+          <a:prstGeom prst="rect">
+            <a:avLst/>
+          </a:prstGeom>
+          <a:noFill/>
+          <a:ln/>
+        </p:spPr>
+        <p:txBody>
+          <a:bodyPr wrap="square" lIns="0" tIns="0" rIns="0" bIns="0" rtlCol="0" anchor="t"/>
+          <a:lstStyle/>
+          <a:p>
+            <a:pPr indent="0" marL="0">
+              <a:lnSpc>
+                <a:spcPts val="1900"/>
+              </a:lnSpc>
+              <a:buNone/>
+            </a:pPr>
+            <a:r>
+              <a:rPr lang="en-US" sz="1400" b="1" spc="200" kern="0" dirty="0">
+                <a:solidFill>
+                  <a:srgbClr val="17A398"/>
+                </a:solidFill>
+                <a:latin typeface="Calibri" pitchFamily="34" charset="0"/>
+                <a:ea typeface="Calibri" pitchFamily="34" charset="-122"/>
+                <a:cs typeface="Calibri" pitchFamily="34" charset="-120"/>
+              </a:rPr>
+              <a:t>MODULE A7</a:t>
+            </a:r>
+            <a:endParaRPr lang="en-US" sz="1400" dirty="0"/>
+          </a:p>
+        </p:txBody>
+      </p:sp>
+      <p:sp>
+        <p:nvSpPr>
+          <p:cNvPr id="3" name="Text 1"/>
+          <p:cNvSpPr txBox="1"/>
+          <p:nvPr/>
+        </p:nvSpPr>
+        <p:spPr>
+          <a:xfrm>
+            <a:off x="685800" y="2234692"/>
+            <a:ext cx="8974074" cy="753364"/>
+          </a:xfrm>
+          <a:prstGeom prst="rect">
+            <a:avLst/>
+          </a:prstGeom>
+          <a:noFill/>
+          <a:ln/>
+        </p:spPr>
+        <p:txBody>
+          <a:bodyPr wrap="square" lIns="0" tIns="0" rIns="0" bIns="0" rtlCol="0" anchor="t"/>
+          <a:lstStyle/>
+          <a:p>
+            <a:pPr indent="0" marL="0">
+              <a:lnSpc>
+                <a:spcPts val="5500"/>
+              </a:lnSpc>
+              <a:buNone/>
+            </a:pPr>
+            <a:r>
+              <a:rPr lang="en-US" sz="4000" b="1" dirty="0">
                 <a:solidFill>
                   <a:srgbClr val="FFFFFF"/>
                 </a:solidFill>
@@ -2903,38 +2956,41 @@
               </a:rPr>
               <a:t>Water and Supplies</a:t>
             </a:r>
-            <a:endParaRPr lang="en-US" sz="5400" dirty="0"/>
-          </a:p>
-        </p:txBody>
-      </p:sp>
-      <p:sp>
-        <p:nvSpPr>
-          <p:cNvPr id="3" name="Text 1"/>
-          <p:cNvSpPr txBox="1"/>
-          <p:nvPr/>
-        </p:nvSpPr>
-        <p:spPr>
-          <a:xfrm>
-            <a:off x="640080" y="3017520"/>
-            <a:ext cx="9509760" cy="548640"/>
-          </a:xfrm>
-          <a:prstGeom prst="rect">
-            <a:avLst/>
-          </a:prstGeom>
-          <a:noFill/>
-          <a:ln/>
-        </p:spPr>
-        <p:txBody>
-          <a:bodyPr wrap="square" lIns="0" tIns="0" rIns="0" bIns="0" rtlCol="0" anchor="ctr"/>
-          <a:lstStyle/>
-          <a:p>
-            <a:pPr indent="0" marL="0">
-              <a:buNone/>
-            </a:pPr>
-            <a:r>
-              <a:rPr lang="en-US" sz="2200" dirty="0">
-                <a:solidFill>
-                  <a:srgbClr val="00A896"/>
+            <a:endParaRPr lang="en-US" sz="4000" dirty="0"/>
+          </a:p>
+        </p:txBody>
+      </p:sp>
+      <p:sp>
+        <p:nvSpPr>
+          <p:cNvPr id="4" name="Text 2"/>
+          <p:cNvSpPr txBox="1"/>
+          <p:nvPr/>
+        </p:nvSpPr>
+        <p:spPr>
+          <a:xfrm>
+            <a:off x="685800" y="3097784"/>
+            <a:ext cx="8974074" cy="410464"/>
+          </a:xfrm>
+          <a:prstGeom prst="rect">
+            <a:avLst/>
+          </a:prstGeom>
+          <a:noFill/>
+          <a:ln/>
+        </p:spPr>
+        <p:txBody>
+          <a:bodyPr wrap="square" lIns="0" tIns="0" rIns="0" bIns="0" rtlCol="0" anchor="t"/>
+          <a:lstStyle/>
+          <a:p>
+            <a:pPr indent="0" marL="0">
+              <a:lnSpc>
+                <a:spcPts val="2800"/>
+              </a:lnSpc>
+              <a:buNone/>
+            </a:pPr>
+            <a:r>
+              <a:rPr lang="en-US" sz="2000" dirty="0">
+                <a:solidFill>
+                  <a:srgbClr val="17A398"/>
                 </a:solidFill>
                 <a:latin typeface="Calibri" pitchFamily="34" charset="0"/>
                 <a:ea typeface="Calibri" pitchFamily="34" charset="-122"/>
@@ -2942,44 +2998,47 @@
               </a:rPr>
               <a:t>How much water a job takes, and how many jobs fit in the tank</a:t>
             </a:r>
-            <a:endParaRPr lang="en-US" sz="2200" dirty="0"/>
-          </a:p>
-        </p:txBody>
-      </p:sp>
-      <p:sp>
-        <p:nvSpPr>
-          <p:cNvPr id="4" name="Text 2"/>
-          <p:cNvSpPr txBox="1"/>
-          <p:nvPr/>
-        </p:nvSpPr>
-        <p:spPr>
-          <a:xfrm>
-            <a:off x="640080" y="3977640"/>
-            <a:ext cx="5486400" cy="365760"/>
-          </a:xfrm>
-          <a:prstGeom prst="rect">
-            <a:avLst/>
-          </a:prstGeom>
-          <a:noFill/>
-          <a:ln/>
-        </p:spPr>
-        <p:txBody>
-          <a:bodyPr wrap="square" lIns="0" tIns="0" rIns="0" bIns="0" rtlCol="0" anchor="ctr"/>
-          <a:lstStyle/>
-          <a:p>
-            <a:pPr indent="0" marL="0">
+            <a:endParaRPr lang="en-US" sz="2000" dirty="0"/>
+          </a:p>
+        </p:txBody>
+      </p:sp>
+      <p:sp>
+        <p:nvSpPr>
+          <p:cNvPr id="5" name="Text 3"/>
+          <p:cNvSpPr txBox="1"/>
+          <p:nvPr/>
+        </p:nvSpPr>
+        <p:spPr>
+          <a:xfrm>
+            <a:off x="685800" y="4696968"/>
+            <a:ext cx="8974074" cy="372364"/>
+          </a:xfrm>
+          <a:prstGeom prst="rect">
+            <a:avLst/>
+          </a:prstGeom>
+          <a:noFill/>
+          <a:ln/>
+        </p:spPr>
+        <p:txBody>
+          <a:bodyPr wrap="square" lIns="0" tIns="0" rIns="0" bIns="0" rtlCol="0" anchor="t"/>
+          <a:lstStyle/>
+          <a:p>
+            <a:pPr indent="0" marL="0">
+              <a:lnSpc>
+                <a:spcPts val="2500"/>
+              </a:lnSpc>
               <a:buNone/>
             </a:pPr>
             <a:r>
               <a:rPr lang="en-US" sz="1800" dirty="0">
                 <a:solidFill>
-                  <a:srgbClr val="9FB6C0"/>
+                  <a:srgbClr val="FFFFFF"/>
                 </a:solidFill>
                 <a:latin typeface="Calibri" pitchFamily="34" charset="0"/>
                 <a:ea typeface="Calibri" pitchFamily="34" charset="-122"/>
                 <a:cs typeface="Calibri" pitchFamily="34" charset="-120"/>
               </a:rPr>
-              <a:t>Module A7  ·  Doorstep, Track A</a:t>
+              <a:t>Naman Kumar   ·   Ranu Raj   ·   Vansh Rana   ·   Priyanshu   ·   Rudransh</a:t>
             </a:r>
             <a:endParaRPr lang="en-US" sz="1800" dirty="0"/>
           </a:p>
@@ -2987,40 +3046,43 @@
       </p:sp>
       <p:sp>
         <p:nvSpPr>
-          <p:cNvPr id="5" name="Text 3"/>
-          <p:cNvSpPr txBox="1"/>
-          <p:nvPr/>
-        </p:nvSpPr>
-        <p:spPr>
-          <a:xfrm>
-            <a:off x="640080" y="4389120"/>
-            <a:ext cx="10881360" cy="365760"/>
-          </a:xfrm>
-          <a:prstGeom prst="rect">
-            <a:avLst/>
-          </a:prstGeom>
-          <a:noFill/>
-          <a:ln/>
-        </p:spPr>
-        <p:txBody>
-          <a:bodyPr wrap="square" lIns="0" tIns="0" rIns="0" bIns="0" rtlCol="0" anchor="ctr"/>
-          <a:lstStyle/>
-          <a:p>
-            <a:pPr indent="0" marL="0">
-              <a:buNone/>
-            </a:pPr>
-            <a:r>
-              <a:rPr lang="en-US" sz="1800" dirty="0">
-                <a:solidFill>
-                  <a:srgbClr val="FFFFFF"/>
+          <p:cNvPr id="6" name="Text 4"/>
+          <p:cNvSpPr txBox="1"/>
+          <p:nvPr/>
+        </p:nvSpPr>
+        <p:spPr>
+          <a:xfrm>
+            <a:off x="685800" y="5160772"/>
+            <a:ext cx="8974074" cy="296164"/>
+          </a:xfrm>
+          <a:prstGeom prst="rect">
+            <a:avLst/>
+          </a:prstGeom>
+          <a:noFill/>
+          <a:ln/>
+        </p:spPr>
+        <p:txBody>
+          <a:bodyPr wrap="square" lIns="0" tIns="0" rIns="0" bIns="0" rtlCol="0" anchor="t"/>
+          <a:lstStyle/>
+          <a:p>
+            <a:pPr indent="0" marL="0">
+              <a:lnSpc>
+                <a:spcPts val="1900"/>
+              </a:lnSpc>
+              <a:buNone/>
+            </a:pPr>
+            <a:r>
+              <a:rPr lang="en-US" sz="1400" dirty="0">
+                <a:solidFill>
+                  <a:srgbClr val="AFC7D0"/>
                 </a:solidFill>
                 <a:latin typeface="Calibri" pitchFamily="34" charset="0"/>
                 <a:ea typeface="Calibri" pitchFamily="34" charset="-122"/>
                 <a:cs typeface="Calibri" pitchFamily="34" charset="-120"/>
               </a:rPr>
-              <a:t>Naman Kumar  ·  Ranu Raj  ·  Vansh Rana  ·  Priyanshu  ·  Rudransh</a:t>
-            </a:r>
-            <a:endParaRPr lang="en-US" sz="1800" dirty="0"/>
+              <a:t>Doorstep · Track A · Service as a Service</a:t>
+            </a:r>
+            <a:endParaRPr lang="en-US" sz="1400" dirty="0"/>
           </a:p>
         </p:txBody>
       </p:sp>
@@ -3064,26 +3126,26 @@
         </p:nvSpPr>
         <p:spPr>
           <a:xfrm>
-            <a:off x="640080" y="384048"/>
-            <a:ext cx="10881360" cy="274320"/>
-          </a:xfrm>
-          <a:prstGeom prst="rect">
-            <a:avLst/>
-          </a:prstGeom>
-          <a:noFill/>
-          <a:ln/>
-        </p:spPr>
-        <p:txBody>
-          <a:bodyPr wrap="square" lIns="0" tIns="0" rIns="0" bIns="0" rtlCol="0" anchor="ctr"/>
-          <a:lstStyle/>
-          <a:p>
-            <a:pPr indent="0" marL="0">
-              <a:buNone/>
-            </a:pPr>
-            <a:r>
-              <a:rPr lang="en-US" sz="1800" b="1" spc="150" kern="0" dirty="0">
-                <a:solidFill>
-                  <a:srgbClr val="00A896"/>
+            <a:off x="685800" y="685800"/>
+            <a:ext cx="10820095" cy="274320"/>
+          </a:xfrm>
+          <a:prstGeom prst="rect">
+            <a:avLst/>
+          </a:prstGeom>
+          <a:noFill/>
+          <a:ln/>
+        </p:spPr>
+        <p:txBody>
+          <a:bodyPr wrap="square" lIns="0" tIns="0" rIns="0" bIns="0" rtlCol="0" anchor="t"/>
+          <a:lstStyle/>
+          <a:p>
+            <a:pPr indent="0" marL="0">
+              <a:buNone/>
+            </a:pPr>
+            <a:r>
+              <a:rPr lang="en-US" sz="1400" b="1" spc="200" kern="0" dirty="0">
+                <a:solidFill>
+                  <a:srgbClr val="17A398"/>
                 </a:solidFill>
                 <a:latin typeface="Calibri" pitchFamily="34" charset="0"/>
                 <a:ea typeface="Calibri" pitchFamily="34" charset="-122"/>
@@ -3091,7 +3153,7 @@
               </a:rPr>
               <a:t>THE SURPRISE</a:t>
             </a:r>
-            <a:endParaRPr lang="en-US" sz="1800" dirty="0"/>
+            <a:endParaRPr lang="en-US" sz="1400" dirty="0"/>
           </a:p>
         </p:txBody>
       </p:sp>
@@ -3103,26 +3165,26 @@
         </p:nvSpPr>
         <p:spPr>
           <a:xfrm>
-            <a:off x="640080" y="713232"/>
-            <a:ext cx="10881360" cy="868680"/>
-          </a:xfrm>
-          <a:prstGeom prst="rect">
-            <a:avLst/>
-          </a:prstGeom>
-          <a:noFill/>
-          <a:ln/>
-        </p:spPr>
-        <p:txBody>
-          <a:bodyPr wrap="square" lIns="0" tIns="0" rIns="0" bIns="0" rtlCol="0" anchor="ctr"/>
-          <a:lstStyle/>
-          <a:p>
-            <a:pPr indent="0" marL="0">
-              <a:buNone/>
-            </a:pPr>
-            <a:r>
-              <a:rPr lang="en-US" sz="3800" b="1" dirty="0">
-                <a:solidFill>
-                  <a:srgbClr val="0B2B3A"/>
+            <a:off x="685800" y="1024128"/>
+            <a:ext cx="10820095" cy="868680"/>
+          </a:xfrm>
+          <a:prstGeom prst="rect">
+            <a:avLst/>
+          </a:prstGeom>
+          <a:noFill/>
+          <a:ln/>
+        </p:spPr>
+        <p:txBody>
+          <a:bodyPr wrap="square" lIns="0" tIns="0" rIns="0" bIns="0" rtlCol="0" anchor="t"/>
+          <a:lstStyle/>
+          <a:p>
+            <a:pPr indent="0" marL="0">
+              <a:buNone/>
+            </a:pPr>
+            <a:r>
+              <a:rPr lang="en-US" sz="3000" b="1" dirty="0">
+                <a:solidFill>
+                  <a:srgbClr val="12333F"/>
                 </a:solidFill>
                 <a:latin typeface="Cambria" pitchFamily="34" charset="0"/>
                 <a:ea typeface="Cambria" pitchFamily="34" charset="-122"/>
@@ -3130,7 +3192,7 @@
               </a:rPr>
               <a:t>Optimising the plan made it fail more often</a:t>
             </a:r>
-            <a:endParaRPr lang="en-US" sz="3800" dirty="0"/>
+            <a:endParaRPr lang="en-US" sz="3000" dirty="0"/>
           </a:p>
         </p:txBody>
       </p:sp>
@@ -3141,8 +3203,8 @@
           <p:nvPr/>
         </p:nvGraphicFramePr>
         <p:xfrm>
-          <a:off x="640080" y="1783080"/>
-          <a:ext cx="6766560" cy="3749040"/>
+          <a:off x="685800" y="2057400"/>
+          <a:ext cx="6205042" cy="3749040"/>
         </p:xfrm>
         <a:graphic xmlns:a="http://schemas.openxmlformats.org/drawingml/2006/main">
           <a:graphicData uri="http://schemas.openxmlformats.org/drawingml/2006/chart">
@@ -3158,108 +3220,187 @@
         </p:nvSpPr>
         <p:spPr>
           <a:xfrm>
-            <a:off x="7772400" y="1874520"/>
-            <a:ext cx="3749040" cy="1371600"/>
-          </a:xfrm>
-          <a:prstGeom prst="rect">
-            <a:avLst/>
-          </a:prstGeom>
-          <a:noFill/>
-          <a:ln/>
-        </p:spPr>
-        <p:txBody>
-          <a:bodyPr wrap="square" lIns="0" tIns="0" rIns="0" bIns="0" rtlCol="0" anchor="ctr"/>
+            <a:off x="7146874" y="2057400"/>
+            <a:ext cx="4359021" cy="1007364"/>
+          </a:xfrm>
+          <a:prstGeom prst="rect">
+            <a:avLst/>
+          </a:prstGeom>
+          <a:noFill/>
+          <a:ln/>
+        </p:spPr>
+        <p:txBody>
+          <a:bodyPr wrap="square" lIns="0" tIns="0" rIns="0" bIns="0" rtlCol="0" anchor="t"/>
           <a:lstStyle/>
           <a:p>
             <a:pPr indent="0" marL="0">
               <a:lnSpc>
-                <a:spcPts val="2800"/>
+                <a:spcPts val="2500"/>
               </a:lnSpc>
               <a:buNone/>
             </a:pPr>
             <a:r>
-              <a:rPr lang="en-US" sz="1900" dirty="0">
-                <a:solidFill>
-                  <a:srgbClr val="0B2B3A"/>
+              <a:rPr lang="en-US" sz="1800" dirty="0">
+                <a:solidFill>
+                  <a:srgbClr val="12333F"/>
                 </a:solidFill>
                 <a:latin typeface="Calibri" pitchFamily="34" charset="0"/>
                 <a:ea typeface="Calibri" pitchFamily="34" charset="-122"/>
                 <a:cs typeface="Calibri" pitchFamily="34" charset="-120"/>
               </a:rPr>
-              <a:t>Choosing jobs by exact knapsack captures 13 points more revenue than serving in booked order — and doubles the rate of running dry.</a:t>
-            </a:r>
-            <a:endParaRPr lang="en-US" sz="1900" dirty="0"/>
-          </a:p>
-        </p:txBody>
-      </p:sp>
-      <p:sp>
-        <p:nvSpPr>
-          <p:cNvPr id="6" name="Text 3"/>
-          <p:cNvSpPr txBox="1"/>
-          <p:nvPr/>
-        </p:nvSpPr>
-        <p:spPr>
-          <a:xfrm>
-            <a:off x="7772400" y="3383280"/>
-            <a:ext cx="3749040" cy="2194560"/>
-          </a:xfrm>
-          <a:prstGeom prst="rect">
-            <a:avLst/>
-          </a:prstGeom>
-          <a:noFill/>
-          <a:ln/>
-        </p:spPr>
-        <p:txBody>
-          <a:bodyPr wrap="square" lIns="0" tIns="0" rIns="0" bIns="0" rtlCol="0" anchor="ctr"/>
+              <a:t>Exact knapsack captures 13 points more revenue than booked order — and doubles the rate of running dry.</a:t>
+            </a:r>
+            <a:endParaRPr lang="en-US" sz="1800" dirty="0"/>
+          </a:p>
+        </p:txBody>
+      </p:sp>
+      <p:sp>
+        <p:nvSpPr>
+          <p:cNvPr id="6" name="Shape 3"/>
+          <p:cNvSpPr/>
+          <p:nvPr/>
+        </p:nvSpPr>
+        <p:spPr>
+          <a:xfrm>
+            <a:off x="7146874" y="3320796"/>
+            <a:ext cx="4359021" cy="2481072"/>
+          </a:xfrm>
+          <a:prstGeom prst="roundRect">
+            <a:avLst>
+              <a:gd name="adj" fmla="val 2211"/>
+            </a:avLst>
+          </a:prstGeom>
+          <a:solidFill>
+            <a:srgbClr val="EDF4F6"/>
+          </a:solidFill>
+          <a:ln w="12700">
+            <a:solidFill>
+              <a:srgbClr val="EDF4F6"/>
+            </a:solidFill>
+            <a:prstDash val="solid"/>
+          </a:ln>
+        </p:spPr>
+      </p:sp>
+      <p:sp>
+        <p:nvSpPr>
+          <p:cNvPr id="7" name="Text 4"/>
+          <p:cNvSpPr txBox="1"/>
+          <p:nvPr/>
+        </p:nvSpPr>
+        <p:spPr>
+          <a:xfrm>
+            <a:off x="7421194" y="3595116"/>
+            <a:ext cx="3810381" cy="1007364"/>
+          </a:xfrm>
+          <a:prstGeom prst="rect">
+            <a:avLst/>
+          </a:prstGeom>
+          <a:noFill/>
+          <a:ln/>
+        </p:spPr>
+        <p:txBody>
+          <a:bodyPr wrap="square" lIns="0" tIns="0" rIns="0" bIns="0" rtlCol="0" anchor="t"/>
           <a:lstStyle/>
           <a:p>
             <a:pPr indent="0" marL="0">
               <a:lnSpc>
-                <a:spcPts val="2600"/>
+                <a:spcPts val="2500"/>
               </a:lnSpc>
               <a:buNone/>
             </a:pPr>
             <a:r>
-              <a:rPr lang="en-US" sz="1800" dirty="0">
-                <a:solidFill>
-                  <a:srgbClr val="0B2B3A"/>
+              <a:rPr lang="en-US" sz="1800" b="1" dirty="0">
+                <a:solidFill>
+                  <a:srgbClr val="C25332"/>
                 </a:solidFill>
                 <a:latin typeface="Calibri" pitchFamily="34" charset="0"/>
                 <a:ea typeface="Calibri" pitchFamily="34" charset="-122"/>
                 <a:cs typeface="Calibri" pitchFamily="34" charset="-120"/>
               </a:rPr>
-              <a:t>Packing a tank to its limit spends exactly the slack that was absorbing prediction error. A loose plan is accidentally robust.</a:t>
+              <a:t>Packing to the limit spends the slack that was absorbing prediction error.</a:t>
             </a:r>
             <a:endParaRPr lang="en-US" sz="1800" dirty="0"/>
           </a:p>
+        </p:txBody>
+      </p:sp>
+      <p:sp>
+        <p:nvSpPr>
+          <p:cNvPr id="8" name="Text 5"/>
+          <p:cNvSpPr txBox="1"/>
+          <p:nvPr/>
+        </p:nvSpPr>
+        <p:spPr>
+          <a:xfrm>
+            <a:off x="7421194" y="4748784"/>
+            <a:ext cx="3810381" cy="778764"/>
+          </a:xfrm>
+          <a:prstGeom prst="rect">
+            <a:avLst/>
+          </a:prstGeom>
+          <a:noFill/>
+          <a:ln/>
+        </p:spPr>
+        <p:txBody>
+          <a:bodyPr wrap="square" lIns="0" tIns="0" rIns="0" bIns="0" rtlCol="0" anchor="t"/>
+          <a:lstStyle/>
           <a:p>
             <a:pPr indent="0" marL="0">
               <a:lnSpc>
-                <a:spcPts val="2600"/>
+                <a:spcPts val="1900"/>
               </a:lnSpc>
               <a:buNone/>
             </a:pPr>
-            <a:endParaRPr lang="en-US" sz="1800" dirty="0"/>
-          </a:p>
-          <a:p>
-            <a:pPr indent="0" marL="0">
-              <a:lnSpc>
-                <a:spcPts val="2600"/>
-              </a:lnSpc>
-              <a:buNone/>
-            </a:pPr>
-            <a:r>
-              <a:rPr lang="en-US" sz="1800" dirty="0">
-                <a:solidFill>
-                  <a:srgbClr val="0B2B3A"/>
+            <a:r>
+              <a:rPr lang="en-US" sz="1400" dirty="0">
+                <a:solidFill>
+                  <a:srgbClr val="68808B"/>
                 </a:solidFill>
                 <a:latin typeface="Calibri" pitchFamily="34" charset="0"/>
                 <a:ea typeface="Calibri" pitchFamily="34" charset="-122"/>
                 <a:cs typeface="Calibri" pitchFamily="34" charset="-120"/>
               </a:rPr>
-              <a:t>Planning against the interval's upper bound removes overflow entirely, for about ten points of throughput.</a:t>
-            </a:r>
-            <a:endParaRPr lang="en-US" sz="1800" dirty="0"/>
+              <a:t>Planning on the interval's upper bound removes it entirely, for about ten points of throughput.</a:t>
+            </a:r>
+            <a:endParaRPr lang="en-US" sz="1400" dirty="0"/>
+          </a:p>
+        </p:txBody>
+      </p:sp>
+      <p:sp>
+        <p:nvSpPr>
+          <p:cNvPr id="9" name="Text 6"/>
+          <p:cNvSpPr txBox="1"/>
+          <p:nvPr/>
+        </p:nvSpPr>
+        <p:spPr>
+          <a:xfrm>
+            <a:off x="685800" y="6327648"/>
+            <a:ext cx="10820095" cy="237744"/>
+          </a:xfrm>
+          <a:prstGeom prst="rect">
+            <a:avLst/>
+          </a:prstGeom>
+          <a:noFill/>
+          <a:ln/>
+        </p:spPr>
+        <p:txBody>
+          <a:bodyPr wrap="square" lIns="0" tIns="0" rIns="0" bIns="0" rtlCol="0" anchor="t"/>
+          <a:lstStyle/>
+          <a:p>
+            <a:pPr indent="0" marL="0">
+              <a:buNone/>
+            </a:pPr>
+            <a:r>
+              <a:rPr lang="en-US" sz="1100" dirty="0">
+                <a:solidFill>
+                  <a:srgbClr val="68808B"/>
+                </a:solidFill>
+                <a:latin typeface="Calibri" pitchFamily="34" charset="0"/>
+                <a:ea typeface="Calibri" pitchFamily="34" charset="-122"/>
+                <a:cs typeface="Calibri" pitchFamily="34" charset="-120"/>
+              </a:rPr>
+              <a:t>200 L van · results/tank_plan.csv</a:t>
+            </a:r>
+            <a:endParaRPr lang="en-US" sz="1100" dirty="0"/>
           </a:p>
         </p:txBody>
       </p:sp>
@@ -3303,26 +3444,26 @@
         </p:nvSpPr>
         <p:spPr>
           <a:xfrm>
-            <a:off x="640080" y="384048"/>
-            <a:ext cx="10881360" cy="274320"/>
-          </a:xfrm>
-          <a:prstGeom prst="rect">
-            <a:avLst/>
-          </a:prstGeom>
-          <a:noFill/>
-          <a:ln/>
-        </p:spPr>
-        <p:txBody>
-          <a:bodyPr wrap="square" lIns="0" tIns="0" rIns="0" bIns="0" rtlCol="0" anchor="ctr"/>
-          <a:lstStyle/>
-          <a:p>
-            <a:pPr indent="0" marL="0">
-              <a:buNone/>
-            </a:pPr>
-            <a:r>
-              <a:rPr lang="en-US" sz="1800" b="1" spc="150" kern="0" dirty="0">
-                <a:solidFill>
-                  <a:srgbClr val="00A896"/>
+            <a:off x="685800" y="685800"/>
+            <a:ext cx="10820095" cy="274320"/>
+          </a:xfrm>
+          <a:prstGeom prst="rect">
+            <a:avLst/>
+          </a:prstGeom>
+          <a:noFill/>
+          <a:ln/>
+        </p:spPr>
+        <p:txBody>
+          <a:bodyPr wrap="square" lIns="0" tIns="0" rIns="0" bIns="0" rtlCol="0" anchor="t"/>
+          <a:lstStyle/>
+          <a:p>
+            <a:pPr indent="0" marL="0">
+              <a:buNone/>
+            </a:pPr>
+            <a:r>
+              <a:rPr lang="en-US" sz="1400" b="1" spc="200" kern="0" dirty="0">
+                <a:solidFill>
+                  <a:srgbClr val="17A398"/>
                 </a:solidFill>
                 <a:latin typeface="Calibri" pitchFamily="34" charset="0"/>
                 <a:ea typeface="Calibri" pitchFamily="34" charset="-122"/>
@@ -3330,7 +3471,7 @@
               </a:rPr>
               <a:t>SUSTAINABILITY</a:t>
             </a:r>
-            <a:endParaRPr lang="en-US" sz="1800" dirty="0"/>
+            <a:endParaRPr lang="en-US" sz="1400" dirty="0"/>
           </a:p>
         </p:txBody>
       </p:sp>
@@ -3342,26 +3483,26 @@
         </p:nvSpPr>
         <p:spPr>
           <a:xfrm>
-            <a:off x="640080" y="713232"/>
-            <a:ext cx="10881360" cy="868680"/>
-          </a:xfrm>
-          <a:prstGeom prst="rect">
-            <a:avLst/>
-          </a:prstGeom>
-          <a:noFill/>
-          <a:ln/>
-        </p:spPr>
-        <p:txBody>
-          <a:bodyPr wrap="square" lIns="0" tIns="0" rIns="0" bIns="0" rtlCol="0" anchor="ctr"/>
-          <a:lstStyle/>
-          <a:p>
-            <a:pPr indent="0" marL="0">
-              <a:buNone/>
-            </a:pPr>
-            <a:r>
-              <a:rPr lang="en-US" sz="3800" b="1" dirty="0">
-                <a:solidFill>
-                  <a:srgbClr val="0B2B3A"/>
+            <a:off x="685800" y="1024128"/>
+            <a:ext cx="10820095" cy="868680"/>
+          </a:xfrm>
+          <a:prstGeom prst="rect">
+            <a:avLst/>
+          </a:prstGeom>
+          <a:noFill/>
+          <a:ln/>
+        </p:spPr>
+        <p:txBody>
+          <a:bodyPr wrap="square" lIns="0" tIns="0" rIns="0" bIns="0" rtlCol="0" anchor="t"/>
+          <a:lstStyle/>
+          <a:p>
+            <a:pPr indent="0" marL="0">
+              <a:buNone/>
+            </a:pPr>
+            <a:r>
+              <a:rPr lang="en-US" sz="3000" b="1" dirty="0">
+                <a:solidFill>
+                  <a:srgbClr val="12333F"/>
                 </a:solidFill>
                 <a:latin typeface="Cambria" pitchFamily="34" charset="0"/>
                 <a:ea typeface="Cambria" pitchFamily="34" charset="-122"/>
@@ -3369,7 +3510,7 @@
               </a:rPr>
               <a:t>The green claim, stated honestly</a:t>
             </a:r>
-            <a:endParaRPr lang="en-US" sz="3800" dirty="0"/>
+            <a:endParaRPr lang="en-US" sz="3000" dirty="0"/>
           </a:p>
         </p:txBody>
       </p:sp>
@@ -3381,26 +3522,29 @@
         </p:nvSpPr>
         <p:spPr>
           <a:xfrm>
-            <a:off x="640080" y="1691640"/>
-            <a:ext cx="10881360" cy="457200"/>
-          </a:xfrm>
-          <a:prstGeom prst="rect">
-            <a:avLst/>
-          </a:prstGeom>
-          <a:noFill/>
-          <a:ln/>
-        </p:spPr>
-        <p:txBody>
-          <a:bodyPr wrap="square" lIns="0" tIns="0" rIns="0" bIns="0" rtlCol="0" anchor="ctr"/>
-          <a:lstStyle/>
-          <a:p>
-            <a:pPr indent="0" marL="0">
-              <a:buNone/>
-            </a:pPr>
-            <a:r>
-              <a:rPr lang="en-US" sz="2000" dirty="0">
-                <a:solidFill>
-                  <a:srgbClr val="0B2B3A"/>
+            <a:off x="685800" y="2057400"/>
+            <a:ext cx="10820095" cy="372364"/>
+          </a:xfrm>
+          <a:prstGeom prst="rect">
+            <a:avLst/>
+          </a:prstGeom>
+          <a:noFill/>
+          <a:ln/>
+        </p:spPr>
+        <p:txBody>
+          <a:bodyPr wrap="square" lIns="0" tIns="0" rIns="0" bIns="0" rtlCol="0" anchor="t"/>
+          <a:lstStyle/>
+          <a:p>
+            <a:pPr indent="0" marL="0">
+              <a:lnSpc>
+                <a:spcPts val="2500"/>
+              </a:lnSpc>
+              <a:buNone/>
+            </a:pPr>
+            <a:r>
+              <a:rPr lang="en-US" sz="1800" dirty="0">
+                <a:solidFill>
+                  <a:srgbClr val="12333F"/>
                 </a:solidFill>
                 <a:latin typeface="Calibri" pitchFamily="34" charset="0"/>
                 <a:ea typeface="Calibri" pitchFamily="34" charset="-122"/>
@@ -3408,7 +3552,7 @@
               </a:rPr>
               <a:t>Doorstep uses 55.7 L per job, all of it freshwater — a van cannot reclaim.</a:t>
             </a:r>
-            <a:endParaRPr lang="en-US" sz="2000" dirty="0"/>
+            <a:endParaRPr lang="en-US" sz="1800" dirty="0"/>
           </a:p>
         </p:txBody>
       </p:sp>
@@ -3420,20 +3564,20 @@
         </p:nvSpPr>
         <p:spPr>
           <a:xfrm>
-            <a:off x="640080" y="2377440"/>
-            <a:ext cx="5303520" cy="3200400"/>
+            <a:off x="685800" y="2788920"/>
+            <a:ext cx="5282032" cy="3115564"/>
           </a:xfrm>
           <a:prstGeom prst="roundRect">
             <a:avLst>
-              <a:gd name="adj" fmla="val 2286"/>
+              <a:gd name="adj" fmla="val 1761"/>
             </a:avLst>
           </a:prstGeom>
           <a:solidFill>
-            <a:srgbClr val="EAF2F5"/>
+            <a:srgbClr val="EDF4F6"/>
           </a:solidFill>
           <a:ln w="12700">
             <a:solidFill>
-              <a:srgbClr val="EAF2F5"/>
+              <a:srgbClr val="EDF4F6"/>
             </a:solidFill>
             <a:prstDash val="solid"/>
           </a:ln>
@@ -3447,26 +3591,29 @@
         </p:nvSpPr>
         <p:spPr>
           <a:xfrm>
-            <a:off x="960120" y="2606040"/>
-            <a:ext cx="4663440" cy="320040"/>
-          </a:xfrm>
-          <a:prstGeom prst="rect">
-            <a:avLst/>
-          </a:prstGeom>
-          <a:noFill/>
-          <a:ln/>
-        </p:spPr>
-        <p:txBody>
-          <a:bodyPr wrap="square" lIns="0" tIns="0" rIns="0" bIns="0" rtlCol="0" anchor="ctr"/>
-          <a:lstStyle/>
-          <a:p>
-            <a:pPr indent="0" marL="0">
-              <a:buNone/>
-            </a:pPr>
-            <a:r>
-              <a:rPr lang="en-US" sz="1800" b="1" spc="120" kern="0" dirty="0">
-                <a:solidFill>
-                  <a:srgbClr val="00A896"/>
+            <a:off x="960120" y="3063240"/>
+            <a:ext cx="4733392" cy="296164"/>
+          </a:xfrm>
+          <a:prstGeom prst="rect">
+            <a:avLst/>
+          </a:prstGeom>
+          <a:noFill/>
+          <a:ln/>
+        </p:spPr>
+        <p:txBody>
+          <a:bodyPr wrap="square" lIns="0" tIns="0" rIns="0" bIns="0" rtlCol="0" anchor="t"/>
+          <a:lstStyle/>
+          <a:p>
+            <a:pPr indent="0" marL="0">
+              <a:lnSpc>
+                <a:spcPts val="1900"/>
+              </a:lnSpc>
+              <a:buNone/>
+            </a:pPr>
+            <a:r>
+              <a:rPr lang="en-US" sz="1400" b="1" spc="200" kern="0" dirty="0">
+                <a:solidFill>
+                  <a:srgbClr val="17A398"/>
                 </a:solidFill>
                 <a:latin typeface="Calibri" pitchFamily="34" charset="0"/>
                 <a:ea typeface="Calibri" pitchFamily="34" charset="-122"/>
@@ -3474,7 +3621,7 @@
               </a:rPr>
               <a:t>WHAT WE CAN CLAIM</a:t>
             </a:r>
-            <a:endParaRPr lang="en-US" sz="1800" dirty="0"/>
+            <a:endParaRPr lang="en-US" sz="1400" dirty="0"/>
           </a:p>
         </p:txBody>
       </p:sp>
@@ -3486,17 +3633,17 @@
         </p:nvSpPr>
         <p:spPr>
           <a:xfrm>
-            <a:off x="960120" y="3063240"/>
-            <a:ext cx="4663440" cy="2194560"/>
-          </a:xfrm>
-          <a:prstGeom prst="rect">
-            <a:avLst/>
-          </a:prstGeom>
-          <a:noFill/>
-          <a:ln/>
-        </p:spPr>
-        <p:txBody>
-          <a:bodyPr wrap="square" lIns="0" tIns="0" rIns="0" bIns="0" rtlCol="0" anchor="ctr"/>
+            <a:off x="960120" y="3560572"/>
+            <a:ext cx="4733392" cy="1680464"/>
+          </a:xfrm>
+          <a:prstGeom prst="rect">
+            <a:avLst/>
+          </a:prstGeom>
+          <a:noFill/>
+          <a:ln/>
+        </p:spPr>
+        <p:txBody>
+          <a:bodyPr wrap="square" lIns="0" tIns="0" rIns="0" bIns="0" rtlCol="0" anchor="t"/>
           <a:lstStyle/>
           <a:p>
             <a:pPr indent="0" marL="0">
@@ -3506,9 +3653,9 @@
               <a:buNone/>
             </a:pPr>
             <a:r>
-              <a:rPr lang="en-US" sz="1900" dirty="0">
-                <a:solidFill>
-                  <a:srgbClr val="0B2B3A"/>
+              <a:rPr lang="en-US" sz="1800" dirty="0">
+                <a:solidFill>
+                  <a:srgbClr val="12333F"/>
                 </a:solidFill>
                 <a:latin typeface="Calibri" pitchFamily="34" charset="0"/>
                 <a:ea typeface="Calibri" pitchFamily="34" charset="-122"/>
@@ -3516,7 +3663,7 @@
               </a:rPr>
               <a:t>25% of a home hose left running</a:t>
             </a:r>
-            <a:endParaRPr lang="en-US" sz="1900" dirty="0"/>
+            <a:endParaRPr lang="en-US" sz="1800" dirty="0"/>
           </a:p>
           <a:p>
             <a:pPr indent="0" marL="0">
@@ -3526,9 +3673,9 @@
               <a:buNone/>
             </a:pPr>
             <a:r>
-              <a:rPr lang="en-US" sz="1900" dirty="0">
-                <a:solidFill>
-                  <a:srgbClr val="0B2B3A"/>
+              <a:rPr lang="en-US" sz="1800" dirty="0">
+                <a:solidFill>
+                  <a:srgbClr val="12333F"/>
                 </a:solidFill>
                 <a:latin typeface="Calibri" pitchFamily="34" charset="0"/>
                 <a:ea typeface="Calibri" pitchFamily="34" charset="-122"/>
@@ -3536,7 +3683,7 @@
               </a:rPr>
               <a:t>22% of an unreclaimed conveyor</a:t>
             </a:r>
-            <a:endParaRPr lang="en-US" sz="1900" dirty="0"/>
+            <a:endParaRPr lang="en-US" sz="1800" dirty="0"/>
           </a:p>
           <a:p>
             <a:pPr indent="0" marL="0">
@@ -3546,9 +3693,9 @@
               <a:buNone/>
             </a:pPr>
             <a:r>
-              <a:rPr lang="en-US" sz="1900" dirty="0">
-                <a:solidFill>
-                  <a:srgbClr val="0B2B3A"/>
+              <a:rPr lang="en-US" sz="1800" dirty="0">
+                <a:solidFill>
+                  <a:srgbClr val="12333F"/>
                 </a:solidFill>
                 <a:latin typeface="Calibri" pitchFamily="34" charset="0"/>
                 <a:ea typeface="Calibri" pitchFamily="34" charset="-122"/>
@@ -3556,7 +3703,7 @@
               </a:rPr>
               <a:t>49% of the measured conveyor fleet</a:t>
             </a:r>
-            <a:endParaRPr lang="en-US" sz="1900" dirty="0"/>
+            <a:endParaRPr lang="en-US" sz="1800" dirty="0"/>
           </a:p>
           <a:p>
             <a:pPr indent="0" marL="0">
@@ -3566,9 +3713,9 @@
               <a:buNone/>
             </a:pPr>
             <a:r>
-              <a:rPr lang="en-US" sz="1900" dirty="0">
-                <a:solidFill>
-                  <a:srgbClr val="0B2B3A"/>
+              <a:rPr lang="en-US" sz="1800" dirty="0">
+                <a:solidFill>
+                  <a:srgbClr val="12333F"/>
                 </a:solidFill>
                 <a:latin typeface="Calibri" pitchFamily="34" charset="0"/>
                 <a:ea typeface="Calibri" pitchFamily="34" charset="-122"/>
@@ -3576,7 +3723,7 @@
               </a:rPr>
               <a:t>Level with a self-service bay</a:t>
             </a:r>
-            <a:endParaRPr lang="en-US" sz="1900" dirty="0"/>
+            <a:endParaRPr lang="en-US" sz="1800" dirty="0"/>
           </a:p>
         </p:txBody>
       </p:sp>
@@ -3588,20 +3735,20 @@
         </p:nvSpPr>
         <p:spPr>
           <a:xfrm>
-            <a:off x="6492240" y="2377440"/>
-            <a:ext cx="5029200" cy="3200400"/>
+            <a:off x="6223864" y="2788920"/>
+            <a:ext cx="5282032" cy="3115564"/>
           </a:xfrm>
           <a:prstGeom prst="roundRect">
             <a:avLst>
-              <a:gd name="adj" fmla="val 2286"/>
+              <a:gd name="adj" fmla="val 1761"/>
             </a:avLst>
           </a:prstGeom>
           <a:solidFill>
-            <a:srgbClr val="EAF2F5"/>
+            <a:srgbClr val="EDF4F6"/>
           </a:solidFill>
           <a:ln w="12700">
             <a:solidFill>
-              <a:srgbClr val="EAF2F5"/>
+              <a:srgbClr val="EDF4F6"/>
             </a:solidFill>
             <a:prstDash val="solid"/>
           </a:ln>
@@ -3615,26 +3762,29 @@
         </p:nvSpPr>
         <p:spPr>
           <a:xfrm>
-            <a:off x="6812280" y="2606040"/>
-            <a:ext cx="4389120" cy="320040"/>
-          </a:xfrm>
-          <a:prstGeom prst="rect">
-            <a:avLst/>
-          </a:prstGeom>
-          <a:noFill/>
-          <a:ln/>
-        </p:spPr>
-        <p:txBody>
-          <a:bodyPr wrap="square" lIns="0" tIns="0" rIns="0" bIns="0" rtlCol="0" anchor="ctr"/>
-          <a:lstStyle/>
-          <a:p>
-            <a:pPr indent="0" marL="0">
-              <a:buNone/>
-            </a:pPr>
-            <a:r>
-              <a:rPr lang="en-US" sz="1800" b="1" spc="120" kern="0" dirty="0">
-                <a:solidFill>
-                  <a:srgbClr val="D9532B"/>
+            <a:off x="6498184" y="3063240"/>
+            <a:ext cx="4733392" cy="296164"/>
+          </a:xfrm>
+          <a:prstGeom prst="rect">
+            <a:avLst/>
+          </a:prstGeom>
+          <a:noFill/>
+          <a:ln/>
+        </p:spPr>
+        <p:txBody>
+          <a:bodyPr wrap="square" lIns="0" tIns="0" rIns="0" bIns="0" rtlCol="0" anchor="t"/>
+          <a:lstStyle/>
+          <a:p>
+            <a:pPr indent="0" marL="0">
+              <a:lnSpc>
+                <a:spcPts val="1900"/>
+              </a:lnSpc>
+              <a:buNone/>
+            </a:pPr>
+            <a:r>
+              <a:rPr lang="en-US" sz="1400" b="1" spc="200" kern="0" dirty="0">
+                <a:solidFill>
+                  <a:srgbClr val="C25332"/>
                 </a:solidFill>
                 <a:latin typeface="Calibri" pitchFamily="34" charset="0"/>
                 <a:ea typeface="Calibri" pitchFamily="34" charset="-122"/>
@@ -3642,7 +3792,7 @@
               </a:rPr>
               <a:t>WHAT WE CANNOT</a:t>
             </a:r>
-            <a:endParaRPr lang="en-US" sz="1800" dirty="0"/>
+            <a:endParaRPr lang="en-US" sz="1400" dirty="0"/>
           </a:p>
         </p:txBody>
       </p:sp>
@@ -3654,26 +3804,29 @@
         </p:nvSpPr>
         <p:spPr>
           <a:xfrm>
-            <a:off x="6812280" y="3017520"/>
-            <a:ext cx="4389120" cy="822960"/>
-          </a:xfrm>
-          <a:prstGeom prst="rect">
-            <a:avLst/>
-          </a:prstGeom>
-          <a:noFill/>
-          <a:ln/>
-        </p:spPr>
-        <p:txBody>
-          <a:bodyPr wrap="square" lIns="0" tIns="0" rIns="0" bIns="0" rtlCol="0" anchor="ctr"/>
-          <a:lstStyle/>
-          <a:p>
-            <a:pPr indent="0" marL="0">
-              <a:buNone/>
-            </a:pPr>
-            <a:r>
-              <a:rPr lang="en-US" sz="4800" b="1" dirty="0">
-                <a:solidFill>
-                  <a:srgbClr val="D9532B"/>
+            <a:off x="6498184" y="3505708"/>
+            <a:ext cx="4733392" cy="689864"/>
+          </a:xfrm>
+          <a:prstGeom prst="rect">
+            <a:avLst/>
+          </a:prstGeom>
+          <a:noFill/>
+          <a:ln/>
+        </p:spPr>
+        <p:txBody>
+          <a:bodyPr wrap="square" lIns="0" tIns="0" rIns="0" bIns="0" rtlCol="0" anchor="t"/>
+          <a:lstStyle/>
+          <a:p>
+            <a:pPr indent="0" marL="0">
+              <a:lnSpc>
+                <a:spcPts val="5000"/>
+              </a:lnSpc>
+              <a:buNone/>
+            </a:pPr>
+            <a:r>
+              <a:rPr lang="en-US" sz="3600" b="1" dirty="0">
+                <a:solidFill>
+                  <a:srgbClr val="C25332"/>
                 </a:solidFill>
                 <a:latin typeface="Cambria" pitchFamily="34" charset="0"/>
                 <a:ea typeface="Cambria" pitchFamily="34" charset="-122"/>
@@ -3681,7 +3834,7 @@
               </a:rPr>
               <a:t>189%</a:t>
             </a:r>
-            <a:endParaRPr lang="en-US" sz="4800" dirty="0"/>
+            <a:endParaRPr lang="en-US" sz="3600" dirty="0"/>
           </a:p>
         </p:txBody>
       </p:sp>
@@ -3693,29 +3846,29 @@
         </p:nvSpPr>
         <p:spPr>
           <a:xfrm>
-            <a:off x="6812280" y="3931920"/>
-            <a:ext cx="4389120" cy="1463040"/>
-          </a:xfrm>
-          <a:prstGeom prst="rect">
-            <a:avLst/>
-          </a:prstGeom>
-          <a:noFill/>
-          <a:ln/>
-        </p:spPr>
-        <p:txBody>
-          <a:bodyPr wrap="square" lIns="0" tIns="0" rIns="0" bIns="0" rtlCol="0" anchor="ctr"/>
+            <a:off x="6498184" y="4305300"/>
+            <a:ext cx="4733392" cy="1324864"/>
+          </a:xfrm>
+          <a:prstGeom prst="rect">
+            <a:avLst/>
+          </a:prstGeom>
+          <a:noFill/>
+          <a:ln/>
+        </p:spPr>
+        <p:txBody>
+          <a:bodyPr wrap="square" lIns="0" tIns="0" rIns="0" bIns="0" rtlCol="0" anchor="t"/>
           <a:lstStyle/>
           <a:p>
             <a:pPr indent="0" marL="0">
               <a:lnSpc>
-                <a:spcPts val="2600"/>
+                <a:spcPts val="2500"/>
               </a:lnSpc>
               <a:buNone/>
             </a:pPr>
             <a:r>
               <a:rPr lang="en-US" sz="1800" dirty="0">
                 <a:solidFill>
-                  <a:srgbClr val="0B2B3A"/>
+                  <a:srgbClr val="12333F"/>
                 </a:solidFill>
                 <a:latin typeface="Calibri" pitchFamily="34" charset="0"/>
                 <a:ea typeface="Calibri" pitchFamily="34" charset="-122"/>
@@ -3724,6 +3877,45 @@
               <a:t>of a reclaim-equipped tunnel. It uses about half what we do per car, and the gap is structural — reclaim needs captured runoff, which a driveway cannot give.</a:t>
             </a:r>
             <a:endParaRPr lang="en-US" sz="1800" dirty="0"/>
+          </a:p>
+        </p:txBody>
+      </p:sp>
+      <p:sp>
+        <p:nvSpPr>
+          <p:cNvPr id="12" name="Text 10"/>
+          <p:cNvSpPr txBox="1"/>
+          <p:nvPr/>
+        </p:nvSpPr>
+        <p:spPr>
+          <a:xfrm>
+            <a:off x="685800" y="6327648"/>
+            <a:ext cx="10820095" cy="237744"/>
+          </a:xfrm>
+          <a:prstGeom prst="rect">
+            <a:avLst/>
+          </a:prstGeom>
+          <a:noFill/>
+          <a:ln/>
+        </p:spPr>
+        <p:txBody>
+          <a:bodyPr wrap="square" lIns="0" tIns="0" rIns="0" bIns="0" rtlCol="0" anchor="t"/>
+          <a:lstStyle/>
+          <a:p>
+            <a:pPr indent="0" marL="0">
+              <a:buNone/>
+            </a:pPr>
+            <a:r>
+              <a:rPr lang="en-US" sz="1100" dirty="0">
+                <a:solidFill>
+                  <a:srgbClr val="68808B"/>
+                </a:solidFill>
+                <a:latin typeface="Calibri" pitchFamily="34" charset="0"/>
+                <a:ea typeface="Calibri" pitchFamily="34" charset="-122"/>
+                <a:cs typeface="Calibri" pitchFamily="34" charset="-120"/>
+              </a:rPr>
+              <a:t>EPA WaterSense 2012 · International Carwash Association 2018 · Zaneti et al. 2013</a:t>
+            </a:r>
+            <a:endParaRPr lang="en-US" sz="1100" dirty="0"/>
           </a:p>
         </p:txBody>
       </p:sp>
@@ -3741,7 +3933,7 @@
     <p:bg>
       <p:bgPr>
         <a:solidFill>
-          <a:srgbClr val="0B2B3A"/>
+          <a:srgbClr val="12333F"/>
         </a:solidFill>
       </p:bgPr>
     </p:bg>
@@ -3767,24 +3959,63 @@
         </p:nvSpPr>
         <p:spPr>
           <a:xfrm>
-            <a:off x="640080" y="777240"/>
-            <a:ext cx="10881360" cy="777240"/>
-          </a:xfrm>
-          <a:prstGeom prst="rect">
-            <a:avLst/>
-          </a:prstGeom>
-          <a:noFill/>
-          <a:ln/>
-        </p:spPr>
-        <p:txBody>
-          <a:bodyPr wrap="square" lIns="0" tIns="0" rIns="0" bIns="0" rtlCol="0" anchor="ctr"/>
-          <a:lstStyle/>
-          <a:p>
-            <a:pPr indent="0" marL="0">
-              <a:buNone/>
-            </a:pPr>
-            <a:r>
-              <a:rPr lang="en-US" sz="4000" b="1" dirty="0">
+            <a:off x="685800" y="685800"/>
+            <a:ext cx="10820095" cy="274320"/>
+          </a:xfrm>
+          <a:prstGeom prst="rect">
+            <a:avLst/>
+          </a:prstGeom>
+          <a:noFill/>
+          <a:ln/>
+        </p:spPr>
+        <p:txBody>
+          <a:bodyPr wrap="square" lIns="0" tIns="0" rIns="0" bIns="0" rtlCol="0" anchor="t"/>
+          <a:lstStyle/>
+          <a:p>
+            <a:pPr indent="0" marL="0">
+              <a:buNone/>
+            </a:pPr>
+            <a:r>
+              <a:rPr lang="en-US" sz="1400" b="1" spc="200" kern="0" dirty="0">
+                <a:solidFill>
+                  <a:srgbClr val="17A398"/>
+                </a:solidFill>
+                <a:latin typeface="Calibri" pitchFamily="34" charset="0"/>
+                <a:ea typeface="Calibri" pitchFamily="34" charset="-122"/>
+                <a:cs typeface="Calibri" pitchFamily="34" charset="-120"/>
+              </a:rPr>
+              <a:t>WHAT WE WOULD TELL THE COMPANY</a:t>
+            </a:r>
+            <a:endParaRPr lang="en-US" sz="1400" dirty="0"/>
+          </a:p>
+        </p:txBody>
+      </p:sp>
+      <p:sp>
+        <p:nvSpPr>
+          <p:cNvPr id="3" name="Text 1"/>
+          <p:cNvSpPr txBox="1"/>
+          <p:nvPr/>
+        </p:nvSpPr>
+        <p:spPr>
+          <a:xfrm>
+            <a:off x="685800" y="1024128"/>
+            <a:ext cx="9897085" cy="868680"/>
+          </a:xfrm>
+          <a:prstGeom prst="rect">
+            <a:avLst/>
+          </a:prstGeom>
+          <a:noFill/>
+          <a:ln/>
+        </p:spPr>
+        <p:txBody>
+          <a:bodyPr wrap="square" lIns="0" tIns="0" rIns="0" bIns="0" rtlCol="0" anchor="t"/>
+          <a:lstStyle/>
+          <a:p>
+            <a:pPr indent="0" marL="0">
+              <a:buNone/>
+            </a:pPr>
+            <a:r>
+              <a:rPr lang="en-US" sz="3000" b="1" dirty="0">
                 <a:solidFill>
                   <a:srgbClr val="FFFFFF"/>
                 </a:solidFill>
@@ -3792,40 +4023,43 @@
                 <a:ea typeface="Cambria" pitchFamily="34" charset="-122"/>
                 <a:cs typeface="Cambria" pitchFamily="34" charset="-120"/>
               </a:rPr>
-              <a:t>What we would tell the company</a:t>
-            </a:r>
-            <a:endParaRPr lang="en-US" sz="4000" dirty="0"/>
-          </a:p>
-        </p:txBody>
-      </p:sp>
-      <p:sp>
-        <p:nvSpPr>
-          <p:cNvPr id="3" name="Text 1"/>
-          <p:cNvSpPr txBox="1"/>
-          <p:nvPr/>
-        </p:nvSpPr>
-        <p:spPr>
-          <a:xfrm>
-            <a:off x="640080" y="1828800"/>
-            <a:ext cx="548640" cy="548640"/>
-          </a:xfrm>
-          <a:prstGeom prst="rect">
-            <a:avLst/>
-          </a:prstGeom>
-          <a:noFill/>
-          <a:ln/>
-        </p:spPr>
-        <p:txBody>
-          <a:bodyPr wrap="square" lIns="0" tIns="0" rIns="0" bIns="0" rtlCol="0" anchor="ctr"/>
-          <a:lstStyle/>
-          <a:p>
-            <a:pPr indent="0" marL="0">
-              <a:buNone/>
-            </a:pPr>
-            <a:r>
-              <a:rPr lang="en-US" sz="3000" b="1" dirty="0">
-                <a:solidFill>
-                  <a:srgbClr val="00A896"/>
+              <a:t>Three recommendations</a:t>
+            </a:r>
+            <a:endParaRPr lang="en-US" sz="3000" dirty="0"/>
+          </a:p>
+        </p:txBody>
+      </p:sp>
+      <p:sp>
+        <p:nvSpPr>
+          <p:cNvPr id="4" name="Text 2"/>
+          <p:cNvSpPr txBox="1"/>
+          <p:nvPr/>
+        </p:nvSpPr>
+        <p:spPr>
+          <a:xfrm>
+            <a:off x="685800" y="2240280"/>
+            <a:ext cx="666979" cy="473964"/>
+          </a:xfrm>
+          <a:prstGeom prst="rect">
+            <a:avLst/>
+          </a:prstGeom>
+          <a:noFill/>
+          <a:ln/>
+        </p:spPr>
+        <p:txBody>
+          <a:bodyPr wrap="square" lIns="0" tIns="0" rIns="0" bIns="0" rtlCol="0" anchor="t"/>
+          <a:lstStyle/>
+          <a:p>
+            <a:pPr indent="0" marL="0">
+              <a:lnSpc>
+                <a:spcPts val="3300"/>
+              </a:lnSpc>
+              <a:buNone/>
+            </a:pPr>
+            <a:r>
+              <a:rPr lang="en-US" sz="2400" b="1" dirty="0">
+                <a:solidFill>
+                  <a:srgbClr val="17A398"/>
                 </a:solidFill>
                 <a:latin typeface="Cambria" pitchFamily="34" charset="0"/>
                 <a:ea typeface="Cambria" pitchFamily="34" charset="-122"/>
@@ -3833,36 +4067,39 @@
               </a:rPr>
               <a:t>1</a:t>
             </a:r>
-            <a:endParaRPr lang="en-US" sz="3000" dirty="0"/>
-          </a:p>
-        </p:txBody>
-      </p:sp>
-      <p:sp>
-        <p:nvSpPr>
-          <p:cNvPr id="4" name="Text 2"/>
-          <p:cNvSpPr txBox="1"/>
-          <p:nvPr/>
-        </p:nvSpPr>
-        <p:spPr>
-          <a:xfrm>
-            <a:off x="1325880" y="1828800"/>
-            <a:ext cx="10058400" cy="411480"/>
-          </a:xfrm>
-          <a:prstGeom prst="rect">
-            <a:avLst/>
-          </a:prstGeom>
-          <a:noFill/>
-          <a:ln/>
-        </p:spPr>
-        <p:txBody>
-          <a:bodyPr wrap="square" lIns="0" tIns="0" rIns="0" bIns="0" rtlCol="0" anchor="ctr"/>
-          <a:lstStyle/>
-          <a:p>
-            <a:pPr indent="0" marL="0">
-              <a:buNone/>
-            </a:pPr>
-            <a:r>
-              <a:rPr lang="en-US" sz="2400" b="1" dirty="0">
+            <a:endParaRPr lang="en-US" sz="2400" dirty="0"/>
+          </a:p>
+        </p:txBody>
+      </p:sp>
+      <p:sp>
+        <p:nvSpPr>
+          <p:cNvPr id="5" name="Text 3"/>
+          <p:cNvSpPr txBox="1"/>
+          <p:nvPr/>
+        </p:nvSpPr>
+        <p:spPr>
+          <a:xfrm>
+            <a:off x="1608811" y="2240280"/>
+            <a:ext cx="9897085" cy="410464"/>
+          </a:xfrm>
+          <a:prstGeom prst="rect">
+            <a:avLst/>
+          </a:prstGeom>
+          <a:noFill/>
+          <a:ln/>
+        </p:spPr>
+        <p:txBody>
+          <a:bodyPr wrap="square" lIns="0" tIns="0" rIns="0" bIns="0" rtlCol="0" anchor="t"/>
+          <a:lstStyle/>
+          <a:p>
+            <a:pPr indent="0" marL="0">
+              <a:lnSpc>
+                <a:spcPts val="2800"/>
+              </a:lnSpc>
+              <a:buNone/>
+            </a:pPr>
+            <a:r>
+              <a:rPr lang="en-US" sz="2000" b="1" dirty="0">
                 <a:solidFill>
                   <a:srgbClr val="FFFFFF"/>
                 </a:solidFill>
@@ -3872,77 +4109,83 @@
               </a:rPr>
               <a:t>Quote capacity with a service level</a:t>
             </a:r>
-            <a:endParaRPr lang="en-US" sz="2400" dirty="0"/>
-          </a:p>
-        </p:txBody>
-      </p:sp>
-      <p:sp>
-        <p:nvSpPr>
-          <p:cNvPr id="5" name="Text 3"/>
-          <p:cNvSpPr txBox="1"/>
-          <p:nvPr/>
-        </p:nvSpPr>
-        <p:spPr>
-          <a:xfrm>
-            <a:off x="1325880" y="2286000"/>
-            <a:ext cx="10058400" cy="411480"/>
-          </a:xfrm>
-          <a:prstGeom prst="rect">
-            <a:avLst/>
-          </a:prstGeom>
-          <a:noFill/>
-          <a:ln/>
-        </p:spPr>
-        <p:txBody>
-          <a:bodyPr wrap="square" lIns="0" tIns="0" rIns="0" bIns="0" rtlCol="0" anchor="ctr"/>
-          <a:lstStyle/>
-          <a:p>
-            <a:pPr indent="0" marL="0">
-              <a:buNone/>
-            </a:pPr>
-            <a:r>
-              <a:rPr lang="en-US" sz="1900" dirty="0">
-                <a:solidFill>
-                  <a:srgbClr val="9FB6C0"/>
+            <a:endParaRPr lang="en-US" sz="2000" dirty="0"/>
+          </a:p>
+        </p:txBody>
+      </p:sp>
+      <p:sp>
+        <p:nvSpPr>
+          <p:cNvPr id="6" name="Text 4"/>
+          <p:cNvSpPr txBox="1"/>
+          <p:nvPr/>
+        </p:nvSpPr>
+        <p:spPr>
+          <a:xfrm>
+            <a:off x="1608811" y="2705608"/>
+            <a:ext cx="9897085" cy="296164"/>
+          </a:xfrm>
+          <a:prstGeom prst="rect">
+            <a:avLst/>
+          </a:prstGeom>
+          <a:noFill/>
+          <a:ln/>
+        </p:spPr>
+        <p:txBody>
+          <a:bodyPr wrap="square" lIns="0" tIns="0" rIns="0" bIns="0" rtlCol="0" anchor="t"/>
+          <a:lstStyle/>
+          <a:p>
+            <a:pPr indent="0" marL="0">
+              <a:lnSpc>
+                <a:spcPts val="1900"/>
+              </a:lnSpc>
+              <a:buNone/>
+            </a:pPr>
+            <a:r>
+              <a:rPr lang="en-US" sz="1400" dirty="0">
+                <a:solidFill>
+                  <a:srgbClr val="AFC7D0"/>
                 </a:solidFill>
                 <a:latin typeface="Calibri" pitchFamily="34" charset="0"/>
                 <a:ea typeface="Calibri" pitchFamily="34" charset="-122"/>
                 <a:cs typeface="Calibri" pitchFamily="34" charset="-120"/>
               </a:rPr>
-              <a:t>2 / 4 / 5 jobs at 95%, never a bare number</a:t>
-            </a:r>
-            <a:endParaRPr lang="en-US" sz="1900" dirty="0"/>
-          </a:p>
-        </p:txBody>
-      </p:sp>
-      <p:sp>
-        <p:nvSpPr>
-          <p:cNvPr id="6" name="Text 4"/>
-          <p:cNvSpPr txBox="1"/>
-          <p:nvPr/>
-        </p:nvSpPr>
-        <p:spPr>
-          <a:xfrm>
-            <a:off x="640080" y="3063240"/>
-            <a:ext cx="548640" cy="548640"/>
-          </a:xfrm>
-          <a:prstGeom prst="rect">
-            <a:avLst/>
-          </a:prstGeom>
-          <a:noFill/>
-          <a:ln/>
-        </p:spPr>
-        <p:txBody>
-          <a:bodyPr wrap="square" lIns="0" tIns="0" rIns="0" bIns="0" rtlCol="0" anchor="ctr"/>
-          <a:lstStyle/>
-          <a:p>
-            <a:pPr indent="0" marL="0">
-              <a:buNone/>
-            </a:pPr>
-            <a:r>
-              <a:rPr lang="en-US" sz="3000" b="1" dirty="0">
-                <a:solidFill>
-                  <a:srgbClr val="00A896"/>
+              <a:t>2 / 4 / 5 jobs at 95% — never a bare number</a:t>
+            </a:r>
+            <a:endParaRPr lang="en-US" sz="1400" dirty="0"/>
+          </a:p>
+        </p:txBody>
+      </p:sp>
+      <p:sp>
+        <p:nvSpPr>
+          <p:cNvPr id="7" name="Text 5"/>
+          <p:cNvSpPr txBox="1"/>
+          <p:nvPr/>
+        </p:nvSpPr>
+        <p:spPr>
+          <a:xfrm>
+            <a:off x="685800" y="3383280"/>
+            <a:ext cx="666979" cy="473964"/>
+          </a:xfrm>
+          <a:prstGeom prst="rect">
+            <a:avLst/>
+          </a:prstGeom>
+          <a:noFill/>
+          <a:ln/>
+        </p:spPr>
+        <p:txBody>
+          <a:bodyPr wrap="square" lIns="0" tIns="0" rIns="0" bIns="0" rtlCol="0" anchor="t"/>
+          <a:lstStyle/>
+          <a:p>
+            <a:pPr indent="0" marL="0">
+              <a:lnSpc>
+                <a:spcPts val="3300"/>
+              </a:lnSpc>
+              <a:buNone/>
+            </a:pPr>
+            <a:r>
+              <a:rPr lang="en-US" sz="2400" b="1" dirty="0">
+                <a:solidFill>
+                  <a:srgbClr val="17A398"/>
                 </a:solidFill>
                 <a:latin typeface="Cambria" pitchFamily="34" charset="0"/>
                 <a:ea typeface="Cambria" pitchFamily="34" charset="-122"/>
@@ -3950,36 +4193,39 @@
               </a:rPr>
               <a:t>2</a:t>
             </a:r>
-            <a:endParaRPr lang="en-US" sz="3000" dirty="0"/>
-          </a:p>
-        </p:txBody>
-      </p:sp>
-      <p:sp>
-        <p:nvSpPr>
-          <p:cNvPr id="7" name="Text 5"/>
-          <p:cNvSpPr txBox="1"/>
-          <p:nvPr/>
-        </p:nvSpPr>
-        <p:spPr>
-          <a:xfrm>
-            <a:off x="1325880" y="3063240"/>
-            <a:ext cx="10058400" cy="411480"/>
-          </a:xfrm>
-          <a:prstGeom prst="rect">
-            <a:avLst/>
-          </a:prstGeom>
-          <a:noFill/>
-          <a:ln/>
-        </p:spPr>
-        <p:txBody>
-          <a:bodyPr wrap="square" lIns="0" tIns="0" rIns="0" bIns="0" rtlCol="0" anchor="ctr"/>
-          <a:lstStyle/>
-          <a:p>
-            <a:pPr indent="0" marL="0">
-              <a:buNone/>
-            </a:pPr>
-            <a:r>
-              <a:rPr lang="en-US" sz="2400" b="1" dirty="0">
+            <a:endParaRPr lang="en-US" sz="2400" dirty="0"/>
+          </a:p>
+        </p:txBody>
+      </p:sp>
+      <p:sp>
+        <p:nvSpPr>
+          <p:cNvPr id="8" name="Text 6"/>
+          <p:cNvSpPr txBox="1"/>
+          <p:nvPr/>
+        </p:nvSpPr>
+        <p:spPr>
+          <a:xfrm>
+            <a:off x="1608811" y="3383280"/>
+            <a:ext cx="9897085" cy="410464"/>
+          </a:xfrm>
+          <a:prstGeom prst="rect">
+            <a:avLst/>
+          </a:prstGeom>
+          <a:noFill/>
+          <a:ln/>
+        </p:spPr>
+        <p:txBody>
+          <a:bodyPr wrap="square" lIns="0" tIns="0" rIns="0" bIns="0" rtlCol="0" anchor="t"/>
+          <a:lstStyle/>
+          <a:p>
+            <a:pPr indent="0" marL="0">
+              <a:lnSpc>
+                <a:spcPts val="2800"/>
+              </a:lnSpc>
+              <a:buNone/>
+            </a:pPr>
+            <a:r>
+              <a:rPr lang="en-US" sz="2000" b="1" dirty="0">
                 <a:solidFill>
                   <a:srgbClr val="FFFFFF"/>
                 </a:solidFill>
@@ -3989,38 +4235,41 @@
               </a:rPr>
               <a:t>Plan on refills, not jobs per tank</a:t>
             </a:r>
-            <a:endParaRPr lang="en-US" sz="2400" dirty="0"/>
-          </a:p>
-        </p:txBody>
-      </p:sp>
-      <p:sp>
-        <p:nvSpPr>
-          <p:cNvPr id="8" name="Text 6"/>
-          <p:cNvSpPr txBox="1"/>
-          <p:nvPr/>
-        </p:nvSpPr>
-        <p:spPr>
-          <a:xfrm>
-            <a:off x="1325880" y="3520440"/>
-            <a:ext cx="10058400" cy="411480"/>
-          </a:xfrm>
-          <a:prstGeom prst="rect">
-            <a:avLst/>
-          </a:prstGeom>
-          <a:noFill/>
-          <a:ln/>
-        </p:spPr>
-        <p:txBody>
-          <a:bodyPr wrap="square" lIns="0" tIns="0" rIns="0" bIns="0" rtlCol="0" anchor="ctr"/>
-          <a:lstStyle/>
-          <a:p>
-            <a:pPr indent="0" marL="0">
-              <a:buNone/>
-            </a:pPr>
-            <a:r>
-              <a:rPr lang="en-US" sz="1900" dirty="0">
-                <a:solidFill>
-                  <a:srgbClr val="9FB6C0"/>
+            <a:endParaRPr lang="en-US" sz="2000" dirty="0"/>
+          </a:p>
+        </p:txBody>
+      </p:sp>
+      <p:sp>
+        <p:nvSpPr>
+          <p:cNvPr id="9" name="Text 7"/>
+          <p:cNvSpPr txBox="1"/>
+          <p:nvPr/>
+        </p:nvSpPr>
+        <p:spPr>
+          <a:xfrm>
+            <a:off x="1608811" y="3848608"/>
+            <a:ext cx="9897085" cy="296164"/>
+          </a:xfrm>
+          <a:prstGeom prst="rect">
+            <a:avLst/>
+          </a:prstGeom>
+          <a:noFill/>
+          <a:ln/>
+        </p:spPr>
+        <p:txBody>
+          <a:bodyPr wrap="square" lIns="0" tIns="0" rIns="0" bIns="0" rtlCol="0" anchor="t"/>
+          <a:lstStyle/>
+          <a:p>
+            <a:pPr indent="0" marL="0">
+              <a:lnSpc>
+                <a:spcPts val="1900"/>
+              </a:lnSpc>
+              <a:buNone/>
+            </a:pPr>
+            <a:r>
+              <a:rPr lang="en-US" sz="1400" dirty="0">
+                <a:solidFill>
+                  <a:srgbClr val="AFC7D0"/>
                 </a:solidFill>
                 <a:latin typeface="Calibri" pitchFamily="34" charset="0"/>
                 <a:ea typeface="Calibri" pitchFamily="34" charset="-122"/>
@@ -4028,38 +4277,41 @@
               </a:rPr>
               <a:t>0.88 / 0.45 / 0.26 interruptions per crew-day</a:t>
             </a:r>
-            <a:endParaRPr lang="en-US" sz="1900" dirty="0"/>
-          </a:p>
-        </p:txBody>
-      </p:sp>
-      <p:sp>
-        <p:nvSpPr>
-          <p:cNvPr id="9" name="Text 7"/>
-          <p:cNvSpPr txBox="1"/>
-          <p:nvPr/>
-        </p:nvSpPr>
-        <p:spPr>
-          <a:xfrm>
-            <a:off x="640080" y="4297680"/>
-            <a:ext cx="548640" cy="548640"/>
-          </a:xfrm>
-          <a:prstGeom prst="rect">
-            <a:avLst/>
-          </a:prstGeom>
-          <a:noFill/>
-          <a:ln/>
-        </p:spPr>
-        <p:txBody>
-          <a:bodyPr wrap="square" lIns="0" tIns="0" rIns="0" bIns="0" rtlCol="0" anchor="ctr"/>
-          <a:lstStyle/>
-          <a:p>
-            <a:pPr indent="0" marL="0">
-              <a:buNone/>
-            </a:pPr>
-            <a:r>
-              <a:rPr lang="en-US" sz="3000" b="1" dirty="0">
-                <a:solidFill>
-                  <a:srgbClr val="00A896"/>
+            <a:endParaRPr lang="en-US" sz="1400" dirty="0"/>
+          </a:p>
+        </p:txBody>
+      </p:sp>
+      <p:sp>
+        <p:nvSpPr>
+          <p:cNvPr id="10" name="Text 8"/>
+          <p:cNvSpPr txBox="1"/>
+          <p:nvPr/>
+        </p:nvSpPr>
+        <p:spPr>
+          <a:xfrm>
+            <a:off x="685800" y="4526280"/>
+            <a:ext cx="666979" cy="473964"/>
+          </a:xfrm>
+          <a:prstGeom prst="rect">
+            <a:avLst/>
+          </a:prstGeom>
+          <a:noFill/>
+          <a:ln/>
+        </p:spPr>
+        <p:txBody>
+          <a:bodyPr wrap="square" lIns="0" tIns="0" rIns="0" bIns="0" rtlCol="0" anchor="t"/>
+          <a:lstStyle/>
+          <a:p>
+            <a:pPr indent="0" marL="0">
+              <a:lnSpc>
+                <a:spcPts val="3300"/>
+              </a:lnSpc>
+              <a:buNone/>
+            </a:pPr>
+            <a:r>
+              <a:rPr lang="en-US" sz="2400" b="1" dirty="0">
+                <a:solidFill>
+                  <a:srgbClr val="17A398"/>
                 </a:solidFill>
                 <a:latin typeface="Cambria" pitchFamily="34" charset="0"/>
                 <a:ea typeface="Cambria" pitchFamily="34" charset="-122"/>
@@ -4067,36 +4319,39 @@
               </a:rPr>
               <a:t>3</a:t>
             </a:r>
-            <a:endParaRPr lang="en-US" sz="3000" dirty="0"/>
-          </a:p>
-        </p:txBody>
-      </p:sp>
-      <p:sp>
-        <p:nvSpPr>
-          <p:cNvPr id="10" name="Text 8"/>
-          <p:cNvSpPr txBox="1"/>
-          <p:nvPr/>
-        </p:nvSpPr>
-        <p:spPr>
-          <a:xfrm>
-            <a:off x="1325880" y="4297680"/>
-            <a:ext cx="10058400" cy="411480"/>
-          </a:xfrm>
-          <a:prstGeom prst="rect">
-            <a:avLst/>
-          </a:prstGeom>
-          <a:noFill/>
-          <a:ln/>
-        </p:spPr>
-        <p:txBody>
-          <a:bodyPr wrap="square" lIns="0" tIns="0" rIns="0" bIns="0" rtlCol="0" anchor="ctr"/>
-          <a:lstStyle/>
-          <a:p>
-            <a:pPr indent="0" marL="0">
-              <a:buNone/>
-            </a:pPr>
-            <a:r>
-              <a:rPr lang="en-US" sz="2400" b="1" dirty="0">
+            <a:endParaRPr lang="en-US" sz="2400" dirty="0"/>
+          </a:p>
+        </p:txBody>
+      </p:sp>
+      <p:sp>
+        <p:nvSpPr>
+          <p:cNvPr id="11" name="Text 9"/>
+          <p:cNvSpPr txBox="1"/>
+          <p:nvPr/>
+        </p:nvSpPr>
+        <p:spPr>
+          <a:xfrm>
+            <a:off x="1608811" y="4526280"/>
+            <a:ext cx="9897085" cy="410464"/>
+          </a:xfrm>
+          <a:prstGeom prst="rect">
+            <a:avLst/>
+          </a:prstGeom>
+          <a:noFill/>
+          <a:ln/>
+        </p:spPr>
+        <p:txBody>
+          <a:bodyPr wrap="square" lIns="0" tIns="0" rIns="0" bIns="0" rtlCol="0" anchor="t"/>
+          <a:lstStyle/>
+          <a:p>
+            <a:pPr indent="0" marL="0">
+              <a:lnSpc>
+                <a:spcPts val="2800"/>
+              </a:lnSpc>
+              <a:buNone/>
+            </a:pPr>
+            <a:r>
+              <a:rPr lang="en-US" sz="2000" b="1" dirty="0">
                 <a:solidFill>
                   <a:srgbClr val="FFFFFF"/>
                 </a:solidFill>
@@ -4106,38 +4361,41 @@
               </a:rPr>
               <a:t>Feed the optimiser the interval</a:t>
             </a:r>
-            <a:endParaRPr lang="en-US" sz="2400" dirty="0"/>
-          </a:p>
-        </p:txBody>
-      </p:sp>
-      <p:sp>
-        <p:nvSpPr>
-          <p:cNvPr id="11" name="Text 9"/>
-          <p:cNvSpPr txBox="1"/>
-          <p:nvPr/>
-        </p:nvSpPr>
-        <p:spPr>
-          <a:xfrm>
-            <a:off x="1325880" y="4754880"/>
-            <a:ext cx="10058400" cy="411480"/>
-          </a:xfrm>
-          <a:prstGeom prst="rect">
-            <a:avLst/>
-          </a:prstGeom>
-          <a:noFill/>
-          <a:ln/>
-        </p:spPr>
-        <p:txBody>
-          <a:bodyPr wrap="square" lIns="0" tIns="0" rIns="0" bIns="0" rtlCol="0" anchor="ctr"/>
-          <a:lstStyle/>
-          <a:p>
-            <a:pPr indent="0" marL="0">
-              <a:buNone/>
-            </a:pPr>
-            <a:r>
-              <a:rPr lang="en-US" sz="1900" dirty="0">
-                <a:solidFill>
-                  <a:srgbClr val="9FB6C0"/>
+            <a:endParaRPr lang="en-US" sz="2000" dirty="0"/>
+          </a:p>
+        </p:txBody>
+      </p:sp>
+      <p:sp>
+        <p:nvSpPr>
+          <p:cNvPr id="12" name="Text 10"/>
+          <p:cNvSpPr txBox="1"/>
+          <p:nvPr/>
+        </p:nvSpPr>
+        <p:spPr>
+          <a:xfrm>
+            <a:off x="1608811" y="4991608"/>
+            <a:ext cx="9897085" cy="296164"/>
+          </a:xfrm>
+          <a:prstGeom prst="rect">
+            <a:avLst/>
+          </a:prstGeom>
+          <a:noFill/>
+          <a:ln/>
+        </p:spPr>
+        <p:txBody>
+          <a:bodyPr wrap="square" lIns="0" tIns="0" rIns="0" bIns="0" rtlCol="0" anchor="t"/>
+          <a:lstStyle/>
+          <a:p>
+            <a:pPr indent="0" marL="0">
+              <a:lnSpc>
+                <a:spcPts val="1900"/>
+              </a:lnSpc>
+              <a:buNone/>
+            </a:pPr>
+            <a:r>
+              <a:rPr lang="en-US" sz="1400" dirty="0">
+                <a:solidFill>
+                  <a:srgbClr val="AFC7D0"/>
                 </a:solidFill>
                 <a:latin typeface="Calibri" pitchFamily="34" charset="0"/>
                 <a:ea typeface="Calibri" pitchFamily="34" charset="-122"/>
@@ -4145,38 +4403,41 @@
               </a:rPr>
               <a:t>the point estimate doubles the rate of running dry</a:t>
             </a:r>
-            <a:endParaRPr lang="en-US" sz="1900" dirty="0"/>
-          </a:p>
-        </p:txBody>
-      </p:sp>
-      <p:sp>
-        <p:nvSpPr>
-          <p:cNvPr id="12" name="Text 10"/>
-          <p:cNvSpPr txBox="1"/>
-          <p:nvPr/>
-        </p:nvSpPr>
-        <p:spPr>
-          <a:xfrm>
-            <a:off x="640080" y="5623560"/>
-            <a:ext cx="10881360" cy="731520"/>
-          </a:xfrm>
-          <a:prstGeom prst="rect">
-            <a:avLst/>
-          </a:prstGeom>
-          <a:noFill/>
-          <a:ln/>
-        </p:spPr>
-        <p:txBody>
-          <a:bodyPr wrap="square" lIns="0" tIns="0" rIns="0" bIns="0" rtlCol="0" anchor="ctr"/>
-          <a:lstStyle/>
-          <a:p>
-            <a:pPr indent="0" marL="0">
-              <a:buNone/>
-            </a:pPr>
-            <a:r>
-              <a:rPr lang="en-US" sz="1900" i="1" dirty="0">
-                <a:solidFill>
-                  <a:srgbClr val="00A896"/>
+            <a:endParaRPr lang="en-US" sz="1400" dirty="0"/>
+          </a:p>
+        </p:txBody>
+      </p:sp>
+      <p:sp>
+        <p:nvSpPr>
+          <p:cNvPr id="13" name="Text 11"/>
+          <p:cNvSpPr txBox="1"/>
+          <p:nvPr/>
+        </p:nvSpPr>
+        <p:spPr>
+          <a:xfrm>
+            <a:off x="685800" y="5715000"/>
+            <a:ext cx="10820095" cy="296164"/>
+          </a:xfrm>
+          <a:prstGeom prst="rect">
+            <a:avLst/>
+          </a:prstGeom>
+          <a:noFill/>
+          <a:ln/>
+        </p:spPr>
+        <p:txBody>
+          <a:bodyPr wrap="square" lIns="0" tIns="0" rIns="0" bIns="0" rtlCol="0" anchor="t"/>
+          <a:lstStyle/>
+          <a:p>
+            <a:pPr indent="0" marL="0">
+              <a:lnSpc>
+                <a:spcPts val="1900"/>
+              </a:lnSpc>
+              <a:buNone/>
+            </a:pPr>
+            <a:r>
+              <a:rPr lang="en-US" sz="1400" i="1" dirty="0">
+                <a:solidFill>
+                  <a:srgbClr val="17A398"/>
                 </a:solidFill>
                 <a:latin typeface="Calibri" pitchFamily="34" charset="0"/>
                 <a:ea typeface="Calibri" pitchFamily="34" charset="-122"/>
@@ -4184,7 +4445,7 @@
               </a:rPr>
               <a:t>Biggest open gap: if A14's photo check can grade dirt at booking, our planning error halves — from 5.90 L to 2.40 L.</a:t>
             </a:r>
-            <a:endParaRPr lang="en-US" sz="1900" dirty="0"/>
+            <a:endParaRPr lang="en-US" sz="1400" dirty="0"/>
           </a:p>
         </p:txBody>
       </p:sp>
@@ -4202,7 +4463,7 @@
     <p:bg>
       <p:bgPr>
         <a:solidFill>
-          <a:srgbClr val="0B2B3A"/>
+          <a:srgbClr val="12333F"/>
         </a:solidFill>
       </p:bgPr>
     </p:bg>
@@ -4228,24 +4489,63 @@
         </p:nvSpPr>
         <p:spPr>
           <a:xfrm>
-            <a:off x="640080" y="914400"/>
-            <a:ext cx="10881360" cy="822960"/>
-          </a:xfrm>
-          <a:prstGeom prst="rect">
-            <a:avLst/>
-          </a:prstGeom>
-          <a:noFill/>
-          <a:ln/>
-        </p:spPr>
-        <p:txBody>
-          <a:bodyPr wrap="square" lIns="0" tIns="0" rIns="0" bIns="0" rtlCol="0" anchor="ctr"/>
-          <a:lstStyle/>
-          <a:p>
-            <a:pPr indent="0" marL="0">
-              <a:buNone/>
-            </a:pPr>
-            <a:r>
-              <a:rPr lang="en-US" sz="4000" b="1" dirty="0">
+            <a:off x="685800" y="685800"/>
+            <a:ext cx="10820095" cy="274320"/>
+          </a:xfrm>
+          <a:prstGeom prst="rect">
+            <a:avLst/>
+          </a:prstGeom>
+          <a:noFill/>
+          <a:ln/>
+        </p:spPr>
+        <p:txBody>
+          <a:bodyPr wrap="square" lIns="0" tIns="0" rIns="0" bIns="0" rtlCol="0" anchor="t"/>
+          <a:lstStyle/>
+          <a:p>
+            <a:pPr indent="0" marL="0">
+              <a:buNone/>
+            </a:pPr>
+            <a:r>
+              <a:rPr lang="en-US" sz="1400" b="1" spc="200" kern="0" dirty="0">
+                <a:solidFill>
+                  <a:srgbClr val="17A398"/>
+                </a:solidFill>
+                <a:latin typeface="Calibri" pitchFamily="34" charset="0"/>
+                <a:ea typeface="Calibri" pitchFamily="34" charset="-122"/>
+                <a:cs typeface="Calibri" pitchFamily="34" charset="-120"/>
+              </a:rPr>
+              <a:t>THE CONSTRAINT</a:t>
+            </a:r>
+            <a:endParaRPr lang="en-US" sz="1400" dirty="0"/>
+          </a:p>
+        </p:txBody>
+      </p:sp>
+      <p:sp>
+        <p:nvSpPr>
+          <p:cNvPr id="3" name="Text 1"/>
+          <p:cNvSpPr txBox="1"/>
+          <p:nvPr/>
+        </p:nvSpPr>
+        <p:spPr>
+          <a:xfrm>
+            <a:off x="685800" y="1024128"/>
+            <a:ext cx="9897085" cy="868680"/>
+          </a:xfrm>
+          <a:prstGeom prst="rect">
+            <a:avLst/>
+          </a:prstGeom>
+          <a:noFill/>
+          <a:ln/>
+        </p:spPr>
+        <p:txBody>
+          <a:bodyPr wrap="square" lIns="0" tIns="0" rIns="0" bIns="0" rtlCol="0" anchor="t"/>
+          <a:lstStyle/>
+          <a:p>
+            <a:pPr indent="0" marL="0">
+              <a:buNone/>
+            </a:pPr>
+            <a:r>
+              <a:rPr lang="en-US" sz="3000" b="1" dirty="0">
                 <a:solidFill>
                   <a:srgbClr val="FFFFFF"/>
                 </a:solidFill>
@@ -4253,305 +4553,303 @@
                 <a:ea typeface="Cambria" pitchFamily="34" charset="-122"/>
                 <a:cs typeface="Cambria" pitchFamily="34" charset="-120"/>
               </a:rPr>
-              <a:t>The van carries its own water</a:t>
-            </a:r>
-            <a:endParaRPr lang="en-US" sz="4000" dirty="0"/>
-          </a:p>
-        </p:txBody>
-      </p:sp>
-      <p:sp>
-        <p:nvSpPr>
-          <p:cNvPr id="3" name="Text 1"/>
-          <p:cNvSpPr txBox="1"/>
-          <p:nvPr/>
-        </p:nvSpPr>
-        <p:spPr>
-          <a:xfrm>
-            <a:off x="640080" y="1874520"/>
-            <a:ext cx="6583680" cy="1280160"/>
-          </a:xfrm>
-          <a:prstGeom prst="rect">
-            <a:avLst/>
-          </a:prstGeom>
-          <a:noFill/>
-          <a:ln/>
-        </p:spPr>
-        <p:txBody>
-          <a:bodyPr wrap="square" lIns="0" tIns="0" rIns="0" bIns="0" rtlCol="0" anchor="ctr"/>
+              <a:t>Run out at job six and the rest of the day is cancelled</a:t>
+            </a:r>
+            <a:endParaRPr lang="en-US" sz="3000" dirty="0"/>
+          </a:p>
+        </p:txBody>
+      </p:sp>
+      <p:sp>
+        <p:nvSpPr>
+          <p:cNvPr id="4" name="Text 2"/>
+          <p:cNvSpPr txBox="1"/>
+          <p:nvPr/>
+        </p:nvSpPr>
+        <p:spPr>
+          <a:xfrm>
+            <a:off x="685800" y="2057400"/>
+            <a:ext cx="9897085" cy="410464"/>
+          </a:xfrm>
+          <a:prstGeom prst="rect">
+            <a:avLst/>
+          </a:prstGeom>
+          <a:noFill/>
+          <a:ln/>
+        </p:spPr>
+        <p:txBody>
+          <a:bodyPr wrap="square" lIns="0" tIns="0" rIns="0" bIns="0" rtlCol="0" anchor="t"/>
           <a:lstStyle/>
           <a:p>
             <a:pPr indent="0" marL="0">
               <a:lnSpc>
-                <a:spcPts val="3200"/>
+                <a:spcPts val="2800"/>
               </a:lnSpc>
               <a:buNone/>
             </a:pPr>
             <a:r>
-              <a:rPr lang="en-US" sz="2200" dirty="0">
-                <a:solidFill>
-                  <a:srgbClr val="CFE2E9"/>
+              <a:rPr lang="en-US" sz="2000" dirty="0">
+                <a:solidFill>
+                  <a:srgbClr val="AFC7D0"/>
                 </a:solidFill>
                 <a:latin typeface="Calibri" pitchFamily="34" charset="0"/>
                 <a:ea typeface="Calibri" pitchFamily="34" charset="-122"/>
                 <a:cs typeface="Calibri" pitchFamily="34" charset="-120"/>
               </a:rPr>
-              <a:t>Run out at job six and the rest of the day is cancelled.</a:t>
-            </a:r>
-            <a:endParaRPr lang="en-US" sz="2200" dirty="0"/>
-          </a:p>
+              <a:t>Capacity, not demand, is what bounds a crew's day.</a:t>
+            </a:r>
+            <a:endParaRPr lang="en-US" sz="2000" dirty="0"/>
+          </a:p>
+        </p:txBody>
+      </p:sp>
+      <p:sp>
+        <p:nvSpPr>
+          <p:cNvPr id="5" name="Text 3"/>
+          <p:cNvSpPr txBox="1"/>
+          <p:nvPr/>
+        </p:nvSpPr>
+        <p:spPr>
+          <a:xfrm>
+            <a:off x="685800" y="3703320"/>
+            <a:ext cx="2513000" cy="534924"/>
+          </a:xfrm>
+          <a:prstGeom prst="rect">
+            <a:avLst/>
+          </a:prstGeom>
+          <a:noFill/>
+          <a:ln/>
+        </p:spPr>
+        <p:txBody>
+          <a:bodyPr wrap="square" lIns="0" tIns="0" rIns="0" bIns="0" rtlCol="0" anchor="t"/>
+          <a:lstStyle/>
           <a:p>
             <a:pPr indent="0" marL="0">
               <a:lnSpc>
-                <a:spcPts val="3200"/>
+                <a:spcPts val="3800"/>
               </a:lnSpc>
               <a:buNone/>
             </a:pPr>
             <a:r>
-              <a:rPr lang="en-US" sz="2200" dirty="0">
-                <a:solidFill>
-                  <a:srgbClr val="CFE2E9"/>
+              <a:rPr lang="en-US" sz="3600" b="1" dirty="0">
+                <a:solidFill>
+                  <a:srgbClr val="17A398"/>
+                </a:solidFill>
+                <a:latin typeface="Cambria" pitchFamily="34" charset="0"/>
+                <a:ea typeface="Cambria" pitchFamily="34" charset="-122"/>
+                <a:cs typeface="Cambria" pitchFamily="34" charset="-120"/>
+              </a:rPr>
+              <a:t>262 L</a:t>
+            </a:r>
+            <a:endParaRPr lang="en-US" sz="3600" dirty="0"/>
+          </a:p>
+        </p:txBody>
+      </p:sp>
+      <p:sp>
+        <p:nvSpPr>
+          <p:cNvPr id="6" name="Text 4"/>
+          <p:cNvSpPr txBox="1"/>
+          <p:nvPr/>
+        </p:nvSpPr>
+        <p:spPr>
+          <a:xfrm>
+            <a:off x="685800" y="4274820"/>
+            <a:ext cx="2513000" cy="286004"/>
+          </a:xfrm>
+          <a:prstGeom prst="rect">
+            <a:avLst/>
+          </a:prstGeom>
+          <a:noFill/>
+          <a:ln/>
+        </p:spPr>
+        <p:txBody>
+          <a:bodyPr wrap="square" lIns="0" tIns="0" rIns="0" bIns="0" rtlCol="0" anchor="t"/>
+          <a:lstStyle/>
+          <a:p>
+            <a:pPr indent="0" marL="0">
+              <a:lnSpc>
+                <a:spcPts val="1800"/>
+              </a:lnSpc>
+              <a:buNone/>
+            </a:pPr>
+            <a:r>
+              <a:rPr lang="en-US" sz="1400" dirty="0">
+                <a:solidFill>
+                  <a:srgbClr val="AFC7D0"/>
                 </a:solidFill>
                 <a:latin typeface="Calibri" pitchFamily="34" charset="0"/>
                 <a:ea typeface="Calibri" pitchFamily="34" charset="-122"/>
                 <a:cs typeface="Calibri" pitchFamily="34" charset="-120"/>
               </a:rPr>
-              <a:t>Capacity, not demand, is what bounds a crew's day.</a:t>
-            </a:r>
-            <a:endParaRPr lang="en-US" sz="2200" dirty="0"/>
-          </a:p>
-        </p:txBody>
-      </p:sp>
-      <p:sp>
-        <p:nvSpPr>
-          <p:cNvPr id="4" name="Text 2"/>
-          <p:cNvSpPr txBox="1"/>
-          <p:nvPr/>
-        </p:nvSpPr>
-        <p:spPr>
-          <a:xfrm>
-            <a:off x="640080" y="3474720"/>
-            <a:ext cx="3108960" cy="914400"/>
-          </a:xfrm>
-          <a:prstGeom prst="rect">
-            <a:avLst/>
-          </a:prstGeom>
-          <a:noFill/>
-          <a:ln/>
-        </p:spPr>
-        <p:txBody>
-          <a:bodyPr wrap="square" lIns="0" tIns="0" rIns="0" bIns="0" rtlCol="0" anchor="ctr"/>
-          <a:lstStyle/>
-          <a:p>
-            <a:pPr indent="0" marL="0">
-              <a:buNone/>
-            </a:pPr>
-            <a:r>
-              <a:rPr lang="en-US" sz="6000" b="1" dirty="0">
-                <a:solidFill>
-                  <a:srgbClr val="00A896"/>
+              <a:t>average drawn per crew-day</a:t>
+            </a:r>
+            <a:endParaRPr lang="en-US" sz="1400" dirty="0"/>
+          </a:p>
+        </p:txBody>
+      </p:sp>
+      <p:sp>
+        <p:nvSpPr>
+          <p:cNvPr id="7" name="Text 5"/>
+          <p:cNvSpPr txBox="1"/>
+          <p:nvPr/>
+        </p:nvSpPr>
+        <p:spPr>
+          <a:xfrm>
+            <a:off x="4377842" y="3703320"/>
+            <a:ext cx="2513000" cy="534924"/>
+          </a:xfrm>
+          <a:prstGeom prst="rect">
+            <a:avLst/>
+          </a:prstGeom>
+          <a:noFill/>
+          <a:ln/>
+        </p:spPr>
+        <p:txBody>
+          <a:bodyPr wrap="square" lIns="0" tIns="0" rIns="0" bIns="0" rtlCol="0" anchor="t"/>
+          <a:lstStyle/>
+          <a:p>
+            <a:pPr indent="0" marL="0">
+              <a:lnSpc>
+                <a:spcPts val="3800"/>
+              </a:lnSpc>
+              <a:buNone/>
+            </a:pPr>
+            <a:r>
+              <a:rPr lang="en-US" sz="3600" b="1" dirty="0">
+                <a:solidFill>
+                  <a:srgbClr val="17A398"/>
                 </a:solidFill>
                 <a:latin typeface="Cambria" pitchFamily="34" charset="0"/>
                 <a:ea typeface="Cambria" pitchFamily="34" charset="-122"/>
                 <a:cs typeface="Cambria" pitchFamily="34" charset="-120"/>
               </a:rPr>
-              <a:t>262 L</a:t>
-            </a:r>
-            <a:endParaRPr lang="en-US" sz="6000" dirty="0"/>
-          </a:p>
-        </p:txBody>
-      </p:sp>
-      <p:sp>
-        <p:nvSpPr>
-          <p:cNvPr id="5" name="Text 3"/>
-          <p:cNvSpPr txBox="1"/>
-          <p:nvPr/>
-        </p:nvSpPr>
-        <p:spPr>
-          <a:xfrm>
-            <a:off x="640080" y="4407408"/>
-            <a:ext cx="3108960" cy="777240"/>
-          </a:xfrm>
-          <a:prstGeom prst="rect">
-            <a:avLst/>
-          </a:prstGeom>
-          <a:noFill/>
-          <a:ln/>
-        </p:spPr>
-        <p:txBody>
-          <a:bodyPr wrap="square" lIns="0" tIns="0" rIns="0" bIns="0" rtlCol="0" anchor="ctr"/>
-          <a:lstStyle/>
-          <a:p>
-            <a:pPr indent="0" marL="0">
-              <a:buNone/>
-            </a:pPr>
-            <a:r>
-              <a:rPr lang="en-US" sz="1800" dirty="0">
-                <a:solidFill>
-                  <a:srgbClr val="5A6B73"/>
+              <a:t>200–350 L</a:t>
+            </a:r>
+            <a:endParaRPr lang="en-US" sz="3600" dirty="0"/>
+          </a:p>
+        </p:txBody>
+      </p:sp>
+      <p:sp>
+        <p:nvSpPr>
+          <p:cNvPr id="8" name="Text 6"/>
+          <p:cNvSpPr txBox="1"/>
+          <p:nvPr/>
+        </p:nvSpPr>
+        <p:spPr>
+          <a:xfrm>
+            <a:off x="4377842" y="4274820"/>
+            <a:ext cx="2513000" cy="517144"/>
+          </a:xfrm>
+          <a:prstGeom prst="rect">
+            <a:avLst/>
+          </a:prstGeom>
+          <a:noFill/>
+          <a:ln/>
+        </p:spPr>
+        <p:txBody>
+          <a:bodyPr wrap="square" lIns="0" tIns="0" rIns="0" bIns="0" rtlCol="0" anchor="t"/>
+          <a:lstStyle/>
+          <a:p>
+            <a:pPr indent="0" marL="0">
+              <a:lnSpc>
+                <a:spcPts val="1800"/>
+              </a:lnSpc>
+              <a:buNone/>
+            </a:pPr>
+            <a:r>
+              <a:rPr lang="en-US" sz="1400" dirty="0">
+                <a:solidFill>
+                  <a:srgbClr val="AFC7D0"/>
                 </a:solidFill>
                 <a:latin typeface="Calibri" pitchFamily="34" charset="0"/>
                 <a:ea typeface="Calibri" pitchFamily="34" charset="-122"/>
                 <a:cs typeface="Calibri" pitchFamily="34" charset="-120"/>
               </a:rPr>
-              <a:t>average water drawn per crew-day</a:t>
-            </a:r>
-            <a:endParaRPr lang="en-US" sz="1800" dirty="0"/>
-          </a:p>
-        </p:txBody>
-      </p:sp>
-      <p:sp>
-        <p:nvSpPr>
-          <p:cNvPr id="6" name="Text 4"/>
-          <p:cNvSpPr txBox="1"/>
-          <p:nvPr/>
-        </p:nvSpPr>
-        <p:spPr>
-          <a:xfrm>
-            <a:off x="4480560" y="3474720"/>
-            <a:ext cx="3108960" cy="914400"/>
-          </a:xfrm>
-          <a:prstGeom prst="rect">
-            <a:avLst/>
-          </a:prstGeom>
-          <a:noFill/>
-          <a:ln/>
-        </p:spPr>
-        <p:txBody>
-          <a:bodyPr wrap="square" lIns="0" tIns="0" rIns="0" bIns="0" rtlCol="0" anchor="ctr"/>
-          <a:lstStyle/>
-          <a:p>
-            <a:pPr indent="0" marL="0">
-              <a:buNone/>
-            </a:pPr>
-            <a:r>
-              <a:rPr lang="en-US" sz="6000" b="1" dirty="0">
-                <a:solidFill>
-                  <a:srgbClr val="00A896"/>
+              <a:t>tank capacity across the fleet</a:t>
+            </a:r>
+            <a:endParaRPr lang="en-US" sz="1400" dirty="0"/>
+          </a:p>
+        </p:txBody>
+      </p:sp>
+      <p:sp>
+        <p:nvSpPr>
+          <p:cNvPr id="9" name="Text 7"/>
+          <p:cNvSpPr txBox="1"/>
+          <p:nvPr/>
+        </p:nvSpPr>
+        <p:spPr>
+          <a:xfrm>
+            <a:off x="8069885" y="3703320"/>
+            <a:ext cx="3436010" cy="534924"/>
+          </a:xfrm>
+          <a:prstGeom prst="rect">
+            <a:avLst/>
+          </a:prstGeom>
+          <a:noFill/>
+          <a:ln/>
+        </p:spPr>
+        <p:txBody>
+          <a:bodyPr wrap="square" lIns="0" tIns="0" rIns="0" bIns="0" rtlCol="0" anchor="t"/>
+          <a:lstStyle/>
+          <a:p>
+            <a:pPr indent="0" marL="0">
+              <a:lnSpc>
+                <a:spcPts val="3800"/>
+              </a:lnSpc>
+              <a:buNone/>
+            </a:pPr>
+            <a:r>
+              <a:rPr lang="en-US" sz="3600" b="1" dirty="0">
+                <a:solidFill>
+                  <a:srgbClr val="C25332"/>
                 </a:solidFill>
                 <a:latin typeface="Cambria" pitchFamily="34" charset="0"/>
                 <a:ea typeface="Cambria" pitchFamily="34" charset="-122"/>
                 <a:cs typeface="Cambria" pitchFamily="34" charset="-120"/>
               </a:rPr>
-              <a:t>200–350 L</a:t>
-            </a:r>
-            <a:endParaRPr lang="en-US" sz="6000" dirty="0"/>
-          </a:p>
-        </p:txBody>
-      </p:sp>
-      <p:sp>
-        <p:nvSpPr>
-          <p:cNvPr id="7" name="Text 5"/>
-          <p:cNvSpPr txBox="1"/>
-          <p:nvPr/>
-        </p:nvSpPr>
-        <p:spPr>
-          <a:xfrm>
-            <a:off x="4480560" y="4407408"/>
-            <a:ext cx="3108960" cy="777240"/>
-          </a:xfrm>
-          <a:prstGeom prst="rect">
-            <a:avLst/>
-          </a:prstGeom>
-          <a:noFill/>
-          <a:ln/>
-        </p:spPr>
-        <p:txBody>
-          <a:bodyPr wrap="square" lIns="0" tIns="0" rIns="0" bIns="0" rtlCol="0" anchor="ctr"/>
-          <a:lstStyle/>
-          <a:p>
-            <a:pPr indent="0" marL="0">
-              <a:buNone/>
-            </a:pPr>
-            <a:r>
-              <a:rPr lang="en-US" sz="1800" dirty="0">
-                <a:solidFill>
-                  <a:srgbClr val="5A6B73"/>
+              <a:t>61%</a:t>
+            </a:r>
+            <a:endParaRPr lang="en-US" sz="3600" dirty="0"/>
+          </a:p>
+        </p:txBody>
+      </p:sp>
+      <p:sp>
+        <p:nvSpPr>
+          <p:cNvPr id="10" name="Text 8"/>
+          <p:cNvSpPr txBox="1"/>
+          <p:nvPr/>
+        </p:nvSpPr>
+        <p:spPr>
+          <a:xfrm>
+            <a:off x="8069885" y="4274820"/>
+            <a:ext cx="3436010" cy="286004"/>
+          </a:xfrm>
+          <a:prstGeom prst="rect">
+            <a:avLst/>
+          </a:prstGeom>
+          <a:noFill/>
+          <a:ln/>
+        </p:spPr>
+        <p:txBody>
+          <a:bodyPr wrap="square" lIns="0" tIns="0" rIns="0" bIns="0" rtlCol="0" anchor="t"/>
+          <a:lstStyle/>
+          <a:p>
+            <a:pPr indent="0" marL="0">
+              <a:lnSpc>
+                <a:spcPts val="1800"/>
+              </a:lnSpc>
+              <a:buNone/>
+            </a:pPr>
+            <a:r>
+              <a:rPr lang="en-US" sz="1400" dirty="0">
+                <a:solidFill>
+                  <a:srgbClr val="AFC7D0"/>
                 </a:solidFill>
                 <a:latin typeface="Calibri" pitchFamily="34" charset="0"/>
                 <a:ea typeface="Calibri" pitchFamily="34" charset="-122"/>
                 <a:cs typeface="Calibri" pitchFamily="34" charset="-120"/>
               </a:rPr>
-              <a:t>tank capacity across the fleet</a:t>
-            </a:r>
-            <a:endParaRPr lang="en-US" sz="1800" dirty="0"/>
-          </a:p>
-        </p:txBody>
-      </p:sp>
-      <p:sp>
-        <p:nvSpPr>
-          <p:cNvPr id="8" name="Text 6"/>
-          <p:cNvSpPr txBox="1"/>
-          <p:nvPr/>
-        </p:nvSpPr>
-        <p:spPr>
-          <a:xfrm>
-            <a:off x="8321040" y="3474720"/>
-            <a:ext cx="3291840" cy="914400"/>
-          </a:xfrm>
-          <a:prstGeom prst="rect">
-            <a:avLst/>
-          </a:prstGeom>
-          <a:noFill/>
-          <a:ln/>
-        </p:spPr>
-        <p:txBody>
-          <a:bodyPr wrap="square" lIns="0" tIns="0" rIns="0" bIns="0" rtlCol="0" anchor="ctr"/>
-          <a:lstStyle/>
-          <a:p>
-            <a:pPr indent="0" marL="0">
-              <a:buNone/>
-            </a:pPr>
-            <a:r>
-              <a:rPr lang="en-US" sz="6000" b="1" dirty="0">
-                <a:solidFill>
-                  <a:srgbClr val="D9532B"/>
-                </a:solidFill>
-                <a:latin typeface="Cambria" pitchFamily="34" charset="0"/>
-                <a:ea typeface="Cambria" pitchFamily="34" charset="-122"/>
-                <a:cs typeface="Cambria" pitchFamily="34" charset="-120"/>
-              </a:rPr>
-              <a:t>61%</a:t>
-            </a:r>
-            <a:endParaRPr lang="en-US" sz="6000" dirty="0"/>
-          </a:p>
-        </p:txBody>
-      </p:sp>
-      <p:sp>
-        <p:nvSpPr>
-          <p:cNvPr id="9" name="Text 7"/>
-          <p:cNvSpPr txBox="1"/>
-          <p:nvPr/>
-        </p:nvSpPr>
-        <p:spPr>
-          <a:xfrm>
-            <a:off x="8321040" y="4407408"/>
-            <a:ext cx="3291840" cy="777240"/>
-          </a:xfrm>
-          <a:prstGeom prst="rect">
-            <a:avLst/>
-          </a:prstGeom>
-          <a:noFill/>
-          <a:ln/>
-        </p:spPr>
-        <p:txBody>
-          <a:bodyPr wrap="square" lIns="0" tIns="0" rIns="0" bIns="0" rtlCol="0" anchor="ctr"/>
-          <a:lstStyle/>
-          <a:p>
-            <a:pPr indent="0" marL="0">
-              <a:buNone/>
-            </a:pPr>
-            <a:r>
-              <a:rPr lang="en-US" sz="1800" dirty="0">
-                <a:solidFill>
-                  <a:srgbClr val="5A6B73"/>
-                </a:solidFill>
-                <a:latin typeface="Calibri" pitchFamily="34" charset="0"/>
-                <a:ea typeface="Calibri" pitchFamily="34" charset="-122"/>
-                <a:cs typeface="Calibri" pitchFamily="34" charset="-120"/>
-              </a:rPr>
               <a:t>of crew-days exceed the small van</a:t>
             </a:r>
-            <a:endParaRPr lang="en-US" sz="1800" dirty="0"/>
+            <a:endParaRPr lang="en-US" sz="1400" dirty="0"/>
           </a:p>
         </p:txBody>
       </p:sp>
@@ -4595,26 +4893,26 @@
         </p:nvSpPr>
         <p:spPr>
           <a:xfrm>
-            <a:off x="640080" y="384048"/>
-            <a:ext cx="10881360" cy="274320"/>
-          </a:xfrm>
-          <a:prstGeom prst="rect">
-            <a:avLst/>
-          </a:prstGeom>
-          <a:noFill/>
-          <a:ln/>
-        </p:spPr>
-        <p:txBody>
-          <a:bodyPr wrap="square" lIns="0" tIns="0" rIns="0" bIns="0" rtlCol="0" anchor="ctr"/>
-          <a:lstStyle/>
-          <a:p>
-            <a:pPr indent="0" marL="0">
-              <a:buNone/>
-            </a:pPr>
-            <a:r>
-              <a:rPr lang="en-US" sz="1800" b="1" spc="150" kern="0" dirty="0">
-                <a:solidFill>
-                  <a:srgbClr val="00A896"/>
+            <a:off x="685800" y="685800"/>
+            <a:ext cx="10820095" cy="274320"/>
+          </a:xfrm>
+          <a:prstGeom prst="rect">
+            <a:avLst/>
+          </a:prstGeom>
+          <a:noFill/>
+          <a:ln/>
+        </p:spPr>
+        <p:txBody>
+          <a:bodyPr wrap="square" lIns="0" tIns="0" rIns="0" bIns="0" rtlCol="0" anchor="t"/>
+          <a:lstStyle/>
+          <a:p>
+            <a:pPr indent="0" marL="0">
+              <a:buNone/>
+            </a:pPr>
+            <a:r>
+              <a:rPr lang="en-US" sz="1400" b="1" spc="200" kern="0" dirty="0">
+                <a:solidFill>
+                  <a:srgbClr val="17A398"/>
                 </a:solidFill>
                 <a:latin typeface="Calibri" pitchFamily="34" charset="0"/>
                 <a:ea typeface="Calibri" pitchFamily="34" charset="-122"/>
@@ -4622,7 +4920,7 @@
               </a:rPr>
               <a:t>FINDING 1</a:t>
             </a:r>
-            <a:endParaRPr lang="en-US" sz="1800" dirty="0"/>
+            <a:endParaRPr lang="en-US" sz="1400" dirty="0"/>
           </a:p>
         </p:txBody>
       </p:sp>
@@ -4634,26 +4932,26 @@
         </p:nvSpPr>
         <p:spPr>
           <a:xfrm>
-            <a:off x="640080" y="713232"/>
-            <a:ext cx="10881360" cy="868680"/>
-          </a:xfrm>
-          <a:prstGeom prst="rect">
-            <a:avLst/>
-          </a:prstGeom>
-          <a:noFill/>
-          <a:ln/>
-        </p:spPr>
-        <p:txBody>
-          <a:bodyPr wrap="square" lIns="0" tIns="0" rIns="0" bIns="0" rtlCol="0" anchor="ctr"/>
-          <a:lstStyle/>
-          <a:p>
-            <a:pPr indent="0" marL="0">
-              <a:buNone/>
-            </a:pPr>
-            <a:r>
-              <a:rPr lang="en-US" sz="3800" b="1" dirty="0">
-                <a:solidFill>
-                  <a:srgbClr val="0B2B3A"/>
+            <a:off x="685800" y="1024128"/>
+            <a:ext cx="10820095" cy="868680"/>
+          </a:xfrm>
+          <a:prstGeom prst="rect">
+            <a:avLst/>
+          </a:prstGeom>
+          <a:noFill/>
+          <a:ln/>
+        </p:spPr>
+        <p:txBody>
+          <a:bodyPr wrap="square" lIns="0" tIns="0" rIns="0" bIns="0" rtlCol="0" anchor="t"/>
+          <a:lstStyle/>
+          <a:p>
+            <a:pPr indent="0" marL="0">
+              <a:buNone/>
+            </a:pPr>
+            <a:r>
+              <a:rPr lang="en-US" sz="3000" b="1" dirty="0">
+                <a:solidFill>
+                  <a:srgbClr val="12333F"/>
                 </a:solidFill>
                 <a:latin typeface="Cambria" pitchFamily="34" charset="0"/>
                 <a:ea typeface="Cambria" pitchFamily="34" charset="-122"/>
@@ -4661,7 +4959,7 @@
               </a:rPr>
               <a:t>The service tier tells you nothing</a:t>
             </a:r>
-            <a:endParaRPr lang="en-US" sz="3800" dirty="0"/>
+            <a:endParaRPr lang="en-US" sz="3000" dirty="0"/>
           </a:p>
         </p:txBody>
       </p:sp>
@@ -4673,17 +4971,109 @@
         </p:nvSpPr>
         <p:spPr>
           <a:xfrm>
-            <a:off x="640080" y="1691640"/>
-            <a:ext cx="4937760" cy="1371600"/>
-          </a:xfrm>
-          <a:prstGeom prst="rect">
-            <a:avLst/>
-          </a:prstGeom>
-          <a:noFill/>
-          <a:ln/>
-        </p:spPr>
-        <p:txBody>
-          <a:bodyPr wrap="square" lIns="0" tIns="0" rIns="0" bIns="0" rtlCol="0" anchor="ctr"/>
+            <a:off x="685800" y="2057400"/>
+            <a:ext cx="6205042" cy="1007364"/>
+          </a:xfrm>
+          <a:prstGeom prst="rect">
+            <a:avLst/>
+          </a:prstGeom>
+          <a:noFill/>
+          <a:ln/>
+        </p:spPr>
+        <p:txBody>
+          <a:bodyPr wrap="square" lIns="0" tIns="0" rIns="0" bIns="0" rtlCol="0" anchor="t"/>
+          <a:lstStyle/>
+          <a:p>
+            <a:pPr indent="0" marL="0">
+              <a:lnSpc>
+                <a:spcPts val="2500"/>
+              </a:lnSpc>
+              <a:buNone/>
+            </a:pPr>
+            <a:r>
+              <a:rPr lang="en-US" sz="1800" dirty="0">
+                <a:solidFill>
+                  <a:srgbClr val="12333F"/>
+                </a:solidFill>
+                <a:latin typeface="Calibri" pitchFamily="34" charset="0"/>
+                <a:ea typeface="Calibri" pitchFamily="34" charset="-122"/>
+                <a:cs typeface="Calibri" pitchFamily="34" charset="-120"/>
+              </a:rPr>
+              <a:t>All five slot types average 54.9–55.8 L. The variable that actually moves water is an add-on hidden inside a pipe-separated item string.</a:t>
+            </a:r>
+            <a:endParaRPr lang="en-US" sz="1800" dirty="0"/>
+          </a:p>
+        </p:txBody>
+      </p:sp>
+      <p:pic>
+        <p:nvPicPr>
+          <p:cNvPr id="5" name="Image 0" descr="C:\Users\naman\OneDrive\Documents\doorstep-A07-water-supplies\paper\figures\slot_vs_addon.png">    </p:cNvPr>
+          <p:cNvPicPr>
+            <a:picLocks noChangeAspect="1"/>
+          </p:cNvPicPr>
+          <p:nvPr/>
+        </p:nvPicPr>
+        <p:blipFill>
+          <a:blip r:embed="rId1"/>
+          <a:srcRect l="0" r="0" t="0" b="0"/>
+          <a:stretch/>
+        </p:blipFill>
+        <p:spPr>
+          <a:xfrm>
+            <a:off x="685800" y="3265932"/>
+            <a:ext cx="6205042" cy="2651760"/>
+          </a:xfrm>
+          <a:prstGeom prst="rect">
+            <a:avLst/>
+          </a:prstGeom>
+        </p:spPr>
+      </p:pic>
+      <p:sp>
+        <p:nvSpPr>
+          <p:cNvPr id="6" name="Shape 3"/>
+          <p:cNvSpPr/>
+          <p:nvPr/>
+        </p:nvSpPr>
+        <p:spPr>
+          <a:xfrm>
+            <a:off x="7146874" y="2057400"/>
+            <a:ext cx="4359021" cy="3762248"/>
+          </a:xfrm>
+          <a:prstGeom prst="roundRect">
+            <a:avLst>
+              <a:gd name="adj" fmla="val 1458"/>
+            </a:avLst>
+          </a:prstGeom>
+          <a:solidFill>
+            <a:srgbClr val="EDF4F6"/>
+          </a:solidFill>
+          <a:ln w="12700">
+            <a:solidFill>
+              <a:srgbClr val="EDF4F6"/>
+            </a:solidFill>
+            <a:prstDash val="solid"/>
+          </a:ln>
+        </p:spPr>
+      </p:sp>
+      <p:sp>
+        <p:nvSpPr>
+          <p:cNvPr id="7" name="Text 4"/>
+          <p:cNvSpPr txBox="1"/>
+          <p:nvPr/>
+        </p:nvSpPr>
+        <p:spPr>
+          <a:xfrm>
+            <a:off x="7421194" y="2331720"/>
+            <a:ext cx="3810381" cy="410464"/>
+          </a:xfrm>
+          <a:prstGeom prst="rect">
+            <a:avLst/>
+          </a:prstGeom>
+          <a:noFill/>
+          <a:ln/>
+        </p:spPr>
+        <p:txBody>
+          <a:bodyPr wrap="square" lIns="0" tIns="0" rIns="0" bIns="0" rtlCol="0" anchor="t"/>
           <a:lstStyle/>
           <a:p>
             <a:pPr indent="0" marL="0">
@@ -4693,172 +5083,225 @@
               <a:buNone/>
             </a:pPr>
             <a:r>
-              <a:rPr lang="en-US" sz="1900" dirty="0">
-                <a:solidFill>
-                  <a:srgbClr val="0B2B3A"/>
+              <a:rPr lang="en-US" sz="2000" b="1" dirty="0">
+                <a:solidFill>
+                  <a:srgbClr val="0B6E8C"/>
                 </a:solidFill>
                 <a:latin typeface="Calibri" pitchFamily="34" charset="0"/>
                 <a:ea typeface="Calibri" pitchFamily="34" charset="-122"/>
                 <a:cs typeface="Calibri" pitchFamily="34" charset="-120"/>
               </a:rPr>
-              <a:t>All five slot types average 54.9–55.8 L. The real driver is an add-on hidden inside a pipe-separated item string.</a:t>
-            </a:r>
-            <a:endParaRPr lang="en-US" sz="1900" dirty="0"/>
-          </a:p>
-        </p:txBody>
-      </p:sp>
-      <p:sp>
-        <p:nvSpPr>
-          <p:cNvPr id="5" name="Shape 3"/>
-          <p:cNvSpPr/>
-          <p:nvPr/>
-        </p:nvSpPr>
-        <p:spPr>
-          <a:xfrm>
-            <a:off x="640080" y="3200400"/>
-            <a:ext cx="4937760" cy="2103120"/>
-          </a:xfrm>
-          <a:prstGeom prst="roundRect">
-            <a:avLst>
-              <a:gd name="adj" fmla="val 3478"/>
-            </a:avLst>
-          </a:prstGeom>
-          <a:solidFill>
-            <a:srgbClr val="EAF2F5"/>
-          </a:solidFill>
-          <a:ln w="12700">
-            <a:solidFill>
-              <a:srgbClr val="EAF2F5"/>
-            </a:solidFill>
-            <a:prstDash val="solid"/>
-          </a:ln>
-        </p:spPr>
-      </p:sp>
-      <p:sp>
-        <p:nvSpPr>
-          <p:cNvPr id="6" name="Text 4"/>
-          <p:cNvSpPr txBox="1"/>
-          <p:nvPr/>
-        </p:nvSpPr>
-        <p:spPr>
-          <a:xfrm>
-            <a:off x="914400" y="3383280"/>
-            <a:ext cx="4389120" cy="365760"/>
-          </a:xfrm>
-          <a:prstGeom prst="rect">
-            <a:avLst/>
-          </a:prstGeom>
-          <a:noFill/>
-          <a:ln/>
-        </p:spPr>
-        <p:txBody>
-          <a:bodyPr wrap="square" lIns="0" tIns="0" rIns="0" bIns="0" rtlCol="0" anchor="ctr"/>
-          <a:lstStyle/>
-          <a:p>
-            <a:pPr indent="0" marL="0">
-              <a:buNone/>
-            </a:pPr>
-            <a:r>
-              <a:rPr lang="en-US" sz="2000" b="1" dirty="0">
-                <a:solidFill>
-                  <a:srgbClr val="065A82"/>
+              <a:t>interior_clean</a:t>
+            </a:r>
+            <a:endParaRPr lang="en-US" sz="2000" dirty="0"/>
+          </a:p>
+        </p:txBody>
+      </p:sp>
+      <p:sp>
+        <p:nvSpPr>
+          <p:cNvPr id="8" name="Text 5"/>
+          <p:cNvSpPr txBox="1"/>
+          <p:nvPr/>
+        </p:nvSpPr>
+        <p:spPr>
+          <a:xfrm>
+            <a:off x="7421194" y="2925064"/>
+            <a:ext cx="3810381" cy="1197864"/>
+          </a:xfrm>
+          <a:prstGeom prst="rect">
+            <a:avLst/>
+          </a:prstGeom>
+          <a:noFill/>
+          <a:ln/>
+        </p:spPr>
+        <p:txBody>
+          <a:bodyPr wrap="square" lIns="0" tIns="0" rIns="0" bIns="0" rtlCol="0" anchor="t"/>
+          <a:lstStyle/>
+          <a:p>
+            <a:pPr indent="0" marL="0">
+              <a:lnSpc>
+                <a:spcPts val="3000"/>
+              </a:lnSpc>
+              <a:buNone/>
+            </a:pPr>
+            <a:r>
+              <a:rPr lang="en-US" sz="1800" dirty="0">
+                <a:solidFill>
+                  <a:srgbClr val="12333F"/>
                 </a:solidFill>
                 <a:latin typeface="Calibri" pitchFamily="34" charset="0"/>
                 <a:ea typeface="Calibri" pitchFamily="34" charset="-122"/>
                 <a:cs typeface="Calibri" pitchFamily="34" charset="-120"/>
               </a:rPr>
-              <a:t>interior_clean</a:t>
-            </a:r>
-            <a:endParaRPr lang="en-US" sz="2000" dirty="0"/>
-          </a:p>
-        </p:txBody>
-      </p:sp>
-      <p:sp>
-        <p:nvSpPr>
-          <p:cNvPr id="7" name="Text 5"/>
-          <p:cNvSpPr txBox="1"/>
-          <p:nvPr/>
-        </p:nvSpPr>
-        <p:spPr>
-          <a:xfrm>
-            <a:off x="914400" y="3840480"/>
-            <a:ext cx="4389120" cy="1188720"/>
-          </a:xfrm>
-          <a:prstGeom prst="rect">
-            <a:avLst/>
-          </a:prstGeom>
-          <a:noFill/>
-          <a:ln/>
-        </p:spPr>
-        <p:txBody>
-          <a:bodyPr wrap="square" lIns="0" tIns="0" rIns="0" bIns="0" rtlCol="0" anchor="ctr"/>
-          <a:lstStyle/>
+              <a:t>27.9% of jobs</a:t>
+            </a:r>
+            <a:endParaRPr lang="en-US" sz="1800" dirty="0"/>
+          </a:p>
           <a:p>
             <a:pPr indent="0" marL="0">
               <a:lnSpc>
-                <a:spcPts val="2600"/>
+                <a:spcPts val="3000"/>
               </a:lnSpc>
               <a:buNone/>
             </a:pPr>
             <a:r>
               <a:rPr lang="en-US" sz="1800" dirty="0">
                 <a:solidFill>
-                  <a:srgbClr val="0B2B3A"/>
+                  <a:srgbClr val="12333F"/>
                 </a:solidFill>
                 <a:latin typeface="Calibri" pitchFamily="34" charset="0"/>
                 <a:ea typeface="Calibri" pitchFamily="34" charset="-122"/>
                 <a:cs typeface="Calibri" pitchFamily="34" charset="-120"/>
               </a:rPr>
-              <a:t>27.9% of jobs  ·  +18.0 L  ·  sold across every tier</a:t>
+              <a:t>+18.0 L per job</a:t>
             </a:r>
             <a:endParaRPr lang="en-US" sz="1800" dirty="0"/>
           </a:p>
           <a:p>
             <a:pPr indent="0" marL="0">
               <a:lnSpc>
-                <a:spcPts val="2600"/>
+                <a:spcPts val="3000"/>
               </a:lnSpc>
               <a:buNone/>
             </a:pPr>
             <a:r>
               <a:rPr lang="en-US" sz="1800" dirty="0">
                 <a:solidFill>
-                  <a:srgbClr val="0B2B3A"/>
+                  <a:srgbClr val="12333F"/>
                 </a:solidFill>
                 <a:latin typeface="Calibri" pitchFamily="34" charset="0"/>
                 <a:ea typeface="Calibri" pitchFamily="34" charset="-122"/>
                 <a:cs typeface="Calibri" pitchFamily="34" charset="-120"/>
               </a:rPr>
-              <a:t>Parsed from bookings.items, not a column of its own</a:t>
+              <a:t>sold across every tier</a:t>
             </a:r>
             <a:endParaRPr lang="en-US" sz="1800" dirty="0"/>
           </a:p>
         </p:txBody>
       </p:sp>
-      <p:pic>
-        <p:nvPicPr>
-          <p:cNvPr id="8" name="Image 0" descr="C:\Users\naman\OneDrive\Documents\doorstep-A07-water-supplies\results\plots\02_slot_type_vs_addon.png">    </p:cNvPr>
-          <p:cNvPicPr>
-            <a:picLocks noChangeAspect="1"/>
-          </p:cNvPicPr>
-          <p:nvPr/>
-        </p:nvPicPr>
-        <p:blipFill>
-          <a:blip r:embed="rId1"/>
-          <a:stretch>
-            <a:fillRect/>
-          </a:stretch>
-        </p:blipFill>
-        <p:spPr>
-          <a:xfrm>
-            <a:off x="5943600" y="1645920"/>
-            <a:ext cx="5577840" cy="3749040"/>
-          </a:xfrm>
-          <a:prstGeom prst="rect">
-            <a:avLst/>
-          </a:prstGeom>
-        </p:spPr>
-      </p:pic>
+      <p:sp>
+        <p:nvSpPr>
+          <p:cNvPr id="9" name="Text 6"/>
+          <p:cNvSpPr txBox="1"/>
+          <p:nvPr/>
+        </p:nvSpPr>
+        <p:spPr>
+          <a:xfrm>
+            <a:off x="7421194" y="4324096"/>
+            <a:ext cx="3810381" cy="537464"/>
+          </a:xfrm>
+          <a:prstGeom prst="rect">
+            <a:avLst/>
+          </a:prstGeom>
+          <a:noFill/>
+          <a:ln/>
+        </p:spPr>
+        <p:txBody>
+          <a:bodyPr wrap="square" lIns="0" tIns="0" rIns="0" bIns="0" rtlCol="0" anchor="t"/>
+          <a:lstStyle/>
+          <a:p>
+            <a:pPr indent="0" marL="0">
+              <a:lnSpc>
+                <a:spcPts val="1900"/>
+              </a:lnSpc>
+              <a:buNone/>
+            </a:pPr>
+            <a:r>
+              <a:rPr lang="en-US" sz="1400" dirty="0">
+                <a:solidFill>
+                  <a:srgbClr val="68808B"/>
+                </a:solidFill>
+                <a:latin typeface="Calibri" pitchFamily="34" charset="0"/>
+                <a:ea typeface="Calibri" pitchFamily="34" charset="-122"/>
+                <a:cs typeface="Calibri" pitchFamily="34" charset="-120"/>
+              </a:rPr>
+              <a:t>Parsed from bookings.items — not a column of its own</a:t>
+            </a:r>
+            <a:endParaRPr lang="en-US" sz="1400" dirty="0"/>
+          </a:p>
+        </p:txBody>
+      </p:sp>
+      <p:sp>
+        <p:nvSpPr>
+          <p:cNvPr id="10" name="Text 7"/>
+          <p:cNvSpPr txBox="1"/>
+          <p:nvPr/>
+        </p:nvSpPr>
+        <p:spPr>
+          <a:xfrm>
+            <a:off x="7421194" y="5007864"/>
+            <a:ext cx="3810381" cy="537464"/>
+          </a:xfrm>
+          <a:prstGeom prst="rect">
+            <a:avLst/>
+          </a:prstGeom>
+          <a:noFill/>
+          <a:ln/>
+        </p:spPr>
+        <p:txBody>
+          <a:bodyPr wrap="square" lIns="0" tIns="0" rIns="0" bIns="0" rtlCol="0" anchor="t"/>
+          <a:lstStyle/>
+          <a:p>
+            <a:pPr indent="0" marL="0">
+              <a:lnSpc>
+                <a:spcPts val="1900"/>
+              </a:lnSpc>
+              <a:buNone/>
+            </a:pPr>
+            <a:r>
+              <a:rPr lang="en-US" sz="1400" dirty="0">
+                <a:solidFill>
+                  <a:srgbClr val="68808B"/>
+                </a:solidFill>
+                <a:latin typeface="Calibri" pitchFamily="34" charset="0"/>
+                <a:ea typeface="Calibri" pitchFamily="34" charset="-122"/>
+                <a:cs typeface="Calibri" pitchFamily="34" charset="-120"/>
+              </a:rPr>
+              <a:t>Key off slot_type and you miss it entirely.</a:t>
+            </a:r>
+            <a:endParaRPr lang="en-US" sz="1400" dirty="0"/>
+          </a:p>
+        </p:txBody>
+      </p:sp>
+      <p:sp>
+        <p:nvSpPr>
+          <p:cNvPr id="11" name="Text 8"/>
+          <p:cNvSpPr txBox="1"/>
+          <p:nvPr/>
+        </p:nvSpPr>
+        <p:spPr>
+          <a:xfrm>
+            <a:off x="685800" y="6327648"/>
+            <a:ext cx="10820095" cy="237744"/>
+          </a:xfrm>
+          <a:prstGeom prst="rect">
+            <a:avLst/>
+          </a:prstGeom>
+          <a:noFill/>
+          <a:ln/>
+        </p:spPr>
+        <p:txBody>
+          <a:bodyPr wrap="square" lIns="0" tIns="0" rIns="0" bIns="0" rtlCol="0" anchor="t"/>
+          <a:lstStyle/>
+          <a:p>
+            <a:pPr indent="0" marL="0">
+              <a:buNone/>
+            </a:pPr>
+            <a:r>
+              <a:rPr lang="en-US" sz="1100" dirty="0">
+                <a:solidFill>
+                  <a:srgbClr val="68808B"/>
+                </a:solidFill>
+                <a:latin typeface="Calibri" pitchFamily="34" charset="0"/>
+                <a:ea typeface="Calibri" pitchFamily="34" charset="-122"/>
+                <a:cs typeface="Calibri" pitchFamily="34" charset="-120"/>
+              </a:rPr>
+              <a:t>39,302 completed jobs · bookings.items parsed for add-ons</a:t>
+            </a:r>
+            <a:endParaRPr lang="en-US" sz="1100" dirty="0"/>
+          </a:p>
+        </p:txBody>
+      </p:sp>
     </p:spTree>
   </p:cSld>
   <p:clrMapOvr>
@@ -4899,26 +5342,26 @@
         </p:nvSpPr>
         <p:spPr>
           <a:xfrm>
-            <a:off x="640080" y="384048"/>
-            <a:ext cx="10881360" cy="274320"/>
-          </a:xfrm>
-          <a:prstGeom prst="rect">
-            <a:avLst/>
-          </a:prstGeom>
-          <a:noFill/>
-          <a:ln/>
-        </p:spPr>
-        <p:txBody>
-          <a:bodyPr wrap="square" lIns="0" tIns="0" rIns="0" bIns="0" rtlCol="0" anchor="ctr"/>
-          <a:lstStyle/>
-          <a:p>
-            <a:pPr indent="0" marL="0">
-              <a:buNone/>
-            </a:pPr>
-            <a:r>
-              <a:rPr lang="en-US" sz="1800" b="1" spc="150" kern="0" dirty="0">
-                <a:solidFill>
-                  <a:srgbClr val="00A896"/>
+            <a:off x="685800" y="685800"/>
+            <a:ext cx="10820095" cy="274320"/>
+          </a:xfrm>
+          <a:prstGeom prst="rect">
+            <a:avLst/>
+          </a:prstGeom>
+          <a:noFill/>
+          <a:ln/>
+        </p:spPr>
+        <p:txBody>
+          <a:bodyPr wrap="square" lIns="0" tIns="0" rIns="0" bIns="0" rtlCol="0" anchor="t"/>
+          <a:lstStyle/>
+          <a:p>
+            <a:pPr indent="0" marL="0">
+              <a:buNone/>
+            </a:pPr>
+            <a:r>
+              <a:rPr lang="en-US" sz="1400" b="1" spc="200" kern="0" dirty="0">
+                <a:solidFill>
+                  <a:srgbClr val="17A398"/>
                 </a:solidFill>
                 <a:latin typeface="Calibri" pitchFamily="34" charset="0"/>
                 <a:ea typeface="Calibri" pitchFamily="34" charset="-122"/>
@@ -4926,7 +5369,7 @@
               </a:rPr>
               <a:t>FINDING 2</a:t>
             </a:r>
-            <a:endParaRPr lang="en-US" sz="1800" dirty="0"/>
+            <a:endParaRPr lang="en-US" sz="1400" dirty="0"/>
           </a:p>
         </p:txBody>
       </p:sp>
@@ -4938,26 +5381,26 @@
         </p:nvSpPr>
         <p:spPr>
           <a:xfrm>
-            <a:off x="640080" y="713232"/>
-            <a:ext cx="10881360" cy="868680"/>
-          </a:xfrm>
-          <a:prstGeom prst="rect">
-            <a:avLst/>
-          </a:prstGeom>
-          <a:noFill/>
-          <a:ln/>
-        </p:spPr>
-        <p:txBody>
-          <a:bodyPr wrap="square" lIns="0" tIns="0" rIns="0" bIns="0" rtlCol="0" anchor="ctr"/>
-          <a:lstStyle/>
-          <a:p>
-            <a:pPr indent="0" marL="0">
-              <a:buNone/>
-            </a:pPr>
-            <a:r>
-              <a:rPr lang="en-US" sz="3800" b="1" dirty="0">
-                <a:solidFill>
-                  <a:srgbClr val="0B2B3A"/>
+            <a:off x="685800" y="1024128"/>
+            <a:ext cx="10820095" cy="868680"/>
+          </a:xfrm>
+          <a:prstGeom prst="rect">
+            <a:avLst/>
+          </a:prstGeom>
+          <a:noFill/>
+          <a:ln/>
+        </p:spPr>
+        <p:txBody>
+          <a:bodyPr wrap="square" lIns="0" tIns="0" rIns="0" bIns="0" rtlCol="0" anchor="t"/>
+          <a:lstStyle/>
+          <a:p>
+            <a:pPr indent="0" marL="0">
+              <a:buNone/>
+            </a:pPr>
+            <a:r>
+              <a:rPr lang="en-US" sz="3000" b="1" dirty="0">
+                <a:solidFill>
+                  <a:srgbClr val="12333F"/>
                 </a:solidFill>
                 <a:latin typeface="Cambria" pitchFamily="34" charset="0"/>
                 <a:ea typeface="Cambria" pitchFamily="34" charset="-122"/>
@@ -4965,13 +5408,13 @@
               </a:rPr>
               <a:t>Dirtiness multiplies, the add-on adds</a:t>
             </a:r>
-            <a:endParaRPr lang="en-US" sz="3800" dirty="0"/>
+            <a:endParaRPr lang="en-US" sz="3000" dirty="0"/>
           </a:p>
         </p:txBody>
       </p:sp>
       <p:pic>
         <p:nvPicPr>
-          <p:cNvPr id="4" name="Image 0" descr="C:\Users\naman\OneDrive\Documents\doorstep-A07-water-supplies\results\plots\03_functional_form.png">    </p:cNvPr>
+          <p:cNvPr id="4" name="Image 0" descr="C:\Users\naman\OneDrive\Documents\doorstep-A07-water-supplies\paper\figures\functional_form.png">    </p:cNvPr>
           <p:cNvPicPr>
             <a:picLocks noChangeAspect="1"/>
           </p:cNvPicPr>
@@ -4979,14 +5422,13 @@
         </p:nvPicPr>
         <p:blipFill>
           <a:blip r:embed="rId1"/>
-          <a:stretch>
-            <a:fillRect/>
-          </a:stretch>
+          <a:srcRect l="0" r="0" t="0" b="0"/>
+          <a:stretch/>
         </p:blipFill>
         <p:spPr>
           <a:xfrm>
-            <a:off x="640080" y="1691640"/>
-            <a:ext cx="5852160" cy="3840480"/>
+            <a:off x="685800" y="2057400"/>
+            <a:ext cx="6205042" cy="3840480"/>
           </a:xfrm>
           <a:prstGeom prst="rect">
             <a:avLst/>
@@ -5001,37 +5443,37 @@
         </p:nvSpPr>
         <p:spPr>
           <a:xfrm>
-            <a:off x="6858000" y="1783080"/>
-            <a:ext cx="4663440" cy="731520"/>
-          </a:xfrm>
-          <a:prstGeom prst="rect">
-            <a:avLst/>
-          </a:prstGeom>
-          <a:noFill/>
-          <a:ln/>
-        </p:spPr>
-        <p:txBody>
-          <a:bodyPr wrap="square" lIns="0" tIns="0" rIns="0" bIns="0" rtlCol="0" anchor="ctr"/>
+            <a:off x="7146874" y="2057400"/>
+            <a:ext cx="4359021" cy="689864"/>
+          </a:xfrm>
+          <a:prstGeom prst="rect">
+            <a:avLst/>
+          </a:prstGeom>
+          <a:noFill/>
+          <a:ln/>
+        </p:spPr>
+        <p:txBody>
+          <a:bodyPr wrap="square" lIns="0" tIns="0" rIns="0" bIns="0" rtlCol="0" anchor="t"/>
           <a:lstStyle/>
           <a:p>
             <a:pPr indent="0" marL="0">
               <a:lnSpc>
-                <a:spcPts val="2600"/>
+                <a:spcPts val="2500"/>
               </a:lnSpc>
               <a:buNone/>
             </a:pPr>
             <a:r>
-              <a:rPr lang="en-US" sz="1900" dirty="0">
-                <a:solidFill>
-                  <a:srgbClr val="0B2B3A"/>
+              <a:rPr lang="en-US" sz="1800" dirty="0">
+                <a:solidFill>
+                  <a:srgbClr val="12333F"/>
                 </a:solidFill>
                 <a:latin typeface="Calibri" pitchFamily="34" charset="0"/>
                 <a:ea typeface="Calibri" pitchFamily="34" charset="-122"/>
                 <a:cs typeface="Calibri" pitchFamily="34" charset="-120"/>
               </a:rPr>
-              <a:t>Dirtiness scales a vehicle-size base by the same factors for every size:</a:t>
-            </a:r>
-            <a:endParaRPr lang="en-US" sz="1900" dirty="0"/>
+              <a:t>Dirtiness scales the vehicle-size base by identical factors:</a:t>
+            </a:r>
+            <a:endParaRPr lang="en-US" sz="1800" dirty="0"/>
           </a:p>
         </p:txBody>
       </p:sp>
@@ -5043,34 +5485,37 @@
         </p:nvSpPr>
         <p:spPr>
           <a:xfrm>
-            <a:off x="6858000" y="2606040"/>
-            <a:ext cx="4663440" cy="548640"/>
-          </a:xfrm>
-          <a:prstGeom prst="rect">
-            <a:avLst/>
-          </a:prstGeom>
-          <a:noFill/>
-          <a:ln/>
-        </p:spPr>
-        <p:txBody>
-          <a:bodyPr wrap="square" lIns="0" tIns="0" rIns="0" bIns="0" rtlCol="0" anchor="ctr"/>
-          <a:lstStyle/>
-          <a:p>
-            <a:pPr indent="0" marL="0">
-              <a:buNone/>
-            </a:pPr>
-            <a:r>
-              <a:rPr lang="en-US" sz="2600" b="1" dirty="0">
-                <a:solidFill>
-                  <a:srgbClr val="065A82"/>
+            <a:off x="7146874" y="2911856"/>
+            <a:ext cx="4359021" cy="473964"/>
+          </a:xfrm>
+          <a:prstGeom prst="rect">
+            <a:avLst/>
+          </a:prstGeom>
+          <a:noFill/>
+          <a:ln/>
+        </p:spPr>
+        <p:txBody>
+          <a:bodyPr wrap="square" lIns="0" tIns="0" rIns="0" bIns="0" rtlCol="0" anchor="t"/>
+          <a:lstStyle/>
+          <a:p>
+            <a:pPr indent="0" marL="0">
+              <a:lnSpc>
+                <a:spcPts val="3300"/>
+              </a:lnSpc>
+              <a:buNone/>
+            </a:pPr>
+            <a:r>
+              <a:rPr lang="en-US" sz="2400" b="1" dirty="0">
+                <a:solidFill>
+                  <a:srgbClr val="0B6E8C"/>
                 </a:solidFill>
                 <a:latin typeface="Cambria" pitchFamily="34" charset="0"/>
                 <a:ea typeface="Cambria" pitchFamily="34" charset="-122"/>
                 <a:cs typeface="Cambria" pitchFamily="34" charset="-120"/>
               </a:rPr>
-              <a:t>1.00   ·   1.18   ·   1.35   ·   1.53</a:t>
-            </a:r>
-            <a:endParaRPr lang="en-US" sz="2600" dirty="0"/>
+              <a:t>1.00 · 1.18 · 1.35 · 1.53</a:t>
+            </a:r>
+            <a:endParaRPr lang="en-US" sz="2400" dirty="0"/>
           </a:p>
         </p:txBody>
       </p:sp>
@@ -5082,66 +5527,145 @@
         </p:nvSpPr>
         <p:spPr>
           <a:xfrm>
-            <a:off x="6858000" y="3383280"/>
-            <a:ext cx="4663440" cy="2103120"/>
-          </a:xfrm>
-          <a:prstGeom prst="rect">
-            <a:avLst/>
-          </a:prstGeom>
-          <a:noFill/>
-          <a:ln/>
-        </p:spPr>
-        <p:txBody>
-          <a:bodyPr wrap="square" lIns="0" tIns="0" rIns="0" bIns="0" rtlCol="0" anchor="ctr"/>
+            <a:off x="7146874" y="3641852"/>
+            <a:ext cx="4359021" cy="689864"/>
+          </a:xfrm>
+          <a:prstGeom prst="rect">
+            <a:avLst/>
+          </a:prstGeom>
+          <a:noFill/>
+          <a:ln/>
+        </p:spPr>
+        <p:txBody>
+          <a:bodyPr wrap="square" lIns="0" tIns="0" rIns="0" bIns="0" rtlCol="0" anchor="t"/>
           <a:lstStyle/>
           <a:p>
             <a:pPr indent="0" marL="0">
               <a:lnSpc>
-                <a:spcPts val="2800"/>
+                <a:spcPts val="2500"/>
               </a:lnSpc>
               <a:buNone/>
             </a:pPr>
             <a:r>
-              <a:rPr lang="en-US" sz="1900" dirty="0">
-                <a:solidFill>
-                  <a:srgbClr val="0B2B3A"/>
+              <a:rPr lang="en-US" sz="1800" dirty="0">
+                <a:solidFill>
+                  <a:srgbClr val="12333F"/>
                 </a:solidFill>
                 <a:latin typeface="Calibri" pitchFamily="34" charset="0"/>
                 <a:ea typeface="Calibri" pitchFamily="34" charset="-122"/>
                 <a:cs typeface="Calibri" pitchFamily="34" charset="-120"/>
               </a:rPr>
-              <a:t>The interior add-on contributes a flat +18 L regardless of size or dirtiness.</a:t>
-            </a:r>
-            <a:endParaRPr lang="en-US" sz="1900" dirty="0"/>
-          </a:p>
+              <a:t>The interior add-on adds a flat +18 L, whatever the size or dirt.</a:t>
+            </a:r>
+            <a:endParaRPr lang="en-US" sz="1800" dirty="0"/>
+          </a:p>
+        </p:txBody>
+      </p:sp>
+      <p:sp>
+        <p:nvSpPr>
+          <p:cNvPr id="8" name="Shape 5"/>
+          <p:cNvSpPr/>
+          <p:nvPr/>
+        </p:nvSpPr>
+        <p:spPr>
+          <a:xfrm>
+            <a:off x="7146874" y="4606036"/>
+            <a:ext cx="4359021" cy="1238504"/>
+          </a:xfrm>
+          <a:prstGeom prst="roundRect">
+            <a:avLst>
+              <a:gd name="adj" fmla="val 4430"/>
+            </a:avLst>
+          </a:prstGeom>
+          <a:solidFill>
+            <a:srgbClr val="EDF4F6"/>
+          </a:solidFill>
+          <a:ln w="12700">
+            <a:solidFill>
+              <a:srgbClr val="EDF4F6"/>
+            </a:solidFill>
+            <a:prstDash val="solid"/>
+          </a:ln>
+        </p:spPr>
+      </p:sp>
+      <p:sp>
+        <p:nvSpPr>
+          <p:cNvPr id="9" name="Text 6"/>
+          <p:cNvSpPr txBox="1"/>
+          <p:nvPr/>
+        </p:nvSpPr>
+        <p:spPr>
+          <a:xfrm>
+            <a:off x="7421194" y="4880356"/>
+            <a:ext cx="3810381" cy="689864"/>
+          </a:xfrm>
+          <a:prstGeom prst="rect">
+            <a:avLst/>
+          </a:prstGeom>
+          <a:noFill/>
+          <a:ln/>
+        </p:spPr>
+        <p:txBody>
+          <a:bodyPr wrap="square" lIns="0" tIns="0" rIns="0" bIns="0" rtlCol="0" anchor="t"/>
+          <a:lstStyle/>
           <a:p>
             <a:pPr indent="0" marL="0">
               <a:lnSpc>
-                <a:spcPts val="2800"/>
+                <a:spcPts val="2500"/>
               </a:lnSpc>
               <a:buNone/>
             </a:pPr>
-            <a:endParaRPr lang="en-US" sz="1900" dirty="0"/>
-          </a:p>
-          <a:p>
-            <a:pPr indent="0" marL="0">
-              <a:lnSpc>
-                <a:spcPts val="2800"/>
-              </a:lnSpc>
-              <a:buNone/>
-            </a:pPr>
-            <a:r>
-              <a:rPr lang="en-US" sz="1900" dirty="0">
-                <a:solidFill>
-                  <a:srgbClr val="0B2B3A"/>
+            <a:r>
+              <a:rPr lang="en-US" sz="1800" b="1" dirty="0">
+                <a:solidFill>
+                  <a:srgbClr val="0B6E8C"/>
                 </a:solidFill>
                 <a:latin typeface="Calibri" pitchFamily="34" charset="0"/>
                 <a:ea typeface="Calibri" pitchFamily="34" charset="-122"/>
                 <a:cs typeface="Calibri" pitchFamily="34" charset="-120"/>
               </a:rPr>
-              <a:t>So a purely additive linear model is mis-specified — it needs a size × dirtiness interaction.</a:t>
-            </a:r>
-            <a:endParaRPr lang="en-US" sz="1900" dirty="0"/>
+              <a:t>An additive model is the wrong shape — it needs the interaction.</a:t>
+            </a:r>
+            <a:endParaRPr lang="en-US" sz="1800" dirty="0"/>
+          </a:p>
+        </p:txBody>
+      </p:sp>
+      <p:sp>
+        <p:nvSpPr>
+          <p:cNvPr id="10" name="Text 7"/>
+          <p:cNvSpPr txBox="1"/>
+          <p:nvPr/>
+        </p:nvSpPr>
+        <p:spPr>
+          <a:xfrm>
+            <a:off x="685800" y="6327648"/>
+            <a:ext cx="10820095" cy="237744"/>
+          </a:xfrm>
+          <a:prstGeom prst="rect">
+            <a:avLst/>
+          </a:prstGeom>
+          <a:noFill/>
+          <a:ln/>
+        </p:spPr>
+        <p:txBody>
+          <a:bodyPr wrap="square" lIns="0" tIns="0" rIns="0" bIns="0" rtlCol="0" anchor="t"/>
+          <a:lstStyle/>
+          <a:p>
+            <a:pPr indent="0" marL="0">
+              <a:buNone/>
+            </a:pPr>
+            <a:r>
+              <a:rPr lang="en-US" sz="1100" dirty="0">
+                <a:solidFill>
+                  <a:srgbClr val="68808B"/>
+                </a:solidFill>
+                <a:latin typeface="Calibri" pitchFamily="34" charset="0"/>
+                <a:ea typeface="Calibri" pitchFamily="34" charset="-122"/>
+                <a:cs typeface="Calibri" pitchFamily="34" charset="-120"/>
+              </a:rPr>
+              <a:t>Exterior-only jobs · mean litres per cell</a:t>
+            </a:r>
+            <a:endParaRPr lang="en-US" sz="1100" dirty="0"/>
           </a:p>
         </p:txBody>
       </p:sp>
@@ -5185,34 +5709,34 @@
         </p:nvSpPr>
         <p:spPr>
           <a:xfrm>
-            <a:off x="640080" y="384048"/>
-            <a:ext cx="10881360" cy="274320"/>
-          </a:xfrm>
-          <a:prstGeom prst="rect">
-            <a:avLst/>
-          </a:prstGeom>
-          <a:noFill/>
-          <a:ln/>
-        </p:spPr>
-        <p:txBody>
-          <a:bodyPr wrap="square" lIns="0" tIns="0" rIns="0" bIns="0" rtlCol="0" anchor="ctr"/>
-          <a:lstStyle/>
-          <a:p>
-            <a:pPr indent="0" marL="0">
-              <a:buNone/>
-            </a:pPr>
-            <a:r>
-              <a:rPr lang="en-US" sz="1800" b="1" spc="150" kern="0" dirty="0">
-                <a:solidFill>
-                  <a:srgbClr val="00A896"/>
+            <a:off x="685800" y="685800"/>
+            <a:ext cx="10820095" cy="274320"/>
+          </a:xfrm>
+          <a:prstGeom prst="rect">
+            <a:avLst/>
+          </a:prstGeom>
+          <a:noFill/>
+          <a:ln/>
+        </p:spPr>
+        <p:txBody>
+          <a:bodyPr wrap="square" lIns="0" tIns="0" rIns="0" bIns="0" rtlCol="0" anchor="t"/>
+          <a:lstStyle/>
+          <a:p>
+            <a:pPr indent="0" marL="0">
+              <a:buNone/>
+            </a:pPr>
+            <a:r>
+              <a:rPr lang="en-US" sz="1400" b="1" spc="200" kern="0" dirty="0">
+                <a:solidFill>
+                  <a:srgbClr val="17A398"/>
                 </a:solidFill>
                 <a:latin typeface="Calibri" pitchFamily="34" charset="0"/>
                 <a:ea typeface="Calibri" pitchFamily="34" charset="-122"/>
                 <a:cs typeface="Calibri" pitchFamily="34" charset="-120"/>
               </a:rPr>
-              <a:t>THE CONSTRAINT</a:t>
-            </a:r>
-            <a:endParaRPr lang="en-US" sz="1800" dirty="0"/>
+              <a:t>THE DESIGN DECISION</a:t>
+            </a:r>
+            <a:endParaRPr lang="en-US" sz="1400" dirty="0"/>
           </a:p>
         </p:txBody>
       </p:sp>
@@ -5224,26 +5748,26 @@
         </p:nvSpPr>
         <p:spPr>
           <a:xfrm>
-            <a:off x="640080" y="713232"/>
-            <a:ext cx="10881360" cy="868680"/>
-          </a:xfrm>
-          <a:prstGeom prst="rect">
-            <a:avLst/>
-          </a:prstGeom>
-          <a:noFill/>
-          <a:ln/>
-        </p:spPr>
-        <p:txBody>
-          <a:bodyPr wrap="square" lIns="0" tIns="0" rIns="0" bIns="0" rtlCol="0" anchor="ctr"/>
-          <a:lstStyle/>
-          <a:p>
-            <a:pPr indent="0" marL="0">
-              <a:buNone/>
-            </a:pPr>
-            <a:r>
-              <a:rPr lang="en-US" sz="3800" b="1" dirty="0">
-                <a:solidFill>
-                  <a:srgbClr val="0B2B3A"/>
+            <a:off x="685800" y="1024128"/>
+            <a:ext cx="10820095" cy="868680"/>
+          </a:xfrm>
+          <a:prstGeom prst="rect">
+            <a:avLst/>
+          </a:prstGeom>
+          <a:noFill/>
+          <a:ln/>
+        </p:spPr>
+        <p:txBody>
+          <a:bodyPr wrap="square" lIns="0" tIns="0" rIns="0" bIns="0" rtlCol="0" anchor="t"/>
+          <a:lstStyle/>
+          <a:p>
+            <a:pPr indent="0" marL="0">
+              <a:buNone/>
+            </a:pPr>
+            <a:r>
+              <a:rPr lang="en-US" sz="3000" b="1" dirty="0">
+                <a:solidFill>
+                  <a:srgbClr val="12333F"/>
                 </a:solidFill>
                 <a:latin typeface="Cambria" pitchFamily="34" charset="0"/>
                 <a:ea typeface="Cambria" pitchFamily="34" charset="-122"/>
@@ -5251,7 +5775,7 @@
               </a:rPr>
               <a:t>The best predictor arrives too late</a:t>
             </a:r>
-            <a:endParaRPr lang="en-US" sz="3800" dirty="0"/>
+            <a:endParaRPr lang="en-US" sz="3000" dirty="0"/>
           </a:p>
         </p:txBody>
       </p:sp>
@@ -5263,29 +5787,29 @@
         </p:nvSpPr>
         <p:spPr>
           <a:xfrm>
-            <a:off x="640080" y="1737360"/>
-            <a:ext cx="10881360" cy="914400"/>
-          </a:xfrm>
-          <a:prstGeom prst="rect">
-            <a:avLst/>
-          </a:prstGeom>
-          <a:noFill/>
-          <a:ln/>
-        </p:spPr>
-        <p:txBody>
-          <a:bodyPr wrap="square" lIns="0" tIns="0" rIns="0" bIns="0" rtlCol="0" anchor="ctr"/>
+            <a:off x="685800" y="2057400"/>
+            <a:ext cx="10820095" cy="689864"/>
+          </a:xfrm>
+          <a:prstGeom prst="rect">
+            <a:avLst/>
+          </a:prstGeom>
+          <a:noFill/>
+          <a:ln/>
+        </p:spPr>
+        <p:txBody>
+          <a:bodyPr wrap="square" lIns="0" tIns="0" rIns="0" bIns="0" rtlCol="0" anchor="t"/>
           <a:lstStyle/>
           <a:p>
             <a:pPr indent="0" marL="0">
               <a:lnSpc>
-                <a:spcPts val="2800"/>
+                <a:spcPts val="2500"/>
               </a:lnSpc>
               <a:buNone/>
             </a:pPr>
             <a:r>
-              <a:rPr lang="en-US" sz="2000" dirty="0">
-                <a:solidFill>
-                  <a:srgbClr val="0B2B3A"/>
+              <a:rPr lang="en-US" sz="1800" dirty="0">
+                <a:solidFill>
+                  <a:srgbClr val="12333F"/>
                 </a:solidFill>
                 <a:latin typeface="Calibri" pitchFamily="34" charset="0"/>
                 <a:ea typeface="Calibri" pitchFamily="34" charset="-122"/>
@@ -5293,7 +5817,7 @@
               </a:rPr>
               <a:t>dirtiness_level is recorded when the crew reaches the car. Nothing at booking time predicts it — not rain, not temperature, not the customer's history.</a:t>
             </a:r>
-            <a:endParaRPr lang="en-US" sz="2000" dirty="0"/>
+            <a:endParaRPr lang="en-US" sz="1800" dirty="0"/>
           </a:p>
         </p:txBody>
       </p:sp>
@@ -5305,20 +5829,20 @@
         </p:nvSpPr>
         <p:spPr>
           <a:xfrm>
-            <a:off x="640080" y="2834640"/>
-            <a:ext cx="5212080" cy="2651760"/>
+            <a:off x="685800" y="2880360"/>
+            <a:ext cx="5282032" cy="2678684"/>
           </a:xfrm>
           <a:prstGeom prst="roundRect">
             <a:avLst>
-              <a:gd name="adj" fmla="val 2759"/>
+              <a:gd name="adj" fmla="val 2048"/>
             </a:avLst>
           </a:prstGeom>
           <a:solidFill>
-            <a:srgbClr val="EAF2F5"/>
+            <a:srgbClr val="EDF4F6"/>
           </a:solidFill>
           <a:ln w="12700">
             <a:solidFill>
-              <a:srgbClr val="EAF2F5"/>
+              <a:srgbClr val="EDF4F6"/>
             </a:solidFill>
             <a:prstDash val="solid"/>
           </a:ln>
@@ -5332,26 +5856,29 @@
         </p:nvSpPr>
         <p:spPr>
           <a:xfrm>
-            <a:off x="960120" y="3063240"/>
-            <a:ext cx="4572000" cy="320040"/>
-          </a:xfrm>
-          <a:prstGeom prst="rect">
-            <a:avLst/>
-          </a:prstGeom>
-          <a:noFill/>
-          <a:ln/>
-        </p:spPr>
-        <p:txBody>
-          <a:bodyPr wrap="square" lIns="0" tIns="0" rIns="0" bIns="0" rtlCol="0" anchor="ctr"/>
-          <a:lstStyle/>
-          <a:p>
-            <a:pPr indent="0" marL="0">
-              <a:buNone/>
-            </a:pPr>
-            <a:r>
-              <a:rPr lang="en-US" sz="1800" b="1" spc="120" kern="0" dirty="0">
-                <a:solidFill>
-                  <a:srgbClr val="065A82"/>
+            <a:off x="960120" y="3154680"/>
+            <a:ext cx="4733392" cy="296164"/>
+          </a:xfrm>
+          <a:prstGeom prst="rect">
+            <a:avLst/>
+          </a:prstGeom>
+          <a:noFill/>
+          <a:ln/>
+        </p:spPr>
+        <p:txBody>
+          <a:bodyPr wrap="square" lIns="0" tIns="0" rIns="0" bIns="0" rtlCol="0" anchor="t"/>
+          <a:lstStyle/>
+          <a:p>
+            <a:pPr indent="0" marL="0">
+              <a:lnSpc>
+                <a:spcPts val="1900"/>
+              </a:lnSpc>
+              <a:buNone/>
+            </a:pPr>
+            <a:r>
+              <a:rPr lang="en-US" sz="1400" b="1" spc="200" kern="0" dirty="0">
+                <a:solidFill>
+                  <a:srgbClr val="0B6E8C"/>
                 </a:solidFill>
                 <a:latin typeface="Calibri" pitchFamily="34" charset="0"/>
                 <a:ea typeface="Calibri" pitchFamily="34" charset="-122"/>
@@ -5359,7 +5886,7 @@
               </a:rPr>
               <a:t>PLANNING MODEL</a:t>
             </a:r>
-            <a:endParaRPr lang="en-US" sz="1800" dirty="0"/>
+            <a:endParaRPr lang="en-US" sz="1400" dirty="0"/>
           </a:p>
         </p:txBody>
       </p:sp>
@@ -5371,26 +5898,29 @@
         </p:nvSpPr>
         <p:spPr>
           <a:xfrm>
-            <a:off x="960120" y="3456432"/>
-            <a:ext cx="4572000" cy="365760"/>
-          </a:xfrm>
-          <a:prstGeom prst="rect">
-            <a:avLst/>
-          </a:prstGeom>
-          <a:noFill/>
-          <a:ln/>
-        </p:spPr>
-        <p:txBody>
-          <a:bodyPr wrap="square" lIns="0" tIns="0" rIns="0" bIns="0" rtlCol="0" anchor="ctr"/>
-          <a:lstStyle/>
-          <a:p>
-            <a:pPr indent="0" marL="0">
-              <a:buNone/>
-            </a:pPr>
-            <a:r>
-              <a:rPr lang="en-US" sz="1900" dirty="0">
-                <a:solidFill>
-                  <a:srgbClr val="0B2B3A"/>
+            <a:off x="960120" y="3615436"/>
+            <a:ext cx="4733392" cy="372364"/>
+          </a:xfrm>
+          <a:prstGeom prst="rect">
+            <a:avLst/>
+          </a:prstGeom>
+          <a:noFill/>
+          <a:ln/>
+        </p:spPr>
+        <p:txBody>
+          <a:bodyPr wrap="square" lIns="0" tIns="0" rIns="0" bIns="0" rtlCol="0" anchor="t"/>
+          <a:lstStyle/>
+          <a:p>
+            <a:pPr indent="0" marL="0">
+              <a:lnSpc>
+                <a:spcPts val="2500"/>
+              </a:lnSpc>
+              <a:buNone/>
+            </a:pPr>
+            <a:r>
+              <a:rPr lang="en-US" sz="1800" dirty="0">
+                <a:solidFill>
+                  <a:srgbClr val="12333F"/>
                 </a:solidFill>
                 <a:latin typeface="Calibri" pitchFamily="34" charset="0"/>
                 <a:ea typeface="Calibri" pitchFamily="34" charset="-122"/>
@@ -5398,7 +5928,7 @@
               </a:rPr>
               <a:t>vehicle size + interior_clean</a:t>
             </a:r>
-            <a:endParaRPr lang="en-US" sz="1900" dirty="0"/>
+            <a:endParaRPr lang="en-US" sz="1800" dirty="0"/>
           </a:p>
         </p:txBody>
       </p:sp>
@@ -5410,26 +5940,29 @@
         </p:nvSpPr>
         <p:spPr>
           <a:xfrm>
-            <a:off x="960120" y="3931920"/>
-            <a:ext cx="4572000" cy="731520"/>
-          </a:xfrm>
-          <a:prstGeom prst="rect">
-            <a:avLst/>
-          </a:prstGeom>
-          <a:noFill/>
-          <a:ln/>
-        </p:spPr>
-        <p:txBody>
-          <a:bodyPr wrap="square" lIns="0" tIns="0" rIns="0" bIns="0" rtlCol="0" anchor="ctr"/>
-          <a:lstStyle/>
-          <a:p>
-            <a:pPr indent="0" marL="0">
-              <a:buNone/>
-            </a:pPr>
-            <a:r>
-              <a:rPr lang="en-US" sz="4400" b="1" dirty="0">
-                <a:solidFill>
-                  <a:srgbClr val="065A82"/>
+            <a:off x="960120" y="4188968"/>
+            <a:ext cx="4733392" cy="689864"/>
+          </a:xfrm>
+          <a:prstGeom prst="rect">
+            <a:avLst/>
+          </a:prstGeom>
+          <a:noFill/>
+          <a:ln/>
+        </p:spPr>
+        <p:txBody>
+          <a:bodyPr wrap="square" lIns="0" tIns="0" rIns="0" bIns="0" rtlCol="0" anchor="t"/>
+          <a:lstStyle/>
+          <a:p>
+            <a:pPr indent="0" marL="0">
+              <a:lnSpc>
+                <a:spcPts val="5000"/>
+              </a:lnSpc>
+              <a:buNone/>
+            </a:pPr>
+            <a:r>
+              <a:rPr lang="en-US" sz="3600" b="1" dirty="0">
+                <a:solidFill>
+                  <a:srgbClr val="0B6E8C"/>
                 </a:solidFill>
                 <a:latin typeface="Cambria" pitchFamily="34" charset="0"/>
                 <a:ea typeface="Cambria" pitchFamily="34" charset="-122"/>
@@ -5437,7 +5970,7 @@
               </a:rPr>
               <a:t>5.90 L</a:t>
             </a:r>
-            <a:endParaRPr lang="en-US" sz="4400" dirty="0"/>
+            <a:endParaRPr lang="en-US" sz="3600" dirty="0"/>
           </a:p>
         </p:txBody>
       </p:sp>
@@ -5449,34 +5982,37 @@
         </p:nvSpPr>
         <p:spPr>
           <a:xfrm>
-            <a:off x="960120" y="4709160"/>
-            <a:ext cx="4572000" cy="640080"/>
-          </a:xfrm>
-          <a:prstGeom prst="rect">
-            <a:avLst/>
-          </a:prstGeom>
-          <a:noFill/>
-          <a:ln/>
-        </p:spPr>
-        <p:txBody>
-          <a:bodyPr wrap="square" lIns="0" tIns="0" rIns="0" bIns="0" rtlCol="0" anchor="ctr"/>
-          <a:lstStyle/>
-          <a:p>
-            <a:pPr indent="0" marL="0">
-              <a:buNone/>
-            </a:pPr>
-            <a:r>
-              <a:rPr lang="en-US" sz="1700" dirty="0">
-                <a:solidFill>
-                  <a:srgbClr val="5A6B73"/>
+            <a:off x="960120" y="4988560"/>
+            <a:ext cx="4733392" cy="296164"/>
+          </a:xfrm>
+          <a:prstGeom prst="rect">
+            <a:avLst/>
+          </a:prstGeom>
+          <a:noFill/>
+          <a:ln/>
+        </p:spPr>
+        <p:txBody>
+          <a:bodyPr wrap="square" lIns="0" tIns="0" rIns="0" bIns="0" rtlCol="0" anchor="t"/>
+          <a:lstStyle/>
+          <a:p>
+            <a:pPr indent="0" marL="0">
+              <a:lnSpc>
+                <a:spcPts val="1900"/>
+              </a:lnSpc>
+              <a:buNone/>
+            </a:pPr>
+            <a:r>
+              <a:rPr lang="en-US" sz="1400" dirty="0">
+                <a:solidFill>
+                  <a:srgbClr val="68808B"/>
                 </a:solidFill>
                 <a:latin typeface="Calibri" pitchFamily="34" charset="0"/>
                 <a:ea typeface="Calibri" pitchFamily="34" charset="-122"/>
                 <a:cs typeface="Calibri" pitchFamily="34" charset="-120"/>
               </a:rPr>
-              <a:t>mean absolute error — used for routing and quoting</a:t>
-            </a:r>
-            <a:endParaRPr lang="en-US" sz="1700" dirty="0"/>
+              <a:t>mean absolute error — routing, scheduling and quoting</a:t>
+            </a:r>
+            <a:endParaRPr lang="en-US" sz="1400" dirty="0"/>
           </a:p>
         </p:txBody>
       </p:sp>
@@ -5488,20 +6024,20 @@
         </p:nvSpPr>
         <p:spPr>
           <a:xfrm>
-            <a:off x="6400800" y="2834640"/>
-            <a:ext cx="5120640" cy="2651760"/>
+            <a:off x="6223864" y="2880360"/>
+            <a:ext cx="5282032" cy="2678684"/>
           </a:xfrm>
           <a:prstGeom prst="roundRect">
             <a:avLst>
-              <a:gd name="adj" fmla="val 2759"/>
+              <a:gd name="adj" fmla="val 2048"/>
             </a:avLst>
           </a:prstGeom>
           <a:solidFill>
-            <a:srgbClr val="EAF2F5"/>
+            <a:srgbClr val="EDF4F6"/>
           </a:solidFill>
           <a:ln w="12700">
             <a:solidFill>
-              <a:srgbClr val="EAF2F5"/>
+              <a:srgbClr val="EDF4F6"/>
             </a:solidFill>
             <a:prstDash val="solid"/>
           </a:ln>
@@ -5515,26 +6051,29 @@
         </p:nvSpPr>
         <p:spPr>
           <a:xfrm>
-            <a:off x="6720840" y="3063240"/>
-            <a:ext cx="4480560" cy="320040"/>
-          </a:xfrm>
-          <a:prstGeom prst="rect">
-            <a:avLst/>
-          </a:prstGeom>
-          <a:noFill/>
-          <a:ln/>
-        </p:spPr>
-        <p:txBody>
-          <a:bodyPr wrap="square" lIns="0" tIns="0" rIns="0" bIns="0" rtlCol="0" anchor="ctr"/>
-          <a:lstStyle/>
-          <a:p>
-            <a:pPr indent="0" marL="0">
-              <a:buNone/>
-            </a:pPr>
-            <a:r>
-              <a:rPr lang="en-US" sz="1800" b="1" spc="120" kern="0" dirty="0">
-                <a:solidFill>
-                  <a:srgbClr val="00A896"/>
+            <a:off x="6498184" y="3154680"/>
+            <a:ext cx="4733392" cy="296164"/>
+          </a:xfrm>
+          <a:prstGeom prst="rect">
+            <a:avLst/>
+          </a:prstGeom>
+          <a:noFill/>
+          <a:ln/>
+        </p:spPr>
+        <p:txBody>
+          <a:bodyPr wrap="square" lIns="0" tIns="0" rIns="0" bIns="0" rtlCol="0" anchor="t"/>
+          <a:lstStyle/>
+          <a:p>
+            <a:pPr indent="0" marL="0">
+              <a:lnSpc>
+                <a:spcPts val="1900"/>
+              </a:lnSpc>
+              <a:buNone/>
+            </a:pPr>
+            <a:r>
+              <a:rPr lang="en-US" sz="1400" b="1" spc="200" kern="0" dirty="0">
+                <a:solidFill>
+                  <a:srgbClr val="17A398"/>
                 </a:solidFill>
                 <a:latin typeface="Calibri" pitchFamily="34" charset="0"/>
                 <a:ea typeface="Calibri" pitchFamily="34" charset="-122"/>
@@ -5542,7 +6081,7 @@
               </a:rPr>
               <a:t>ON-SITE MODEL</a:t>
             </a:r>
-            <a:endParaRPr lang="en-US" sz="1800" dirty="0"/>
+            <a:endParaRPr lang="en-US" sz="1400" dirty="0"/>
           </a:p>
         </p:txBody>
       </p:sp>
@@ -5554,26 +6093,29 @@
         </p:nvSpPr>
         <p:spPr>
           <a:xfrm>
-            <a:off x="6720840" y="3456432"/>
-            <a:ext cx="4480560" cy="365760"/>
-          </a:xfrm>
-          <a:prstGeom prst="rect">
-            <a:avLst/>
-          </a:prstGeom>
-          <a:noFill/>
-          <a:ln/>
-        </p:spPr>
-        <p:txBody>
-          <a:bodyPr wrap="square" lIns="0" tIns="0" rIns="0" bIns="0" rtlCol="0" anchor="ctr"/>
-          <a:lstStyle/>
-          <a:p>
-            <a:pPr indent="0" marL="0">
-              <a:buNone/>
-            </a:pPr>
-            <a:r>
-              <a:rPr lang="en-US" sz="1900" dirty="0">
-                <a:solidFill>
-                  <a:srgbClr val="0B2B3A"/>
+            <a:off x="6498184" y="3615436"/>
+            <a:ext cx="4733392" cy="372364"/>
+          </a:xfrm>
+          <a:prstGeom prst="rect">
+            <a:avLst/>
+          </a:prstGeom>
+          <a:noFill/>
+          <a:ln/>
+        </p:spPr>
+        <p:txBody>
+          <a:bodyPr wrap="square" lIns="0" tIns="0" rIns="0" bIns="0" rtlCol="0" anchor="t"/>
+          <a:lstStyle/>
+          <a:p>
+            <a:pPr indent="0" marL="0">
+              <a:lnSpc>
+                <a:spcPts val="2500"/>
+              </a:lnSpc>
+              <a:buNone/>
+            </a:pPr>
+            <a:r>
+              <a:rPr lang="en-US" sz="1800" dirty="0">
+                <a:solidFill>
+                  <a:srgbClr val="12333F"/>
                 </a:solidFill>
                 <a:latin typeface="Calibri" pitchFamily="34" charset="0"/>
                 <a:ea typeface="Calibri" pitchFamily="34" charset="-122"/>
@@ -5581,7 +6123,7 @@
               </a:rPr>
               <a:t>adds dirtiness and its interaction</a:t>
             </a:r>
-            <a:endParaRPr lang="en-US" sz="1900" dirty="0"/>
+            <a:endParaRPr lang="en-US" sz="1800" dirty="0"/>
           </a:p>
         </p:txBody>
       </p:sp>
@@ -5593,26 +6135,29 @@
         </p:nvSpPr>
         <p:spPr>
           <a:xfrm>
-            <a:off x="6720840" y="3931920"/>
-            <a:ext cx="4480560" cy="731520"/>
-          </a:xfrm>
-          <a:prstGeom prst="rect">
-            <a:avLst/>
-          </a:prstGeom>
-          <a:noFill/>
-          <a:ln/>
-        </p:spPr>
-        <p:txBody>
-          <a:bodyPr wrap="square" lIns="0" tIns="0" rIns="0" bIns="0" rtlCol="0" anchor="ctr"/>
-          <a:lstStyle/>
-          <a:p>
-            <a:pPr indent="0" marL="0">
-              <a:buNone/>
-            </a:pPr>
-            <a:r>
-              <a:rPr lang="en-US" sz="4400" b="1" dirty="0">
-                <a:solidFill>
-                  <a:srgbClr val="00A896"/>
+            <a:off x="6498184" y="4188968"/>
+            <a:ext cx="4733392" cy="689864"/>
+          </a:xfrm>
+          <a:prstGeom prst="rect">
+            <a:avLst/>
+          </a:prstGeom>
+          <a:noFill/>
+          <a:ln/>
+        </p:spPr>
+        <p:txBody>
+          <a:bodyPr wrap="square" lIns="0" tIns="0" rIns="0" bIns="0" rtlCol="0" anchor="t"/>
+          <a:lstStyle/>
+          <a:p>
+            <a:pPr indent="0" marL="0">
+              <a:lnSpc>
+                <a:spcPts val="5000"/>
+              </a:lnSpc>
+              <a:buNone/>
+            </a:pPr>
+            <a:r>
+              <a:rPr lang="en-US" sz="3600" b="1" dirty="0">
+                <a:solidFill>
+                  <a:srgbClr val="17A398"/>
                 </a:solidFill>
                 <a:latin typeface="Cambria" pitchFamily="34" charset="0"/>
                 <a:ea typeface="Cambria" pitchFamily="34" charset="-122"/>
@@ -5620,7 +6165,7 @@
               </a:rPr>
               <a:t>2.40 L</a:t>
             </a:r>
-            <a:endParaRPr lang="en-US" sz="4400" dirty="0"/>
+            <a:endParaRPr lang="en-US" sz="3600" dirty="0"/>
           </a:p>
         </p:txBody>
       </p:sp>
@@ -5632,34 +6177,37 @@
         </p:nvSpPr>
         <p:spPr>
           <a:xfrm>
-            <a:off x="6720840" y="4709160"/>
-            <a:ext cx="4480560" cy="640080"/>
-          </a:xfrm>
-          <a:prstGeom prst="rect">
-            <a:avLst/>
-          </a:prstGeom>
-          <a:noFill/>
-          <a:ln/>
-        </p:spPr>
-        <p:txBody>
-          <a:bodyPr wrap="square" lIns="0" tIns="0" rIns="0" bIns="0" rtlCol="0" anchor="ctr"/>
-          <a:lstStyle/>
-          <a:p>
-            <a:pPr indent="0" marL="0">
-              <a:buNone/>
-            </a:pPr>
-            <a:r>
-              <a:rPr lang="en-US" sz="1700" dirty="0">
-                <a:solidFill>
-                  <a:srgbClr val="5A6B73"/>
+            <a:off x="6498184" y="4988560"/>
+            <a:ext cx="4733392" cy="296164"/>
+          </a:xfrm>
+          <a:prstGeom prst="rect">
+            <a:avLst/>
+          </a:prstGeom>
+          <a:noFill/>
+          <a:ln/>
+        </p:spPr>
+        <p:txBody>
+          <a:bodyPr wrap="square" lIns="0" tIns="0" rIns="0" bIns="0" rtlCol="0" anchor="t"/>
+          <a:lstStyle/>
+          <a:p>
+            <a:pPr indent="0" marL="0">
+              <a:lnSpc>
+                <a:spcPts val="1900"/>
+              </a:lnSpc>
+              <a:buNone/>
+            </a:pPr>
+            <a:r>
+              <a:rPr lang="en-US" sz="1400" dirty="0">
+                <a:solidFill>
+                  <a:srgbClr val="68808B"/>
                 </a:solidFill>
                 <a:latin typeface="Calibri" pitchFamily="34" charset="0"/>
                 <a:ea typeface="Calibri" pitchFamily="34" charset="-122"/>
                 <a:cs typeface="Calibri" pitchFamily="34" charset="-120"/>
               </a:rPr>
-              <a:t>mean absolute error — used once the crew arrives</a:t>
-            </a:r>
-            <a:endParaRPr lang="en-US" sz="1700" dirty="0"/>
+              <a:t>mean absolute error — once the crew has seen the car</a:t>
+            </a:r>
+            <a:endParaRPr lang="en-US" sz="1400" dirty="0"/>
           </a:p>
         </p:txBody>
       </p:sp>
@@ -5703,26 +6251,26 @@
         </p:nvSpPr>
         <p:spPr>
           <a:xfrm>
-            <a:off x="640080" y="384048"/>
-            <a:ext cx="10881360" cy="274320"/>
-          </a:xfrm>
-          <a:prstGeom prst="rect">
-            <a:avLst/>
-          </a:prstGeom>
-          <a:noFill/>
-          <a:ln/>
-        </p:spPr>
-        <p:txBody>
-          <a:bodyPr wrap="square" lIns="0" tIns="0" rIns="0" bIns="0" rtlCol="0" anchor="ctr"/>
-          <a:lstStyle/>
-          <a:p>
-            <a:pPr indent="0" marL="0">
-              <a:buNone/>
-            </a:pPr>
-            <a:r>
-              <a:rPr lang="en-US" sz="1800" b="1" spc="150" kern="0" dirty="0">
-                <a:solidFill>
-                  <a:srgbClr val="00A896"/>
+            <a:off x="685800" y="685800"/>
+            <a:ext cx="10820095" cy="274320"/>
+          </a:xfrm>
+          <a:prstGeom prst="rect">
+            <a:avLst/>
+          </a:prstGeom>
+          <a:noFill/>
+          <a:ln/>
+        </p:spPr>
+        <p:txBody>
+          <a:bodyPr wrap="square" lIns="0" tIns="0" rIns="0" bIns="0" rtlCol="0" anchor="t"/>
+          <a:lstStyle/>
+          <a:p>
+            <a:pPr indent="0" marL="0">
+              <a:buNone/>
+            </a:pPr>
+            <a:r>
+              <a:rPr lang="en-US" sz="1400" b="1" spc="200" kern="0" dirty="0">
+                <a:solidFill>
+                  <a:srgbClr val="17A398"/>
                 </a:solidFill>
                 <a:latin typeface="Calibri" pitchFamily="34" charset="0"/>
                 <a:ea typeface="Calibri" pitchFamily="34" charset="-122"/>
@@ -5730,7 +6278,7 @@
               </a:rPr>
               <a:t>RESULTS</a:t>
             </a:r>
-            <a:endParaRPr lang="en-US" sz="1800" dirty="0"/>
+            <a:endParaRPr lang="en-US" sz="1400" dirty="0"/>
           </a:p>
         </p:txBody>
       </p:sp>
@@ -5742,34 +6290,34 @@
         </p:nvSpPr>
         <p:spPr>
           <a:xfrm>
-            <a:off x="640080" y="713232"/>
-            <a:ext cx="10881360" cy="868680"/>
-          </a:xfrm>
-          <a:prstGeom prst="rect">
-            <a:avLst/>
-          </a:prstGeom>
-          <a:noFill/>
-          <a:ln/>
-        </p:spPr>
-        <p:txBody>
-          <a:bodyPr wrap="square" lIns="0" tIns="0" rIns="0" bIns="0" rtlCol="0" anchor="ctr"/>
-          <a:lstStyle/>
-          <a:p>
-            <a:pPr indent="0" marL="0">
-              <a:buNone/>
-            </a:pPr>
-            <a:r>
-              <a:rPr lang="en-US" sz="3800" b="1" dirty="0">
-                <a:solidFill>
-                  <a:srgbClr val="0B2B3A"/>
+            <a:off x="685800" y="1024128"/>
+            <a:ext cx="10820095" cy="868680"/>
+          </a:xfrm>
+          <a:prstGeom prst="rect">
+            <a:avLst/>
+          </a:prstGeom>
+          <a:noFill/>
+          <a:ln/>
+        </p:spPr>
+        <p:txBody>
+          <a:bodyPr wrap="square" lIns="0" tIns="0" rIns="0" bIns="0" rtlCol="0" anchor="t"/>
+          <a:lstStyle/>
+          <a:p>
+            <a:pPr indent="0" marL="0">
+              <a:buNone/>
+            </a:pPr>
+            <a:r>
+              <a:rPr lang="en-US" sz="3000" b="1" dirty="0">
+                <a:solidFill>
+                  <a:srgbClr val="12333F"/>
                 </a:solidFill>
                 <a:latin typeface="Cambria" pitchFamily="34" charset="0"/>
                 <a:ea typeface="Cambria" pitchFamily="34" charset="-122"/>
                 <a:cs typeface="Cambria" pitchFamily="34" charset="-120"/>
               </a:rPr>
-              <a:t>Against a baseline, over ten seeds</a:t>
-            </a:r>
-            <a:endParaRPr lang="en-US" sz="3800" dirty="0"/>
+              <a:t>Halved, then halved again</a:t>
+            </a:r>
+            <a:endParaRPr lang="en-US" sz="3000" dirty="0"/>
           </a:p>
         </p:txBody>
       </p:sp>
@@ -5780,8 +6328,8 @@
           <p:nvPr/>
         </p:nvGraphicFramePr>
         <p:xfrm>
-          <a:off x="640080" y="1737360"/>
-          <a:ext cx="6675120" cy="3840480"/>
+          <a:off x="685800" y="2057400"/>
+          <a:ext cx="6205042" cy="3749040"/>
         </p:xfrm>
         <a:graphic xmlns:a="http://schemas.openxmlformats.org/drawingml/2006/main">
           <a:graphicData uri="http://schemas.openxmlformats.org/drawingml/2006/chart">
@@ -5797,66 +6345,187 @@
         </p:nvSpPr>
         <p:spPr>
           <a:xfrm>
-            <a:off x="7680960" y="1920240"/>
-            <a:ext cx="3840480" cy="2743200"/>
-          </a:xfrm>
-          <a:prstGeom prst="rect">
-            <a:avLst/>
-          </a:prstGeom>
-          <a:noFill/>
-          <a:ln/>
-        </p:spPr>
-        <p:txBody>
-          <a:bodyPr wrap="square" lIns="0" tIns="0" rIns="0" bIns="0" rtlCol="0" anchor="ctr"/>
+            <a:off x="7146874" y="2057400"/>
+            <a:ext cx="4359021" cy="1007364"/>
+          </a:xfrm>
+          <a:prstGeom prst="rect">
+            <a:avLst/>
+          </a:prstGeom>
+          <a:noFill/>
+          <a:ln/>
+        </p:spPr>
+        <p:txBody>
+          <a:bodyPr wrap="square" lIns="0" tIns="0" rIns="0" bIns="0" rtlCol="0" anchor="t"/>
           <a:lstStyle/>
           <a:p>
             <a:pPr indent="0" marL="0">
               <a:lnSpc>
-                <a:spcPts val="2800"/>
+                <a:spcPts val="2500"/>
               </a:lnSpc>
               <a:buNone/>
             </a:pPr>
             <a:r>
-              <a:rPr lang="en-US" sz="1900" dirty="0">
-                <a:solidFill>
-                  <a:srgbClr val="0B2B3A"/>
+              <a:rPr lang="en-US" sz="1800" dirty="0">
+                <a:solidFill>
+                  <a:srgbClr val="12333F"/>
                 </a:solidFill>
                 <a:latin typeface="Calibri" pitchFamily="34" charset="0"/>
                 <a:ea typeface="Calibri" pitchFamily="34" charset="-122"/>
                 <a:cs typeface="Calibri" pitchFamily="34" charset="-120"/>
               </a:rPr>
-              <a:t>Every number is the mean of ten seeds, each reshuffling the split.</a:t>
-            </a:r>
-            <a:endParaRPr lang="en-US" sz="1900" dirty="0"/>
-          </a:p>
+              <a:t>Guessing the mean costs 11.15 L. Booking-time halves it; knowing the dirt halves it again.</a:t>
+            </a:r>
+            <a:endParaRPr lang="en-US" sz="1800" dirty="0"/>
+          </a:p>
+        </p:txBody>
+      </p:sp>
+      <p:sp>
+        <p:nvSpPr>
+          <p:cNvPr id="6" name="Shape 3"/>
+          <p:cNvSpPr/>
+          <p:nvPr/>
+        </p:nvSpPr>
+        <p:spPr>
+          <a:xfrm>
+            <a:off x="7146874" y="3339084"/>
+            <a:ext cx="4359021" cy="2181860"/>
+          </a:xfrm>
+          <a:prstGeom prst="roundRect">
+            <a:avLst>
+              <a:gd name="adj" fmla="val 2515"/>
+            </a:avLst>
+          </a:prstGeom>
+          <a:solidFill>
+            <a:srgbClr val="EDF4F6"/>
+          </a:solidFill>
+          <a:ln w="12700">
+            <a:solidFill>
+              <a:srgbClr val="EDF4F6"/>
+            </a:solidFill>
+            <a:prstDash val="solid"/>
+          </a:ln>
+        </p:spPr>
+      </p:sp>
+      <p:sp>
+        <p:nvSpPr>
+          <p:cNvPr id="7" name="Text 4"/>
+          <p:cNvSpPr txBox="1"/>
+          <p:nvPr/>
+        </p:nvSpPr>
+        <p:spPr>
+          <a:xfrm>
+            <a:off x="7421194" y="3613404"/>
+            <a:ext cx="3810381" cy="689864"/>
+          </a:xfrm>
+          <a:prstGeom prst="rect">
+            <a:avLst/>
+          </a:prstGeom>
+          <a:noFill/>
+          <a:ln/>
+        </p:spPr>
+        <p:txBody>
+          <a:bodyPr wrap="square" lIns="0" tIns="0" rIns="0" bIns="0" rtlCol="0" anchor="t"/>
+          <a:lstStyle/>
           <a:p>
             <a:pPr indent="0" marL="0">
               <a:lnSpc>
-                <a:spcPts val="2800"/>
+                <a:spcPts val="2500"/>
               </a:lnSpc>
               <a:buNone/>
             </a:pPr>
-            <a:endParaRPr lang="en-US" sz="1900" dirty="0"/>
-          </a:p>
-          <a:p>
-            <a:pPr indent="0" marL="0">
-              <a:lnSpc>
-                <a:spcPts val="2800"/>
-              </a:lnSpc>
-              <a:buNone/>
-            </a:pPr>
-            <a:r>
-              <a:rPr lang="en-US" sz="1900" dirty="0">
-                <a:solidFill>
-                  <a:srgbClr val="0B2B3A"/>
+            <a:r>
+              <a:rPr lang="en-US" sz="1800" b="1" dirty="0">
+                <a:solidFill>
+                  <a:srgbClr val="12333F"/>
                 </a:solidFill>
                 <a:latin typeface="Calibri" pitchFamily="34" charset="0"/>
                 <a:ea typeface="Calibri" pitchFamily="34" charset="-122"/>
                 <a:cs typeface="Calibri" pitchFamily="34" charset="-120"/>
               </a:rPr>
-              <a:t>The on-site model sits at the noise floor — within an exact feature cell, jobs scatter with sd ≈ 3 L no matter what we do.</a:t>
-            </a:r>
-            <a:endParaRPr lang="en-US" sz="1900" dirty="0"/>
+              <a:t>Every figure is the mean of ten seeds.</a:t>
+            </a:r>
+            <a:endParaRPr lang="en-US" sz="1800" dirty="0"/>
+          </a:p>
+        </p:txBody>
+      </p:sp>
+      <p:sp>
+        <p:nvSpPr>
+          <p:cNvPr id="8" name="Text 5"/>
+          <p:cNvSpPr txBox="1"/>
+          <p:nvPr/>
+        </p:nvSpPr>
+        <p:spPr>
+          <a:xfrm>
+            <a:off x="7421194" y="4467860"/>
+            <a:ext cx="3810381" cy="778764"/>
+          </a:xfrm>
+          <a:prstGeom prst="rect">
+            <a:avLst/>
+          </a:prstGeom>
+          <a:noFill/>
+          <a:ln/>
+        </p:spPr>
+        <p:txBody>
+          <a:bodyPr wrap="square" lIns="0" tIns="0" rIns="0" bIns="0" rtlCol="0" anchor="t"/>
+          <a:lstStyle/>
+          <a:p>
+            <a:pPr indent="0" marL="0">
+              <a:lnSpc>
+                <a:spcPts val="1900"/>
+              </a:lnSpc>
+              <a:buNone/>
+            </a:pPr>
+            <a:r>
+              <a:rPr lang="en-US" sz="1400" dirty="0">
+                <a:solidFill>
+                  <a:srgbClr val="68808B"/>
+                </a:solidFill>
+                <a:latin typeface="Calibri" pitchFamily="34" charset="0"/>
+                <a:ea typeface="Calibri" pitchFamily="34" charset="-122"/>
+                <a:cs typeface="Calibri" pitchFamily="34" charset="-120"/>
+              </a:rPr>
+              <a:t>The on-site model is at the noise floor: within a cell, jobs scatter with sd ≈ 3 L whatever we do.</a:t>
+            </a:r>
+            <a:endParaRPr lang="en-US" sz="1400" dirty="0"/>
+          </a:p>
+        </p:txBody>
+      </p:sp>
+      <p:sp>
+        <p:nvSpPr>
+          <p:cNvPr id="9" name="Text 6"/>
+          <p:cNvSpPr txBox="1"/>
+          <p:nvPr/>
+        </p:nvSpPr>
+        <p:spPr>
+          <a:xfrm>
+            <a:off x="685800" y="6327648"/>
+            <a:ext cx="10820095" cy="237744"/>
+          </a:xfrm>
+          <a:prstGeom prst="rect">
+            <a:avLst/>
+          </a:prstGeom>
+          <a:noFill/>
+          <a:ln/>
+        </p:spPr>
+        <p:txBody>
+          <a:bodyPr wrap="square" lIns="0" tIns="0" rIns="0" bIns="0" rtlCol="0" anchor="t"/>
+          <a:lstStyle/>
+          <a:p>
+            <a:pPr indent="0" marL="0">
+              <a:buNone/>
+            </a:pPr>
+            <a:r>
+              <a:rPr lang="en-US" sz="1100" dirty="0">
+                <a:solidFill>
+                  <a:srgbClr val="68808B"/>
+                </a:solidFill>
+                <a:latin typeface="Calibri" pitchFamily="34" charset="0"/>
+                <a:ea typeface="Calibri" pitchFamily="34" charset="-122"/>
+                <a:cs typeface="Calibri" pitchFamily="34" charset="-120"/>
+              </a:rPr>
+              <a:t>Held-out test split · mean of ten seeds · results/model_comparison.csv</a:t>
+            </a:r>
+            <a:endParaRPr lang="en-US" sz="1100" dirty="0"/>
           </a:p>
         </p:txBody>
       </p:sp>
@@ -5900,26 +6569,26 @@
         </p:nvSpPr>
         <p:spPr>
           <a:xfrm>
-            <a:off x="640080" y="384048"/>
-            <a:ext cx="10881360" cy="274320"/>
-          </a:xfrm>
-          <a:prstGeom prst="rect">
-            <a:avLst/>
-          </a:prstGeom>
-          <a:noFill/>
-          <a:ln/>
-        </p:spPr>
-        <p:txBody>
-          <a:bodyPr wrap="square" lIns="0" tIns="0" rIns="0" bIns="0" rtlCol="0" anchor="ctr"/>
-          <a:lstStyle/>
-          <a:p>
-            <a:pPr indent="0" marL="0">
-              <a:buNone/>
-            </a:pPr>
-            <a:r>
-              <a:rPr lang="en-US" sz="1800" b="1" spc="150" kern="0" dirty="0">
-                <a:solidFill>
-                  <a:srgbClr val="00A896"/>
+            <a:off x="685800" y="685800"/>
+            <a:ext cx="10820095" cy="274320"/>
+          </a:xfrm>
+          <a:prstGeom prst="rect">
+            <a:avLst/>
+          </a:prstGeom>
+          <a:noFill/>
+          <a:ln/>
+        </p:spPr>
+        <p:txBody>
+          <a:bodyPr wrap="square" lIns="0" tIns="0" rIns="0" bIns="0" rtlCol="0" anchor="t"/>
+          <a:lstStyle/>
+          <a:p>
+            <a:pPr indent="0" marL="0">
+              <a:buNone/>
+            </a:pPr>
+            <a:r>
+              <a:rPr lang="en-US" sz="1400" b="1" spc="200" kern="0" dirty="0">
+                <a:solidFill>
+                  <a:srgbClr val="17A398"/>
                 </a:solidFill>
                 <a:latin typeface="Calibri" pitchFamily="34" charset="0"/>
                 <a:ea typeface="Calibri" pitchFamily="34" charset="-122"/>
@@ -5927,7 +6596,7 @@
               </a:rPr>
               <a:t>WHAT DID NOT WORK</a:t>
             </a:r>
-            <a:endParaRPr lang="en-US" sz="1800" dirty="0"/>
+            <a:endParaRPr lang="en-US" sz="1400" dirty="0"/>
           </a:p>
         </p:txBody>
       </p:sp>
@@ -5939,26 +6608,26 @@
         </p:nvSpPr>
         <p:spPr>
           <a:xfrm>
-            <a:off x="640080" y="713232"/>
-            <a:ext cx="10881360" cy="868680"/>
-          </a:xfrm>
-          <a:prstGeom prst="rect">
-            <a:avLst/>
-          </a:prstGeom>
-          <a:noFill/>
-          <a:ln/>
-        </p:spPr>
-        <p:txBody>
-          <a:bodyPr wrap="square" lIns="0" tIns="0" rIns="0" bIns="0" rtlCol="0" anchor="ctr"/>
-          <a:lstStyle/>
-          <a:p>
-            <a:pPr indent="0" marL="0">
-              <a:buNone/>
-            </a:pPr>
-            <a:r>
-              <a:rPr lang="en-US" sz="3800" b="1" dirty="0">
-                <a:solidFill>
-                  <a:srgbClr val="0B2B3A"/>
+            <a:off x="685800" y="1024128"/>
+            <a:ext cx="10820095" cy="868680"/>
+          </a:xfrm>
+          <a:prstGeom prst="rect">
+            <a:avLst/>
+          </a:prstGeom>
+          <a:noFill/>
+          <a:ln/>
+        </p:spPr>
+        <p:txBody>
+          <a:bodyPr wrap="square" lIns="0" tIns="0" rIns="0" bIns="0" rtlCol="0" anchor="t"/>
+          <a:lstStyle/>
+          <a:p>
+            <a:pPr indent="0" marL="0">
+              <a:buNone/>
+            </a:pPr>
+            <a:r>
+              <a:rPr lang="en-US" sz="3000" b="1" dirty="0">
+                <a:solidFill>
+                  <a:srgbClr val="12333F"/>
                 </a:solidFill>
                 <a:latin typeface="Cambria" pitchFamily="34" charset="0"/>
                 <a:ea typeface="Cambria" pitchFamily="34" charset="-122"/>
@@ -5966,7 +6635,7 @@
               </a:rPr>
               <a:t>Three model families, one answer</a:t>
             </a:r>
-            <a:endParaRPr lang="en-US" sz="3800" dirty="0"/>
+            <a:endParaRPr lang="en-US" sz="3000" dirty="0"/>
           </a:p>
         </p:txBody>
       </p:sp>
@@ -5978,29 +6647,29 @@
         </p:nvSpPr>
         <p:spPr>
           <a:xfrm>
-            <a:off x="640080" y="1737360"/>
-            <a:ext cx="10881360" cy="822960"/>
-          </a:xfrm>
-          <a:prstGeom prst="rect">
-            <a:avLst/>
-          </a:prstGeom>
-          <a:noFill/>
-          <a:ln/>
-        </p:spPr>
-        <p:txBody>
-          <a:bodyPr wrap="square" lIns="0" tIns="0" rIns="0" bIns="0" rtlCol="0" anchor="ctr"/>
+            <a:off x="685800" y="2057400"/>
+            <a:ext cx="10820095" cy="689864"/>
+          </a:xfrm>
+          <a:prstGeom prst="rect">
+            <a:avLst/>
+          </a:prstGeom>
+          <a:noFill/>
+          <a:ln/>
+        </p:spPr>
+        <p:txBody>
+          <a:bodyPr wrap="square" lIns="0" tIns="0" rIns="0" bIns="0" rtlCol="0" anchor="t"/>
           <a:lstStyle/>
           <a:p>
             <a:pPr indent="0" marL="0">
               <a:lnSpc>
-                <a:spcPts val="2800"/>
+                <a:spcPts val="2500"/>
               </a:lnSpc>
               <a:buNone/>
             </a:pPr>
             <a:r>
-              <a:rPr lang="en-US" sz="2000" dirty="0">
-                <a:solidFill>
-                  <a:srgbClr val="0B2B3A"/>
+              <a:rPr lang="en-US" sz="1800" dirty="0">
+                <a:solidFill>
+                  <a:srgbClr val="12333F"/>
                 </a:solidFill>
                 <a:latin typeface="Calibri" pitchFamily="34" charset="0"/>
                 <a:ea typeface="Calibri" pitchFamily="34" charset="-122"/>
@@ -6008,7 +6677,7 @@
               </a:rPr>
               <a:t>Cell mean, linear with interaction, and gradient boosting differ by 0.001 L. The seed-to-seed spread is 0.038 L.</a:t>
             </a:r>
-            <a:endParaRPr lang="en-US" sz="2000" dirty="0"/>
+            <a:endParaRPr lang="en-US" sz="1800" dirty="0"/>
           </a:p>
         </p:txBody>
       </p:sp>
@@ -6020,20 +6689,20 @@
         </p:nvSpPr>
         <p:spPr>
           <a:xfrm>
-            <a:off x="640080" y="2743200"/>
-            <a:ext cx="10881360" cy="1417320"/>
+            <a:off x="685800" y="2985008"/>
+            <a:ext cx="10820095" cy="1441704"/>
           </a:xfrm>
           <a:prstGeom prst="roundRect">
             <a:avLst>
-              <a:gd name="adj" fmla="val 5161"/>
+              <a:gd name="adj" fmla="val 3805"/>
             </a:avLst>
           </a:prstGeom>
           <a:solidFill>
-            <a:srgbClr val="EAF2F5"/>
+            <a:srgbClr val="EDF4F6"/>
           </a:solidFill>
           <a:ln w="12700">
             <a:solidFill>
-              <a:srgbClr val="EAF2F5"/>
+              <a:srgbClr val="EDF4F6"/>
             </a:solidFill>
             <a:prstDash val="solid"/>
           </a:ln>
@@ -6047,34 +6716,37 @@
         </p:nvSpPr>
         <p:spPr>
           <a:xfrm>
-            <a:off x="1005840" y="3063240"/>
-            <a:ext cx="10149840" cy="777240"/>
-          </a:xfrm>
-          <a:prstGeom prst="rect">
-            <a:avLst/>
-          </a:prstGeom>
-          <a:noFill/>
-          <a:ln/>
-        </p:spPr>
-        <p:txBody>
-          <a:bodyPr wrap="square" lIns="0" tIns="0" rIns="0" bIns="0" rtlCol="0" anchor="ctr"/>
-          <a:lstStyle/>
-          <a:p>
-            <a:pPr indent="0" marL="0">
-              <a:buNone/>
-            </a:pPr>
-            <a:r>
-              <a:rPr lang="en-US" sz="2600" b="1" dirty="0">
-                <a:solidFill>
-                  <a:srgbClr val="065A82"/>
+            <a:off x="960120" y="3259328"/>
+            <a:ext cx="10271455" cy="893064"/>
+          </a:xfrm>
+          <a:prstGeom prst="rect">
+            <a:avLst/>
+          </a:prstGeom>
+          <a:noFill/>
+          <a:ln/>
+        </p:spPr>
+        <p:txBody>
+          <a:bodyPr wrap="square" lIns="0" tIns="0" rIns="0" bIns="0" rtlCol="0" anchor="t"/>
+          <a:lstStyle/>
+          <a:p>
+            <a:pPr indent="0" marL="0">
+              <a:lnSpc>
+                <a:spcPts val="3300"/>
+              </a:lnSpc>
+              <a:buNone/>
+            </a:pPr>
+            <a:r>
+              <a:rPr lang="en-US" sz="2400" b="1" dirty="0">
+                <a:solidFill>
+                  <a:srgbClr val="0B6E8C"/>
                 </a:solidFill>
                 <a:latin typeface="Cambria" pitchFamily="34" charset="0"/>
                 <a:ea typeface="Cambria" pitchFamily="34" charset="-122"/>
                 <a:cs typeface="Cambria" pitchFamily="34" charset="-120"/>
               </a:rPr>
-              <a:t>The noise between splits is ~40× the gap between models.</a:t>
-            </a:r>
-            <a:endParaRPr lang="en-US" sz="2600" dirty="0"/>
+              <a:t>The noise between splits is about forty times the gap between models.</a:t>
+            </a:r>
+            <a:endParaRPr lang="en-US" sz="2400" dirty="0"/>
           </a:p>
         </p:txBody>
       </p:sp>
@@ -6086,37 +6758,79 @@
         </p:nvSpPr>
         <p:spPr>
           <a:xfrm>
-            <a:off x="640080" y="4480560"/>
-            <a:ext cx="10881360" cy="1554480"/>
-          </a:xfrm>
-          <a:prstGeom prst="rect">
-            <a:avLst/>
-          </a:prstGeom>
-          <a:noFill/>
-          <a:ln/>
-        </p:spPr>
-        <p:txBody>
-          <a:bodyPr wrap="square" lIns="0" tIns="0" rIns="0" bIns="0" rtlCol="0" anchor="ctr"/>
+            <a:off x="685800" y="4701032"/>
+            <a:ext cx="5282032" cy="689864"/>
+          </a:xfrm>
+          <a:prstGeom prst="rect">
+            <a:avLst/>
+          </a:prstGeom>
+          <a:noFill/>
+          <a:ln/>
+        </p:spPr>
+        <p:txBody>
+          <a:bodyPr wrap="square" lIns="0" tIns="0" rIns="0" bIns="0" rtlCol="0" anchor="t"/>
           <a:lstStyle/>
           <a:p>
             <a:pPr indent="0" marL="0">
               <a:lnSpc>
-                <a:spcPts val="2800"/>
+                <a:spcPts val="2500"/>
               </a:lnSpc>
               <a:buNone/>
             </a:pPr>
             <a:r>
-              <a:rPr lang="en-US" sz="1900" dirty="0">
-                <a:solidFill>
-                  <a:srgbClr val="0B2B3A"/>
+              <a:rPr lang="en-US" sz="1800" dirty="0">
+                <a:solidFill>
+                  <a:srgbClr val="12333F"/>
                 </a:solidFill>
                 <a:latin typeface="Calibri" pitchFamily="34" charset="0"/>
                 <a:ea typeface="Calibri" pitchFamily="34" charset="-122"/>
                 <a:cs typeface="Calibri" pitchFamily="34" charset="-120"/>
               </a:rPr>
-              <a:t>Reported from a single split, the ranking would be an artefact of which rows landed in the test set. We select the simplest family within 1% of the best — the cell mean — at both stages. Picking by raw argmin would have shipped gradient boosting for a 0.0003 L gain.</a:t>
-            </a:r>
-            <a:endParaRPr lang="en-US" sz="1900" dirty="0"/>
+              <a:t>From one split, the ranking would be an artefact of which rows landed in the test set.</a:t>
+            </a:r>
+            <a:endParaRPr lang="en-US" sz="1800" dirty="0"/>
+          </a:p>
+        </p:txBody>
+      </p:sp>
+      <p:sp>
+        <p:nvSpPr>
+          <p:cNvPr id="8" name="Text 6"/>
+          <p:cNvSpPr txBox="1"/>
+          <p:nvPr/>
+        </p:nvSpPr>
+        <p:spPr>
+          <a:xfrm>
+            <a:off x="6223864" y="4701032"/>
+            <a:ext cx="5282032" cy="689864"/>
+          </a:xfrm>
+          <a:prstGeom prst="rect">
+            <a:avLst/>
+          </a:prstGeom>
+          <a:noFill/>
+          <a:ln/>
+        </p:spPr>
+        <p:txBody>
+          <a:bodyPr wrap="square" lIns="0" tIns="0" rIns="0" bIns="0" rtlCol="0" anchor="t"/>
+          <a:lstStyle/>
+          <a:p>
+            <a:pPr indent="0" marL="0">
+              <a:lnSpc>
+                <a:spcPts val="2500"/>
+              </a:lnSpc>
+              <a:buNone/>
+            </a:pPr>
+            <a:r>
+              <a:rPr lang="en-US" sz="1800" dirty="0">
+                <a:solidFill>
+                  <a:srgbClr val="12333F"/>
+                </a:solidFill>
+                <a:latin typeface="Calibri" pitchFamily="34" charset="0"/>
+                <a:ea typeface="Calibri" pitchFamily="34" charset="-122"/>
+                <a:cs typeface="Calibri" pitchFamily="34" charset="-120"/>
+              </a:rPr>
+              <a:t>We take the simplest family within 1% of the best — the cell mean — at both stages.</a:t>
+            </a:r>
+            <a:endParaRPr lang="en-US" sz="1800" dirty="0"/>
           </a:p>
         </p:txBody>
       </p:sp>
@@ -6160,26 +6874,26 @@
         </p:nvSpPr>
         <p:spPr>
           <a:xfrm>
-            <a:off x="640080" y="384048"/>
-            <a:ext cx="10881360" cy="274320"/>
-          </a:xfrm>
-          <a:prstGeom prst="rect">
-            <a:avLst/>
-          </a:prstGeom>
-          <a:noFill/>
-          <a:ln/>
-        </p:spPr>
-        <p:txBody>
-          <a:bodyPr wrap="square" lIns="0" tIns="0" rIns="0" bIns="0" rtlCol="0" anchor="ctr"/>
-          <a:lstStyle/>
-          <a:p>
-            <a:pPr indent="0" marL="0">
-              <a:buNone/>
-            </a:pPr>
-            <a:r>
-              <a:rPr lang="en-US" sz="1800" b="1" spc="150" kern="0" dirty="0">
-                <a:solidFill>
-                  <a:srgbClr val="00A896"/>
+            <a:off x="685800" y="685800"/>
+            <a:ext cx="10820095" cy="274320"/>
+          </a:xfrm>
+          <a:prstGeom prst="rect">
+            <a:avLst/>
+          </a:prstGeom>
+          <a:noFill/>
+          <a:ln/>
+        </p:spPr>
+        <p:txBody>
+          <a:bodyPr wrap="square" lIns="0" tIns="0" rIns="0" bIns="0" rtlCol="0" anchor="t"/>
+          <a:lstStyle/>
+          <a:p>
+            <a:pPr indent="0" marL="0">
+              <a:buNone/>
+            </a:pPr>
+            <a:r>
+              <a:rPr lang="en-US" sz="1400" b="1" spc="200" kern="0" dirty="0">
+                <a:solidFill>
+                  <a:srgbClr val="17A398"/>
                 </a:solidFill>
                 <a:latin typeface="Calibri" pitchFamily="34" charset="0"/>
                 <a:ea typeface="Calibri" pitchFamily="34" charset="-122"/>
@@ -6187,7 +6901,7 @@
               </a:rPr>
               <a:t>DELIVERABLE 1</a:t>
             </a:r>
-            <a:endParaRPr lang="en-US" sz="1800" dirty="0"/>
+            <a:endParaRPr lang="en-US" sz="1400" dirty="0"/>
           </a:p>
         </p:txBody>
       </p:sp>
@@ -6199,26 +6913,26 @@
         </p:nvSpPr>
         <p:spPr>
           <a:xfrm>
-            <a:off x="640080" y="713232"/>
-            <a:ext cx="10881360" cy="868680"/>
-          </a:xfrm>
-          <a:prstGeom prst="rect">
-            <a:avLst/>
-          </a:prstGeom>
-          <a:noFill/>
-          <a:ln/>
-        </p:spPr>
-        <p:txBody>
-          <a:bodyPr wrap="square" lIns="0" tIns="0" rIns="0" bIns="0" rtlCol="0" anchor="ctr"/>
-          <a:lstStyle/>
-          <a:p>
-            <a:pPr indent="0" marL="0">
-              <a:buNone/>
-            </a:pPr>
-            <a:r>
-              <a:rPr lang="en-US" sz="3800" b="1" dirty="0">
-                <a:solidFill>
-                  <a:srgbClr val="0B2B3A"/>
+            <a:off x="685800" y="1024128"/>
+            <a:ext cx="10820095" cy="868680"/>
+          </a:xfrm>
+          <a:prstGeom prst="rect">
+            <a:avLst/>
+          </a:prstGeom>
+          <a:noFill/>
+          <a:ln/>
+        </p:spPr>
+        <p:txBody>
+          <a:bodyPr wrap="square" lIns="0" tIns="0" rIns="0" bIns="0" rtlCol="0" anchor="t"/>
+          <a:lstStyle/>
+          <a:p>
+            <a:pPr indent="0" marL="0">
+              <a:buNone/>
+            </a:pPr>
+            <a:r>
+              <a:rPr lang="en-US" sz="3000" b="1" dirty="0">
+                <a:solidFill>
+                  <a:srgbClr val="12333F"/>
                 </a:solidFill>
                 <a:latin typeface="Cambria" pitchFamily="34" charset="0"/>
                 <a:ea typeface="Cambria" pitchFamily="34" charset="-122"/>
@@ -6226,7 +6940,7 @@
               </a:rPr>
               <a:t>Mean arithmetic overstates the tank</a:t>
             </a:r>
-            <a:endParaRPr lang="en-US" sz="3800" dirty="0"/>
+            <a:endParaRPr lang="en-US" sz="3000" dirty="0"/>
           </a:p>
         </p:txBody>
       </p:sp>
@@ -6237,8 +6951,8 @@
           <p:nvPr/>
         </p:nvGraphicFramePr>
         <p:xfrm>
-          <a:off x="640080" y="1783080"/>
-          <a:ext cx="6492240" cy="3749040"/>
+          <a:off x="685800" y="2057400"/>
+          <a:ext cx="6205042" cy="3749040"/>
         </p:xfrm>
         <a:graphic xmlns:a="http://schemas.openxmlformats.org/drawingml/2006/main">
           <a:graphicData uri="http://schemas.openxmlformats.org/drawingml/2006/chart">
@@ -6254,167 +6968,229 @@
         </p:nvSpPr>
         <p:spPr>
           <a:xfrm>
-            <a:off x="7498080" y="1828800"/>
-            <a:ext cx="4023360" cy="914400"/>
-          </a:xfrm>
-          <a:prstGeom prst="rect">
-            <a:avLst/>
-          </a:prstGeom>
-          <a:noFill/>
-          <a:ln/>
-        </p:spPr>
-        <p:txBody>
-          <a:bodyPr wrap="square" lIns="0" tIns="0" rIns="0" bIns="0" rtlCol="0" anchor="ctr"/>
+            <a:off x="7146874" y="2057400"/>
+            <a:ext cx="4359021" cy="689864"/>
+          </a:xfrm>
+          <a:prstGeom prst="rect">
+            <a:avLst/>
+          </a:prstGeom>
+          <a:noFill/>
+          <a:ln/>
+        </p:spPr>
+        <p:txBody>
+          <a:bodyPr wrap="square" lIns="0" tIns="0" rIns="0" bIns="0" rtlCol="0" anchor="t"/>
           <a:lstStyle/>
           <a:p>
             <a:pPr indent="0" marL="0">
               <a:lnSpc>
-                <a:spcPts val="2600"/>
+                <a:spcPts val="2500"/>
               </a:lnSpc>
               <a:buNone/>
             </a:pPr>
             <a:r>
-              <a:rPr lang="en-US" sz="1900" dirty="0">
-                <a:solidFill>
-                  <a:srgbClr val="0B2B3A"/>
+              <a:rPr lang="en-US" sz="1800" dirty="0">
+                <a:solidFill>
+                  <a:srgbClr val="12333F"/>
                 </a:solidFill>
                 <a:latin typeface="Calibri" pitchFamily="34" charset="0"/>
                 <a:ea typeface="Calibri" pitchFamily="34" charset="-122"/>
                 <a:cs typeface="Calibri" pitchFamily="34" charset="-120"/>
               </a:rPr>
-              <a:t>Dividing capacity by the 55.7 L mean gives 3 / 5 / 6 jobs.</a:t>
-            </a:r>
-            <a:endParaRPr lang="en-US" sz="1900" dirty="0"/>
-          </a:p>
+              <a:t>Dividing capacity by the 55.7 L mean gives 3 / 5 / 6 jobs. Those loads fit:</a:t>
+            </a:r>
+            <a:endParaRPr lang="en-US" sz="1800" dirty="0"/>
+          </a:p>
+        </p:txBody>
+      </p:sp>
+      <p:sp>
+        <p:nvSpPr>
+          <p:cNvPr id="6" name="Shape 3"/>
+          <p:cNvSpPr/>
+          <p:nvPr/>
+        </p:nvSpPr>
+        <p:spPr>
+          <a:xfrm>
+            <a:off x="7146874" y="2948432"/>
+            <a:ext cx="4359021" cy="1651508"/>
+          </a:xfrm>
+          <a:prstGeom prst="roundRect">
+            <a:avLst>
+              <a:gd name="adj" fmla="val 3322"/>
+            </a:avLst>
+          </a:prstGeom>
+          <a:solidFill>
+            <a:srgbClr val="EDF4F6"/>
+          </a:solidFill>
+          <a:ln w="12700">
+            <a:solidFill>
+              <a:srgbClr val="EDF4F6"/>
+            </a:solidFill>
+            <a:prstDash val="solid"/>
+          </a:ln>
+        </p:spPr>
+      </p:sp>
+      <p:sp>
+        <p:nvSpPr>
+          <p:cNvPr id="7" name="Text 4"/>
+          <p:cNvSpPr txBox="1"/>
+          <p:nvPr/>
+        </p:nvSpPr>
+        <p:spPr>
+          <a:xfrm>
+            <a:off x="7421194" y="3222752"/>
+            <a:ext cx="3810381" cy="473964"/>
+          </a:xfrm>
+          <a:prstGeom prst="rect">
+            <a:avLst/>
+          </a:prstGeom>
+          <a:noFill/>
+          <a:ln/>
+        </p:spPr>
+        <p:txBody>
+          <a:bodyPr wrap="square" lIns="0" tIns="0" rIns="0" bIns="0" rtlCol="0" anchor="t"/>
+          <a:lstStyle/>
           <a:p>
             <a:pPr indent="0" marL="0">
               <a:lnSpc>
-                <a:spcPts val="2600"/>
+                <a:spcPts val="3300"/>
               </a:lnSpc>
               <a:buNone/>
             </a:pPr>
             <a:r>
-              <a:rPr lang="en-US" sz="1900" dirty="0">
-                <a:solidFill>
-                  <a:srgbClr val="0B2B3A"/>
+              <a:rPr lang="en-US" sz="2400" b="1" dirty="0">
+                <a:solidFill>
+                  <a:srgbClr val="C25332"/>
+                </a:solidFill>
+                <a:latin typeface="Cambria" pitchFamily="34" charset="0"/>
+                <a:ea typeface="Cambria" pitchFamily="34" charset="-122"/>
+                <a:cs typeface="Cambria" pitchFamily="34" charset="-120"/>
+              </a:rPr>
+              <a:t>91%   53%   70%</a:t>
+            </a:r>
+            <a:endParaRPr lang="en-US" sz="2400" dirty="0"/>
+          </a:p>
+        </p:txBody>
+      </p:sp>
+      <p:sp>
+        <p:nvSpPr>
+          <p:cNvPr id="8" name="Text 5"/>
+          <p:cNvSpPr txBox="1"/>
+          <p:nvPr/>
+        </p:nvSpPr>
+        <p:spPr>
+          <a:xfrm>
+            <a:off x="7421194" y="3788156"/>
+            <a:ext cx="3810381" cy="537464"/>
+          </a:xfrm>
+          <a:prstGeom prst="rect">
+            <a:avLst/>
+          </a:prstGeom>
+          <a:noFill/>
+          <a:ln/>
+        </p:spPr>
+        <p:txBody>
+          <a:bodyPr wrap="square" lIns="0" tIns="0" rIns="0" bIns="0" rtlCol="0" anchor="t"/>
+          <a:lstStyle/>
+          <a:p>
+            <a:pPr indent="0" marL="0">
+              <a:lnSpc>
+                <a:spcPts val="1900"/>
+              </a:lnSpc>
+              <a:buNone/>
+            </a:pPr>
+            <a:r>
+              <a:rPr lang="en-US" sz="1400" dirty="0">
+                <a:solidFill>
+                  <a:srgbClr val="68808B"/>
                 </a:solidFill>
                 <a:latin typeface="Calibri" pitchFamily="34" charset="0"/>
                 <a:ea typeface="Calibri" pitchFamily="34" charset="-122"/>
                 <a:cs typeface="Calibri" pitchFamily="34" charset="-120"/>
               </a:rPr>
-              <a:t>Those loads actually fit:</a:t>
-            </a:r>
-            <a:endParaRPr lang="en-US" sz="1900" dirty="0"/>
-          </a:p>
-        </p:txBody>
-      </p:sp>
-      <p:sp>
-        <p:nvSpPr>
-          <p:cNvPr id="6" name="Text 3"/>
-          <p:cNvSpPr txBox="1"/>
-          <p:nvPr/>
-        </p:nvSpPr>
-        <p:spPr>
-          <a:xfrm>
-            <a:off x="7498080" y="2834640"/>
-            <a:ext cx="4023360" cy="640080"/>
-          </a:xfrm>
-          <a:prstGeom prst="rect">
-            <a:avLst/>
-          </a:prstGeom>
-          <a:noFill/>
-          <a:ln/>
-        </p:spPr>
-        <p:txBody>
-          <a:bodyPr wrap="square" lIns="0" tIns="0" rIns="0" bIns="0" rtlCol="0" anchor="ctr"/>
-          <a:lstStyle/>
-          <a:p>
-            <a:pPr indent="0" marL="0">
-              <a:buNone/>
-            </a:pPr>
-            <a:r>
-              <a:rPr lang="en-US" sz="3000" b="1" dirty="0">
-                <a:solidFill>
-                  <a:srgbClr val="D9532B"/>
-                </a:solidFill>
-                <a:latin typeface="Cambria" pitchFamily="34" charset="0"/>
-                <a:ea typeface="Cambria" pitchFamily="34" charset="-122"/>
-                <a:cs typeface="Cambria" pitchFamily="34" charset="-120"/>
-              </a:rPr>
-              <a:t>91%   53%   70%</a:t>
-            </a:r>
-            <a:endParaRPr lang="en-US" sz="3000" dirty="0"/>
-          </a:p>
-        </p:txBody>
-      </p:sp>
-      <p:sp>
-        <p:nvSpPr>
-          <p:cNvPr id="7" name="Text 4"/>
-          <p:cNvSpPr txBox="1"/>
-          <p:nvPr/>
-        </p:nvSpPr>
-        <p:spPr>
-          <a:xfrm>
-            <a:off x="7498080" y="3611880"/>
-            <a:ext cx="4023360" cy="1920240"/>
-          </a:xfrm>
-          <a:prstGeom prst="rect">
-            <a:avLst/>
-          </a:prstGeom>
-          <a:noFill/>
-          <a:ln/>
-        </p:spPr>
-        <p:txBody>
-          <a:bodyPr wrap="square" lIns="0" tIns="0" rIns="0" bIns="0" rtlCol="0" anchor="ctr"/>
+              <a:t>of the time — load the EV van for five and it runs dry every second day.</a:t>
+            </a:r>
+            <a:endParaRPr lang="en-US" sz="1400" dirty="0"/>
+          </a:p>
+        </p:txBody>
+      </p:sp>
+      <p:sp>
+        <p:nvSpPr>
+          <p:cNvPr id="9" name="Text 6"/>
+          <p:cNvSpPr txBox="1"/>
+          <p:nvPr/>
+        </p:nvSpPr>
+        <p:spPr>
+          <a:xfrm>
+            <a:off x="7146874" y="4874260"/>
+            <a:ext cx="4359021" cy="689864"/>
+          </a:xfrm>
+          <a:prstGeom prst="rect">
+            <a:avLst/>
+          </a:prstGeom>
+          <a:noFill/>
+          <a:ln/>
+        </p:spPr>
+        <p:txBody>
+          <a:bodyPr wrap="square" lIns="0" tIns="0" rIns="0" bIns="0" rtlCol="0" anchor="t"/>
           <a:lstStyle/>
           <a:p>
             <a:pPr indent="0" marL="0">
               <a:lnSpc>
-                <a:spcPts val="2800"/>
+                <a:spcPts val="2500"/>
               </a:lnSpc>
               <a:buNone/>
             </a:pPr>
             <a:r>
-              <a:rPr lang="en-US" sz="1900" dirty="0">
-                <a:solidFill>
-                  <a:srgbClr val="0B2B3A"/>
+              <a:rPr lang="en-US" sz="1800" b="1" dirty="0">
+                <a:solidFill>
+                  <a:srgbClr val="0B6E8C"/>
                 </a:solidFill>
                 <a:latin typeface="Calibri" pitchFamily="34" charset="0"/>
                 <a:ea typeface="Calibri" pitchFamily="34" charset="-122"/>
                 <a:cs typeface="Calibri" pitchFamily="34" charset="-120"/>
               </a:rPr>
-              <a:t>of the time. Load the EV van for five jobs and the crew runs dry roughly every second day.</a:t>
-            </a:r>
-            <a:endParaRPr lang="en-US" sz="1900" dirty="0"/>
-          </a:p>
-          <a:p>
-            <a:pPr indent="0" marL="0">
-              <a:lnSpc>
-                <a:spcPts val="2800"/>
-              </a:lnSpc>
-              <a:buNone/>
-            </a:pPr>
-            <a:endParaRPr lang="en-US" sz="1900" dirty="0"/>
-          </a:p>
-          <a:p>
-            <a:pPr indent="0" marL="0">
-              <a:lnSpc>
-                <a:spcPts val="2800"/>
-              </a:lnSpc>
-              <a:buNone/>
-            </a:pPr>
-            <a:r>
-              <a:rPr lang="en-US" sz="1900" dirty="0">
-                <a:solidFill>
-                  <a:srgbClr val="0B2B3A"/>
+              <a:t>A capacity figure without a service level is not a usable number.</a:t>
+            </a:r>
+            <a:endParaRPr lang="en-US" sz="1800" dirty="0"/>
+          </a:p>
+        </p:txBody>
+      </p:sp>
+      <p:sp>
+        <p:nvSpPr>
+          <p:cNvPr id="10" name="Text 7"/>
+          <p:cNvSpPr txBox="1"/>
+          <p:nvPr/>
+        </p:nvSpPr>
+        <p:spPr>
+          <a:xfrm>
+            <a:off x="685800" y="6327648"/>
+            <a:ext cx="10820095" cy="237744"/>
+          </a:xfrm>
+          <a:prstGeom prst="rect">
+            <a:avLst/>
+          </a:prstGeom>
+          <a:noFill/>
+          <a:ln/>
+        </p:spPr>
+        <p:txBody>
+          <a:bodyPr wrap="square" lIns="0" tIns="0" rIns="0" bIns="0" rtlCol="0" anchor="t"/>
+          <a:lstStyle/>
+          <a:p>
+            <a:pPr indent="0" marL="0">
+              <a:buNone/>
+            </a:pPr>
+            <a:r>
+              <a:rPr lang="en-US" sz="1100" dirty="0">
+                <a:solidFill>
+                  <a:srgbClr val="68808B"/>
                 </a:solidFill>
                 <a:latin typeface="Calibri" pitchFamily="34" charset="0"/>
                 <a:ea typeface="Calibri" pitchFamily="34" charset="-122"/>
                 <a:cs typeface="Calibri" pitchFamily="34" charset="-120"/>
               </a:rPr>
-              <a:t>A capacity figure without a service level is not a usable number.</a:t>
-            </a:r>
-            <a:endParaRPr lang="en-US" sz="1900" dirty="0"/>
+              <a:t>20,000 resampled crew-days · identical under all ten seeds · results/tank_capacity.csv</a:t>
+            </a:r>
+            <a:endParaRPr lang="en-US" sz="1100" dirty="0"/>
           </a:p>
         </p:txBody>
       </p:sp>
@@ -6458,26 +7234,26 @@
         </p:nvSpPr>
         <p:spPr>
           <a:xfrm>
-            <a:off x="640080" y="384048"/>
-            <a:ext cx="10881360" cy="274320"/>
-          </a:xfrm>
-          <a:prstGeom prst="rect">
-            <a:avLst/>
-          </a:prstGeom>
-          <a:noFill/>
-          <a:ln/>
-        </p:spPr>
-        <p:txBody>
-          <a:bodyPr wrap="square" lIns="0" tIns="0" rIns="0" bIns="0" rtlCol="0" anchor="ctr"/>
-          <a:lstStyle/>
-          <a:p>
-            <a:pPr indent="0" marL="0">
-              <a:buNone/>
-            </a:pPr>
-            <a:r>
-              <a:rPr lang="en-US" sz="1800" b="1" spc="150" kern="0" dirty="0">
-                <a:solidFill>
-                  <a:srgbClr val="00A896"/>
+            <a:off x="685800" y="685800"/>
+            <a:ext cx="10820095" cy="274320"/>
+          </a:xfrm>
+          <a:prstGeom prst="rect">
+            <a:avLst/>
+          </a:prstGeom>
+          <a:noFill/>
+          <a:ln/>
+        </p:spPr>
+        <p:txBody>
+          <a:bodyPr wrap="square" lIns="0" tIns="0" rIns="0" bIns="0" rtlCol="0" anchor="t"/>
+          <a:lstStyle/>
+          <a:p>
+            <a:pPr indent="0" marL="0">
+              <a:buNone/>
+            </a:pPr>
+            <a:r>
+              <a:rPr lang="en-US" sz="1400" b="1" spc="200" kern="0" dirty="0">
+                <a:solidFill>
+                  <a:srgbClr val="17A398"/>
                 </a:solidFill>
                 <a:latin typeface="Calibri" pitchFamily="34" charset="0"/>
                 <a:ea typeface="Calibri" pitchFamily="34" charset="-122"/>
@@ -6485,7 +7261,7 @@
               </a:rPr>
               <a:t>DELIVERABLE 2</a:t>
             </a:r>
-            <a:endParaRPr lang="en-US" sz="1800" dirty="0"/>
+            <a:endParaRPr lang="en-US" sz="1400" dirty="0"/>
           </a:p>
         </p:txBody>
       </p:sp>
@@ -6497,26 +7273,26 @@
         </p:nvSpPr>
         <p:spPr>
           <a:xfrm>
-            <a:off x="640080" y="713232"/>
-            <a:ext cx="10881360" cy="868680"/>
-          </a:xfrm>
-          <a:prstGeom prst="rect">
-            <a:avLst/>
-          </a:prstGeom>
-          <a:noFill/>
-          <a:ln/>
-        </p:spPr>
-        <p:txBody>
-          <a:bodyPr wrap="square" lIns="0" tIns="0" rIns="0" bIns="0" rtlCol="0" anchor="ctr"/>
-          <a:lstStyle/>
-          <a:p>
-            <a:pPr indent="0" marL="0">
-              <a:buNone/>
-            </a:pPr>
-            <a:r>
-              <a:rPr lang="en-US" sz="3800" b="1" dirty="0">
-                <a:solidFill>
-                  <a:srgbClr val="0B2B3A"/>
+            <a:off x="685800" y="1024128"/>
+            <a:ext cx="10820095" cy="868680"/>
+          </a:xfrm>
+          <a:prstGeom prst="rect">
+            <a:avLst/>
+          </a:prstGeom>
+          <a:noFill/>
+          <a:ln/>
+        </p:spPr>
+        <p:txBody>
+          <a:bodyPr wrap="square" lIns="0" tIns="0" rIns="0" bIns="0" rtlCol="0" anchor="t"/>
+          <a:lstStyle/>
+          <a:p>
+            <a:pPr indent="0" marL="0">
+              <a:buNone/>
+            </a:pPr>
+            <a:r>
+              <a:rPr lang="en-US" sz="3000" b="1" dirty="0">
+                <a:solidFill>
+                  <a:srgbClr val="12333F"/>
                 </a:solidFill>
                 <a:latin typeface="Cambria" pitchFamily="34" charset="0"/>
                 <a:ea typeface="Cambria" pitchFamily="34" charset="-122"/>
@@ -6524,13 +7300,13 @@
               </a:rPr>
               <a:t>One tank does not cover a working day</a:t>
             </a:r>
-            <a:endParaRPr lang="en-US" sz="3800" dirty="0"/>
+            <a:endParaRPr lang="en-US" sz="3000" dirty="0"/>
           </a:p>
         </p:txBody>
       </p:sp>
       <p:pic>
         <p:nvPicPr>
-          <p:cNvPr id="4" name="Image 0" descr="C:\Users\naman\OneDrive\Documents\doorstep-A07-water-supplies\results\plots\07_tank_feasibility.png">    </p:cNvPr>
+          <p:cNvPr id="4" name="Image 0" descr="C:\Users\naman\OneDrive\Documents\doorstep-A07-water-supplies\paper\figures\tank_feasibility.png">    </p:cNvPr>
           <p:cNvPicPr>
             <a:picLocks noChangeAspect="1"/>
           </p:cNvPicPr>
@@ -6538,14 +7314,13 @@
         </p:nvPicPr>
         <p:blipFill>
           <a:blip r:embed="rId1"/>
-          <a:stretch>
-            <a:fillRect/>
-          </a:stretch>
+          <a:srcRect l="0" r="0" t="0" b="0"/>
+          <a:stretch/>
         </p:blipFill>
         <p:spPr>
           <a:xfrm>
-            <a:off x="640080" y="1737360"/>
-            <a:ext cx="5760720" cy="3749040"/>
+            <a:off x="685800" y="2057400"/>
+            <a:ext cx="6205042" cy="3840480"/>
           </a:xfrm>
           <a:prstGeom prst="rect">
             <a:avLst/>
@@ -6560,26 +7335,29 @@
         </p:nvSpPr>
         <p:spPr>
           <a:xfrm>
-            <a:off x="6766560" y="1783080"/>
-            <a:ext cx="4754880" cy="365760"/>
-          </a:xfrm>
-          <a:prstGeom prst="rect">
-            <a:avLst/>
-          </a:prstGeom>
-          <a:noFill/>
-          <a:ln/>
-        </p:spPr>
-        <p:txBody>
-          <a:bodyPr wrap="square" lIns="0" tIns="0" rIns="0" bIns="0" rtlCol="0" anchor="ctr"/>
-          <a:lstStyle/>
-          <a:p>
-            <a:pPr indent="0" marL="0">
-              <a:buNone/>
-            </a:pPr>
-            <a:r>
-              <a:rPr lang="en-US" sz="1900" b="1" dirty="0">
-                <a:solidFill>
-                  <a:srgbClr val="0B2B3A"/>
+            <a:off x="7146874" y="2057400"/>
+            <a:ext cx="4359021" cy="372364"/>
+          </a:xfrm>
+          <a:prstGeom prst="rect">
+            <a:avLst/>
+          </a:prstGeom>
+          <a:noFill/>
+          <a:ln/>
+        </p:spPr>
+        <p:txBody>
+          <a:bodyPr wrap="square" lIns="0" tIns="0" rIns="0" bIns="0" rtlCol="0" anchor="t"/>
+          <a:lstStyle/>
+          <a:p>
+            <a:pPr indent="0" marL="0">
+              <a:lnSpc>
+                <a:spcPts val="2500"/>
+              </a:lnSpc>
+              <a:buNone/>
+            </a:pPr>
+            <a:r>
+              <a:rPr lang="en-US" sz="1800" b="1" dirty="0">
+                <a:solidFill>
+                  <a:srgbClr val="12333F"/>
                 </a:solidFill>
                 <a:latin typeface="Calibri" pitchFamily="34" charset="0"/>
                 <a:ea typeface="Calibri" pitchFamily="34" charset="-122"/>
@@ -6587,124 +7365,118 @@
               </a:rPr>
               <a:t>Mean refills needed per crew-day</a:t>
             </a:r>
-            <a:endParaRPr lang="en-US" sz="1900" dirty="0"/>
-          </a:p>
-        </p:txBody>
-      </p:sp>
-      <p:sp>
-        <p:nvSpPr>
-          <p:cNvPr id="6" name="Text 3"/>
-          <p:cNvSpPr txBox="1"/>
-          <p:nvPr/>
-        </p:nvSpPr>
-        <p:spPr>
-          <a:xfrm>
-            <a:off x="6766560" y="2286000"/>
-            <a:ext cx="1463040" cy="914400"/>
-          </a:xfrm>
-          <a:prstGeom prst="rect">
-            <a:avLst/>
-          </a:prstGeom>
-          <a:noFill/>
-          <a:ln/>
-        </p:spPr>
-        <p:txBody>
-          <a:bodyPr wrap="square" lIns="0" tIns="0" rIns="0" bIns="0" rtlCol="0" anchor="ctr"/>
-          <a:lstStyle/>
-          <a:p>
-            <a:pPr indent="0" marL="0">
-              <a:buNone/>
-            </a:pPr>
-            <a:r>
-              <a:rPr lang="en-US" sz="6000" b="1" dirty="0">
-                <a:solidFill>
-                  <a:srgbClr val="D9532B"/>
+            <a:endParaRPr lang="en-US" sz="1800" dirty="0"/>
+          </a:p>
+        </p:txBody>
+      </p:sp>
+      <p:sp>
+        <p:nvSpPr>
+          <p:cNvPr id="6" name="Shape 3"/>
+          <p:cNvSpPr/>
+          <p:nvPr/>
+        </p:nvSpPr>
+        <p:spPr>
+          <a:xfrm>
+            <a:off x="7146874" y="2630932"/>
+            <a:ext cx="4359021" cy="1811020"/>
+          </a:xfrm>
+          <a:prstGeom prst="roundRect">
+            <a:avLst>
+              <a:gd name="adj" fmla="val 3029"/>
+            </a:avLst>
+          </a:prstGeom>
+          <a:solidFill>
+            <a:srgbClr val="EDF4F6"/>
+          </a:solidFill>
+          <a:ln w="12700">
+            <a:solidFill>
+              <a:srgbClr val="EDF4F6"/>
+            </a:solidFill>
+            <a:prstDash val="solid"/>
+          </a:ln>
+        </p:spPr>
+      </p:sp>
+      <p:sp>
+        <p:nvSpPr>
+          <p:cNvPr id="7" name="Text 4"/>
+          <p:cNvSpPr txBox="1"/>
+          <p:nvPr/>
+        </p:nvSpPr>
+        <p:spPr>
+          <a:xfrm>
+            <a:off x="7421194" y="2905252"/>
+            <a:ext cx="3810381" cy="893064"/>
+          </a:xfrm>
+          <a:prstGeom prst="rect">
+            <a:avLst/>
+          </a:prstGeom>
+          <a:noFill/>
+          <a:ln/>
+        </p:spPr>
+        <p:txBody>
+          <a:bodyPr wrap="square" lIns="0" tIns="0" rIns="0" bIns="0" rtlCol="0" anchor="t"/>
+          <a:lstStyle/>
+          <a:p>
+            <a:pPr indent="0" marL="0">
+              <a:lnSpc>
+                <a:spcPts val="3300"/>
+              </a:lnSpc>
+              <a:buNone/>
+            </a:pPr>
+            <a:r>
+              <a:rPr lang="en-US" sz="2400" b="1" dirty="0">
+                <a:solidFill>
+                  <a:srgbClr val="0B6E8C"/>
                 </a:solidFill>
                 <a:latin typeface="Cambria" pitchFamily="34" charset="0"/>
                 <a:ea typeface="Cambria" pitchFamily="34" charset="-122"/>
                 <a:cs typeface="Cambria" pitchFamily="34" charset="-120"/>
               </a:rPr>
-              <a:t>0.88</a:t>
-            </a:r>
-            <a:endParaRPr lang="en-US" sz="6000" dirty="0"/>
-          </a:p>
-        </p:txBody>
-      </p:sp>
-      <p:sp>
-        <p:nvSpPr>
-          <p:cNvPr id="7" name="Text 4"/>
-          <p:cNvSpPr txBox="1"/>
-          <p:nvPr/>
-        </p:nvSpPr>
-        <p:spPr>
-          <a:xfrm>
-            <a:off x="6766560" y="3218688"/>
-            <a:ext cx="1463040" cy="777240"/>
-          </a:xfrm>
-          <a:prstGeom prst="rect">
-            <a:avLst/>
-          </a:prstGeom>
-          <a:noFill/>
-          <a:ln/>
-        </p:spPr>
-        <p:txBody>
-          <a:bodyPr wrap="square" lIns="0" tIns="0" rIns="0" bIns="0" rtlCol="0" anchor="ctr"/>
-          <a:lstStyle/>
-          <a:p>
-            <a:pPr indent="0" marL="0">
-              <a:buNone/>
-            </a:pPr>
-            <a:r>
-              <a:rPr lang="en-US" sz="1800" dirty="0">
-                <a:solidFill>
-                  <a:srgbClr val="5A6B73"/>
+              <a:t>0.88   ·   0.45   ·   0.26</a:t>
+            </a:r>
+            <a:endParaRPr lang="en-US" sz="2400" dirty="0"/>
+          </a:p>
+        </p:txBody>
+      </p:sp>
+      <p:sp>
+        <p:nvSpPr>
+          <p:cNvPr id="8" name="Text 5"/>
+          <p:cNvSpPr txBox="1"/>
+          <p:nvPr/>
+        </p:nvSpPr>
+        <p:spPr>
+          <a:xfrm>
+            <a:off x="7421194" y="3871468"/>
+            <a:ext cx="3810381" cy="296164"/>
+          </a:xfrm>
+          <a:prstGeom prst="rect">
+            <a:avLst/>
+          </a:prstGeom>
+          <a:noFill/>
+          <a:ln/>
+        </p:spPr>
+        <p:txBody>
+          <a:bodyPr wrap="square" lIns="0" tIns="0" rIns="0" bIns="0" rtlCol="0" anchor="t"/>
+          <a:lstStyle/>
+          <a:p>
+            <a:pPr indent="0" marL="0">
+              <a:lnSpc>
+                <a:spcPts val="1900"/>
+              </a:lnSpc>
+              <a:buNone/>
+            </a:pPr>
+            <a:r>
+              <a:rPr lang="en-US" sz="1400" dirty="0">
+                <a:solidFill>
+                  <a:srgbClr val="68808B"/>
                 </a:solidFill>
                 <a:latin typeface="Calibri" pitchFamily="34" charset="0"/>
                 <a:ea typeface="Calibri" pitchFamily="34" charset="-122"/>
                 <a:cs typeface="Calibri" pitchFamily="34" charset="-120"/>
               </a:rPr>
-              <a:t>200 L van</a:t>
-            </a:r>
-            <a:endParaRPr lang="en-US" sz="1800" dirty="0"/>
-          </a:p>
-        </p:txBody>
-      </p:sp>
-      <p:sp>
-        <p:nvSpPr>
-          <p:cNvPr id="8" name="Text 5"/>
-          <p:cNvSpPr txBox="1"/>
-          <p:nvPr/>
-        </p:nvSpPr>
-        <p:spPr>
-          <a:xfrm>
-            <a:off x="8412480" y="2286000"/>
-            <a:ext cx="1463040" cy="914400"/>
-          </a:xfrm>
-          <a:prstGeom prst="rect">
-            <a:avLst/>
-          </a:prstGeom>
-          <a:noFill/>
-          <a:ln/>
-        </p:spPr>
-        <p:txBody>
-          <a:bodyPr wrap="square" lIns="0" tIns="0" rIns="0" bIns="0" rtlCol="0" anchor="ctr"/>
-          <a:lstStyle/>
-          <a:p>
-            <a:pPr indent="0" marL="0">
-              <a:buNone/>
-            </a:pPr>
-            <a:r>
-              <a:rPr lang="en-US" sz="6000" b="1" dirty="0">
-                <a:solidFill>
-                  <a:srgbClr val="065A82"/>
-                </a:solidFill>
-                <a:latin typeface="Cambria" pitchFamily="34" charset="0"/>
-                <a:ea typeface="Cambria" pitchFamily="34" charset="-122"/>
-                <a:cs typeface="Cambria" pitchFamily="34" charset="-120"/>
-              </a:rPr>
-              <a:t>0.45</a:t>
-            </a:r>
-            <a:endParaRPr lang="en-US" sz="6000" dirty="0"/>
+              <a:t>200 L        280 L        350 L</a:t>
+            </a:r>
+            <a:endParaRPr lang="en-US" sz="1400" dirty="0"/>
           </a:p>
         </p:txBody>
       </p:sp>
@@ -6716,32 +7488,35 @@
         </p:nvSpPr>
         <p:spPr>
           <a:xfrm>
-            <a:off x="8412480" y="3218688"/>
-            <a:ext cx="1463040" cy="777240"/>
-          </a:xfrm>
-          <a:prstGeom prst="rect">
-            <a:avLst/>
-          </a:prstGeom>
-          <a:noFill/>
-          <a:ln/>
-        </p:spPr>
-        <p:txBody>
-          <a:bodyPr wrap="square" lIns="0" tIns="0" rIns="0" bIns="0" rtlCol="0" anchor="ctr"/>
-          <a:lstStyle/>
-          <a:p>
-            <a:pPr indent="0" marL="0">
-              <a:buNone/>
-            </a:pPr>
-            <a:r>
-              <a:rPr lang="en-US" sz="1800" dirty="0">
-                <a:solidFill>
-                  <a:srgbClr val="5A6B73"/>
+            <a:off x="7146874" y="4697984"/>
+            <a:ext cx="4359021" cy="1007364"/>
+          </a:xfrm>
+          <a:prstGeom prst="rect">
+            <a:avLst/>
+          </a:prstGeom>
+          <a:noFill/>
+          <a:ln/>
+        </p:spPr>
+        <p:txBody>
+          <a:bodyPr wrap="square" lIns="0" tIns="0" rIns="0" bIns="0" rtlCol="0" anchor="t"/>
+          <a:lstStyle/>
+          <a:p>
+            <a:pPr indent="0" marL="0">
+              <a:lnSpc>
+                <a:spcPts val="2500"/>
+              </a:lnSpc>
+              <a:buNone/>
+            </a:pPr>
+            <a:r>
+              <a:rPr lang="en-US" sz="1800" b="1" dirty="0">
+                <a:solidFill>
+                  <a:srgbClr val="0B6E8C"/>
                 </a:solidFill>
                 <a:latin typeface="Calibri" pitchFamily="34" charset="0"/>
                 <a:ea typeface="Calibri" pitchFamily="34" charset="-122"/>
                 <a:cs typeface="Calibri" pitchFamily="34" charset="-120"/>
               </a:rPr>
-              <a:t>280 L van</a:t>
+              <a:t>A fifth of small-van days need two or more. For fleet sizing that is the difference — not jobs per fill.</a:t>
             </a:r>
             <a:endParaRPr lang="en-US" sz="1800" dirty="0"/>
           </a:p>
@@ -6755,144 +7530,34 @@
         </p:nvSpPr>
         <p:spPr>
           <a:xfrm>
-            <a:off x="10058400" y="2286000"/>
-            <a:ext cx="1463040" cy="914400"/>
-          </a:xfrm>
-          <a:prstGeom prst="rect">
-            <a:avLst/>
-          </a:prstGeom>
-          <a:noFill/>
-          <a:ln/>
-        </p:spPr>
-        <p:txBody>
-          <a:bodyPr wrap="square" lIns="0" tIns="0" rIns="0" bIns="0" rtlCol="0" anchor="ctr"/>
-          <a:lstStyle/>
-          <a:p>
-            <a:pPr indent="0" marL="0">
-              <a:buNone/>
-            </a:pPr>
-            <a:r>
-              <a:rPr lang="en-US" sz="6000" b="1" dirty="0">
-                <a:solidFill>
-                  <a:srgbClr val="00A896"/>
-                </a:solidFill>
-                <a:latin typeface="Cambria" pitchFamily="34" charset="0"/>
-                <a:ea typeface="Cambria" pitchFamily="34" charset="-122"/>
-                <a:cs typeface="Cambria" pitchFamily="34" charset="-120"/>
-              </a:rPr>
-              <a:t>0.26</a:t>
-            </a:r>
-            <a:endParaRPr lang="en-US" sz="6000" dirty="0"/>
-          </a:p>
-        </p:txBody>
-      </p:sp>
-      <p:sp>
-        <p:nvSpPr>
-          <p:cNvPr id="11" name="Text 8"/>
-          <p:cNvSpPr txBox="1"/>
-          <p:nvPr/>
-        </p:nvSpPr>
-        <p:spPr>
-          <a:xfrm>
-            <a:off x="10058400" y="3218688"/>
-            <a:ext cx="1463040" cy="777240"/>
-          </a:xfrm>
-          <a:prstGeom prst="rect">
-            <a:avLst/>
-          </a:prstGeom>
-          <a:noFill/>
-          <a:ln/>
-        </p:spPr>
-        <p:txBody>
-          <a:bodyPr wrap="square" lIns="0" tIns="0" rIns="0" bIns="0" rtlCol="0" anchor="ctr"/>
-          <a:lstStyle/>
-          <a:p>
-            <a:pPr indent="0" marL="0">
-              <a:buNone/>
-            </a:pPr>
-            <a:r>
-              <a:rPr lang="en-US" sz="1800" dirty="0">
-                <a:solidFill>
-                  <a:srgbClr val="5A6B73"/>
+            <a:off x="685800" y="6327648"/>
+            <a:ext cx="10820095" cy="237744"/>
+          </a:xfrm>
+          <a:prstGeom prst="rect">
+            <a:avLst/>
+          </a:prstGeom>
+          <a:noFill/>
+          <a:ln/>
+        </p:spPr>
+        <p:txBody>
+          <a:bodyPr wrap="square" lIns="0" tIns="0" rIns="0" bIns="0" rtlCol="0" anchor="t"/>
+          <a:lstStyle/>
+          <a:p>
+            <a:pPr indent="0" marL="0">
+              <a:buNone/>
+            </a:pPr>
+            <a:r>
+              <a:rPr lang="en-US" sz="1100" dirty="0">
+                <a:solidFill>
+                  <a:srgbClr val="68808B"/>
                 </a:solidFill>
                 <a:latin typeface="Calibri" pitchFamily="34" charset="0"/>
                 <a:ea typeface="Calibri" pitchFamily="34" charset="-122"/>
                 <a:cs typeface="Calibri" pitchFamily="34" charset="-120"/>
               </a:rPr>
-              <a:t>350 L van</a:t>
-            </a:r>
-            <a:endParaRPr lang="en-US" sz="1800" dirty="0"/>
-          </a:p>
-        </p:txBody>
-      </p:sp>
-      <p:sp>
-        <p:nvSpPr>
-          <p:cNvPr id="12" name="Text 9"/>
-          <p:cNvSpPr txBox="1"/>
-          <p:nvPr/>
-        </p:nvSpPr>
-        <p:spPr>
-          <a:xfrm>
-            <a:off x="6766560" y="3977640"/>
-            <a:ext cx="4754880" cy="2011680"/>
-          </a:xfrm>
-          <a:prstGeom prst="rect">
-            <a:avLst/>
-          </a:prstGeom>
-          <a:noFill/>
-          <a:ln/>
-        </p:spPr>
-        <p:txBody>
-          <a:bodyPr wrap="square" lIns="0" tIns="0" rIns="0" bIns="0" rtlCol="0" anchor="ctr"/>
-          <a:lstStyle/>
-          <a:p>
-            <a:pPr indent="0" marL="0">
-              <a:lnSpc>
-                <a:spcPts val="2600"/>
-              </a:lnSpc>
-              <a:buNone/>
-            </a:pPr>
-            <a:r>
-              <a:rPr lang="en-US" sz="1800" dirty="0">
-                <a:solidFill>
-                  <a:srgbClr val="0B2B3A"/>
-                </a:solidFill>
-                <a:latin typeface="Calibri" pitchFamily="34" charset="0"/>
-                <a:ea typeface="Calibri" pitchFamily="34" charset="-122"/>
-                <a:cs typeface="Calibri" pitchFamily="34" charset="-120"/>
-              </a:rPr>
-              <a:t>A fifth of small-van days need two or more refills. Refilling is normal operation, not an exception.</a:t>
-            </a:r>
-            <a:endParaRPr lang="en-US" sz="1800" dirty="0"/>
-          </a:p>
-          <a:p>
-            <a:pPr indent="0" marL="0">
-              <a:lnSpc>
-                <a:spcPts val="2600"/>
-              </a:lnSpc>
-              <a:buNone/>
-            </a:pPr>
-            <a:endParaRPr lang="en-US" sz="1800" dirty="0"/>
-          </a:p>
-          <a:p>
-            <a:pPr indent="0" marL="0">
-              <a:lnSpc>
-                <a:spcPts val="2600"/>
-              </a:lnSpc>
-              <a:buNone/>
-            </a:pPr>
-            <a:r>
-              <a:rPr lang="en-US" sz="1800" dirty="0">
-                <a:solidFill>
-                  <a:srgbClr val="0B2B3A"/>
-                </a:solidFill>
-                <a:latin typeface="Calibri" pitchFamily="34" charset="0"/>
-                <a:ea typeface="Calibri" pitchFamily="34" charset="-122"/>
-                <a:cs typeface="Calibri" pitchFamily="34" charset="-120"/>
-              </a:rPr>
-              <a:t>For fleet planning the real difference between a 200 L and a 350 L van is not jobs per fill — it is 0.88 against 0.26 interruptions a day, each costing travel to a water source.</a:t>
-            </a:r>
-            <a:endParaRPr lang="en-US" sz="1800" dirty="0"/>
+              <a:t>8,342 crew-days · results/refill_planning.csv</a:t>
+            </a:r>
+            <a:endParaRPr lang="en-US" sz="1100" dirty="0"/>
           </a:p>
         </p:txBody>
       </p:sp>

--- a/paper/A7_slides.pptx
+++ b/paper/A7_slides.pptx
@@ -4609,7 +4609,7 @@
         </p:nvSpPr>
         <p:spPr>
           <a:xfrm>
-            <a:off x="685800" y="3703320"/>
+            <a:off x="685800" y="2697480"/>
             <a:ext cx="2513000" cy="534924"/>
           </a:xfrm>
           <a:prstGeom prst="rect">
@@ -4651,7 +4651,7 @@
         </p:nvSpPr>
         <p:spPr>
           <a:xfrm>
-            <a:off x="685800" y="4274820"/>
+            <a:off x="685800" y="3268980"/>
             <a:ext cx="2513000" cy="286004"/>
           </a:xfrm>
           <a:prstGeom prst="rect">
@@ -4693,7 +4693,7 @@
         </p:nvSpPr>
         <p:spPr>
           <a:xfrm>
-            <a:off x="4377842" y="3703320"/>
+            <a:off x="4377842" y="2697480"/>
             <a:ext cx="2513000" cy="534924"/>
           </a:xfrm>
           <a:prstGeom prst="rect">
@@ -4735,8 +4735,8 @@
         </p:nvSpPr>
         <p:spPr>
           <a:xfrm>
-            <a:off x="4377842" y="4274820"/>
-            <a:ext cx="2513000" cy="517144"/>
+            <a:off x="4377842" y="3268980"/>
+            <a:ext cx="2513000" cy="286004"/>
           </a:xfrm>
           <a:prstGeom prst="rect">
             <a:avLst/>
@@ -4777,7 +4777,7 @@
         </p:nvSpPr>
         <p:spPr>
           <a:xfrm>
-            <a:off x="8069885" y="3703320"/>
+            <a:off x="8069885" y="2697480"/>
             <a:ext cx="3436010" cy="534924"/>
           </a:xfrm>
           <a:prstGeom prst="rect">
@@ -4819,7 +4819,7 @@
         </p:nvSpPr>
         <p:spPr>
           <a:xfrm>
-            <a:off x="8069885" y="4274820"/>
+            <a:off x="8069885" y="3268980"/>
             <a:ext cx="3436010" cy="286004"/>
           </a:xfrm>
           <a:prstGeom prst="rect">
@@ -4853,6 +4853,29 @@
           </a:p>
         </p:txBody>
       </p:sp>
+      <p:pic>
+        <p:nvPicPr>
+          <p:cNvPr id="11" name="Image 0" descr="C:\Users\naman\OneDrive\Documents\doorstep-A07-water-supplies\paper\figures\crew_day_load.png">    </p:cNvPr>
+          <p:cNvPicPr>
+            <a:picLocks noChangeAspect="1"/>
+          </p:cNvPicPr>
+          <p:nvPr/>
+        </p:nvPicPr>
+        <p:blipFill>
+          <a:blip r:embed="rId1"/>
+          <a:srcRect l="0" r="0" t="0" b="0"/>
+          <a:stretch/>
+        </p:blipFill>
+        <p:spPr>
+          <a:xfrm>
+            <a:off x="685800" y="4023360"/>
+            <a:ext cx="10820095" cy="1828800"/>
+          </a:xfrm>
+          <a:prstGeom prst="rect">
+            <a:avLst/>
+          </a:prstGeom>
+        </p:spPr>
+      </p:pic>
     </p:spTree>
   </p:cSld>
   <p:clrMapOvr>
@@ -5037,11 +5060,11 @@
         <p:spPr>
           <a:xfrm>
             <a:off x="7146874" y="2057400"/>
-            <a:ext cx="4359021" cy="3762248"/>
+            <a:ext cx="4359021" cy="3520948"/>
           </a:xfrm>
           <a:prstGeom prst="roundRect">
             <a:avLst>
-              <a:gd name="adj" fmla="val 1458"/>
+              <a:gd name="adj" fmla="val 1558"/>
             </a:avLst>
           </a:prstGeom>
           <a:solidFill>
@@ -5230,7 +5253,7 @@
         <p:spPr>
           <a:xfrm>
             <a:off x="7421194" y="5007864"/>
-            <a:ext cx="3810381" cy="537464"/>
+            <a:ext cx="3810381" cy="296164"/>
           </a:xfrm>
           <a:prstGeom prst="rect">
             <a:avLst/>
@@ -6211,6 +6234,87 @@
           </a:p>
         </p:txBody>
       </p:sp>
+      <p:sp>
+        <p:nvSpPr>
+          <p:cNvPr id="15" name="Text 13"/>
+          <p:cNvSpPr txBox="1"/>
+          <p:nvPr/>
+        </p:nvSpPr>
+        <p:spPr>
+          <a:xfrm>
+            <a:off x="685800" y="5742432"/>
+            <a:ext cx="10820095" cy="296164"/>
+          </a:xfrm>
+          <a:prstGeom prst="rect">
+            <a:avLst/>
+          </a:prstGeom>
+          <a:noFill/>
+          <a:ln/>
+        </p:spPr>
+        <p:txBody>
+          <a:bodyPr wrap="square" lIns="0" tIns="0" rIns="0" bIns="0" rtlCol="0" anchor="t"/>
+          <a:lstStyle/>
+          <a:p>
+            <a:pPr indent="0" marL="0">
+              <a:lnSpc>
+                <a:spcPts val="1900"/>
+              </a:lnSpc>
+              <a:buNone/>
+            </a:pPr>
+            <a:r>
+              <a:rPr lang="en-US" sz="1400" dirty="0">
+                <a:solidFill>
+                  <a:srgbClr val="68808B"/>
+                </a:solidFill>
+                <a:latin typeface="Calibri" pitchFamily="34" charset="0"/>
+                <a:ea typeface="Calibri" pitchFamily="34" charset="-122"/>
+                <a:cs typeface="Calibri" pitchFamily="34" charset="-120"/>
+              </a:rPr>
+              <a:t>A test enforces the split: planning features never include dirtiness, and no post-job column reaches either stage.</a:t>
+            </a:r>
+            <a:endParaRPr lang="en-US" sz="1400" dirty="0"/>
+          </a:p>
+        </p:txBody>
+      </p:sp>
+      <p:sp>
+        <p:nvSpPr>
+          <p:cNvPr id="16" name="Text 14"/>
+          <p:cNvSpPr txBox="1"/>
+          <p:nvPr/>
+        </p:nvSpPr>
+        <p:spPr>
+          <a:xfrm>
+            <a:off x="685800" y="6327648"/>
+            <a:ext cx="10820095" cy="237744"/>
+          </a:xfrm>
+          <a:prstGeom prst="rect">
+            <a:avLst/>
+          </a:prstGeom>
+          <a:noFill/>
+          <a:ln/>
+        </p:spPr>
+        <p:txBody>
+          <a:bodyPr wrap="square" lIns="0" tIns="0" rIns="0" bIns="0" rtlCol="0" anchor="t"/>
+          <a:lstStyle/>
+          <a:p>
+            <a:pPr indent="0" marL="0">
+              <a:buNone/>
+            </a:pPr>
+            <a:r>
+              <a:rPr lang="en-US" sz="1100" dirty="0">
+                <a:solidFill>
+                  <a:srgbClr val="68808B"/>
+                </a:solidFill>
+                <a:latin typeface="Calibri" pitchFamily="34" charset="0"/>
+                <a:ea typeface="Calibri" pitchFamily="34" charset="-122"/>
+                <a:cs typeface="Calibri" pitchFamily="34" charset="-120"/>
+              </a:rPr>
+              <a:t>Held-out test split · mean of ten seeds · results/consumption_model.csv</a:t>
+            </a:r>
+            <a:endParaRPr lang="en-US" sz="1100" dirty="0"/>
+          </a:p>
+        </p:txBody>
+      </p:sp>
     </p:spTree>
   </p:cSld>
   <p:clrMapOvr>
@@ -6690,11 +6794,11 @@
         <p:spPr>
           <a:xfrm>
             <a:off x="685800" y="2985008"/>
-            <a:ext cx="10820095" cy="1441704"/>
+            <a:ext cx="10820095" cy="1022604"/>
           </a:xfrm>
           <a:prstGeom prst="roundRect">
             <a:avLst>
-              <a:gd name="adj" fmla="val 3805"/>
+              <a:gd name="adj" fmla="val 5365"/>
             </a:avLst>
           </a:prstGeom>
           <a:solidFill>
@@ -6717,7 +6821,7 @@
         <p:spPr>
           <a:xfrm>
             <a:off x="960120" y="3259328"/>
-            <a:ext cx="10271455" cy="893064"/>
+            <a:ext cx="10271455" cy="473964"/>
           </a:xfrm>
           <a:prstGeom prst="rect">
             <a:avLst/>
@@ -6750,16 +6854,39 @@
           </a:p>
         </p:txBody>
       </p:sp>
-      <p:sp>
-        <p:nvSpPr>
-          <p:cNvPr id="7" name="Text 5"/>
-          <p:cNvSpPr txBox="1"/>
-          <p:nvPr/>
-        </p:nvSpPr>
-        <p:spPr>
-          <a:xfrm>
-            <a:off x="685800" y="4701032"/>
-            <a:ext cx="5282032" cy="689864"/>
+      <p:pic>
+        <p:nvPicPr>
+          <p:cNvPr id="7" name="Image 0" descr="C:\Users\naman\OneDrive\Documents\doorstep-A07-water-supplies\paper\figures\model_spread.png">    </p:cNvPr>
+          <p:cNvPicPr>
+            <a:picLocks noChangeAspect="1"/>
+          </p:cNvPicPr>
+          <p:nvPr/>
+        </p:nvPicPr>
+        <p:blipFill>
+          <a:blip r:embed="rId1"/>
+          <a:srcRect l="0" r="0" t="0" b="0"/>
+          <a:stretch/>
+        </p:blipFill>
+        <p:spPr>
+          <a:xfrm>
+            <a:off x="685800" y="4227068"/>
+            <a:ext cx="6205042" cy="1600200"/>
+          </a:xfrm>
+          <a:prstGeom prst="rect">
+            <a:avLst/>
+          </a:prstGeom>
+        </p:spPr>
+      </p:pic>
+      <p:sp>
+        <p:nvSpPr>
+          <p:cNvPr id="8" name="Text 5"/>
+          <p:cNvSpPr txBox="1"/>
+          <p:nvPr/>
+        </p:nvSpPr>
+        <p:spPr>
+          <a:xfrm>
+            <a:off x="7146874" y="4227068"/>
+            <a:ext cx="4359021" cy="778764"/>
           </a:xfrm>
           <a:prstGeom prst="rect">
             <a:avLst/>
@@ -6773,64 +6900,61 @@
           <a:p>
             <a:pPr indent="0" marL="0">
               <a:lnSpc>
-                <a:spcPts val="2500"/>
+                <a:spcPts val="1900"/>
               </a:lnSpc>
               <a:buNone/>
             </a:pPr>
             <a:r>
-              <a:rPr lang="en-US" sz="1800" dirty="0">
-                <a:solidFill>
-                  <a:srgbClr val="12333F"/>
+              <a:rPr lang="en-US" sz="1400" dirty="0">
+                <a:solidFill>
+                  <a:srgbClr val="68808B"/>
                 </a:solidFill>
                 <a:latin typeface="Calibri" pitchFamily="34" charset="0"/>
                 <a:ea typeface="Calibri" pitchFamily="34" charset="-122"/>
                 <a:cs typeface="Calibri" pitchFamily="34" charset="-120"/>
               </a:rPr>
-              <a:t>From one split, the ranking would be an artefact of which rows landed in the test set.</a:t>
-            </a:r>
-            <a:endParaRPr lang="en-US" sz="1800" dirty="0"/>
-          </a:p>
-        </p:txBody>
-      </p:sp>
-      <p:sp>
-        <p:nvSpPr>
-          <p:cNvPr id="8" name="Text 6"/>
-          <p:cNvSpPr txBox="1"/>
-          <p:nvPr/>
-        </p:nvSpPr>
-        <p:spPr>
-          <a:xfrm>
-            <a:off x="6223864" y="4701032"/>
-            <a:ext cx="5282032" cy="689864"/>
-          </a:xfrm>
-          <a:prstGeom prst="rect">
-            <a:avLst/>
-          </a:prstGeom>
-          <a:noFill/>
-          <a:ln/>
-        </p:spPr>
-        <p:txBody>
-          <a:bodyPr wrap="square" lIns="0" tIns="0" rIns="0" bIns="0" rtlCol="0" anchor="t"/>
-          <a:lstStyle/>
-          <a:p>
-            <a:pPr indent="0" marL="0">
-              <a:lnSpc>
-                <a:spcPts val="2500"/>
-              </a:lnSpc>
-              <a:buNone/>
-            </a:pPr>
-            <a:r>
-              <a:rPr lang="en-US" sz="1800" dirty="0">
-                <a:solidFill>
-                  <a:srgbClr val="12333F"/>
+              <a:t>From one split the ranking would be an artefact. We take the simplest family within 1% of the best — the cell mean.</a:t>
+            </a:r>
+            <a:endParaRPr lang="en-US" sz="1400" dirty="0"/>
+          </a:p>
+        </p:txBody>
+      </p:sp>
+      <p:sp>
+        <p:nvSpPr>
+          <p:cNvPr id="9" name="Text 6"/>
+          <p:cNvSpPr txBox="1"/>
+          <p:nvPr/>
+        </p:nvSpPr>
+        <p:spPr>
+          <a:xfrm>
+            <a:off x="685800" y="6327648"/>
+            <a:ext cx="10820095" cy="237744"/>
+          </a:xfrm>
+          <a:prstGeom prst="rect">
+            <a:avLst/>
+          </a:prstGeom>
+          <a:noFill/>
+          <a:ln/>
+        </p:spPr>
+        <p:txBody>
+          <a:bodyPr wrap="square" lIns="0" tIns="0" rIns="0" bIns="0" rtlCol="0" anchor="t"/>
+          <a:lstStyle/>
+          <a:p>
+            <a:pPr indent="0" marL="0">
+              <a:buNone/>
+            </a:pPr>
+            <a:r>
+              <a:rPr lang="en-US" sz="1100" dirty="0">
+                <a:solidFill>
+                  <a:srgbClr val="68808B"/>
                 </a:solidFill>
                 <a:latin typeface="Calibri" pitchFamily="34" charset="0"/>
                 <a:ea typeface="Calibri" pitchFamily="34" charset="-122"/>
                 <a:cs typeface="Calibri" pitchFamily="34" charset="-120"/>
               </a:rPr>
-              <a:t>We take the simplest family within 1% of the best — the cell mean — at both stages.</a:t>
-            </a:r>
-            <a:endParaRPr lang="en-US" sz="1800" dirty="0"/>
+              <a:t>Ten seeds, planning stage · results/model_comparison.csv</a:t>
+            </a:r>
+            <a:endParaRPr lang="en-US" sz="1100" dirty="0"/>
           </a:p>
         </p:txBody>
       </p:sp>
